--- a/docs/Pratirup_Presentation.pptx
+++ b/docs/Pratirup_Presentation.pptx
@@ -23,9 +23,10 @@
     <p:sldId id="271" r:id="rId17"/>
     <p:sldId id="272" r:id="rId18"/>
     <p:sldId id="273" r:id="rId19"/>
+    <p:sldId id="274" r:id="rId20"/>
   </p:sldIdLst>
   <p:notesMasterIdLst>
-    <p:notesMasterId r:id="rId20"/>
+    <p:notesMasterId r:id="rId21"/>
   </p:notesMasterIdLst>
   <p:sldSz cx="12192000" cy="6858000"/>
   <p:notesSz cx="6858000" cy="12192000"/>
@@ -124,27 +125,27 @@
   <p:extLst>
     <p:ext uri="{521415D9-36F7-43E2-AB2F-B90AF26B5E84}">
       <p14:sectionLst xmlns:p14="http://schemas.microsoft.com/office/powerpoint/2010/main">
-        <p14:section name="Opening" id="{a03e122e-7acf-6962-e408-93d44bc4fc0a}">
+        <p14:section name="Opening" id="{01ccd4fa-d8d2-dbf2-03bb-b2f4ca0f6ba2}">
           <p14:sldIdLst>
             <p14:sldId id="256"/>
             <p14:sldId id="257"/>
           </p14:sldIdLst>
         </p14:section>
-        <p14:section name="Problem" id="{90d4a2ea-8d36-10cb-bda7-e2a6a61d833a}">
+        <p14:section name="Problem" id="{ea331a30-97e4-303b-d878-128be1a2f9ec}">
           <p14:sldIdLst>
             <p14:sldId id="258"/>
             <p14:sldId id="259"/>
             <p14:sldId id="260"/>
           </p14:sldIdLst>
         </p14:section>
-        <p14:section name="Solution" id="{beab2f41-7030-b493-65ba-7a504e892e3a}">
+        <p14:section name="Solution" id="{3a25caf8-446a-3681-4f7e-3e19b1c9a15d}">
           <p14:sldIdLst>
             <p14:sldId id="261"/>
             <p14:sldId id="262"/>
             <p14:sldId id="263"/>
           </p14:sldIdLst>
         </p14:section>
-        <p14:section name="Evidence" id="{ddd991e2-b062-545f-f478-ebd24d33b563}">
+        <p14:section name="Evidence" id="{2b0643ec-1c92-f8a2-c8af-45afe73c4053}">
           <p14:sldIdLst>
             <p14:sldId id="264"/>
             <p14:sldId id="265"/>
@@ -152,14 +153,15 @@
             <p14:sldId id="267"/>
             <p14:sldId id="268"/>
             <p14:sldId id="269"/>
+            <p14:sldId id="270"/>
           </p14:sldIdLst>
         </p14:section>
-        <p14:section name="Product" id="{6d96a122-bc9a-99bf-14b9-93e79f4b8fc8}">
+        <p14:section name="Product" id="{1cbf5f43-b435-a26f-da74-447e17152f07}">
           <p14:sldIdLst>
-            <p14:sldId id="270"/>
             <p14:sldId id="271"/>
             <p14:sldId id="272"/>
             <p14:sldId id="273"/>
+            <p14:sldId id="274"/>
           </p14:sldIdLst>
         </p14:section>
       </p14:sectionLst>
@@ -304,6 +306,89 @@
               <c:strCache>
                 <c:ptCount val="1"/>
                 <c:pt idx="0">
+                  <c:v>Chronos-Bolt (zero-shot)</c:v>
+                </c:pt>
+              </c:strCache>
+            </c:strRef>
+          </c:tx>
+          <c:spPr>
+            <a:solidFill>
+              <a:srgbClr val="D9B99B"/>
+            </a:solidFill>
+            <a:effectLst/>
+          </c:spPr>
+          <c:invertIfNegative val="0"/>
+          <c:dLbls>
+            <c:numFmt formatCode="0.0" sourceLinked="0"/>
+            <c:txPr>
+              <a:bodyPr/>
+              <a:lstStyle/>
+              <a:p>
+                <a:pPr>
+                  <a:defRPr b="0" i="0" strike="noStrike" sz="1000" u="none">
+                    <a:solidFill>
+                      <a:srgbClr val="15232A"/>
+                    </a:solidFill>
+                    <a:latin typeface="Calibri"/>
+                  </a:defRPr>
+                </a:pPr>
+              </a:p>
+            </c:txPr>
+            <c:showLegendKey val="0"/>
+            <c:showVal val="1"/>
+            <c:showCatName val="0"/>
+            <c:showSerName val="0"/>
+            <c:showPercent val="0"/>
+            <c:showBubbleSize val="0"/>
+            <c:showLeaderLines val="0"/>
+          </c:dLbls>
+          <c:cat>
+            <c:multiLvlStrRef>
+              <c:f>Sheet1!$A$2:$A$4</c:f>
+              <c:multiLvlStrCache>
+                <c:ptCount val="3"/>
+                <c:lvl>
+                  <c:pt idx="0">
+                    <c:v>+30 min</c:v>
+                  </c:pt>
+                  <c:pt idx="1">
+                    <c:v>+60 min</c:v>
+                  </c:pt>
+                  <c:pt idx="2">
+                    <c:v>+120 min (exploratory)</c:v>
+                  </c:pt>
+                </c:lvl>
+              </c:multiLvlStrCache>
+            </c:multiLvlStrRef>
+          </c:cat>
+          <c:val>
+            <c:numRef>
+              <c:f>Sheet1!$C$2:$C$4</c:f>
+              <c:numCache>
+                <c:formatCode>General</c:formatCode>
+                <c:ptCount val="3"/>
+                <c:pt idx="0">
+                  <c:v>11.3</c:v>
+                </c:pt>
+                <c:pt idx="1">
+                  <c:v>18.7</c:v>
+                </c:pt>
+                <c:pt idx="2">
+                  <c:v>27.7</c:v>
+                </c:pt>
+              </c:numCache>
+            </c:numRef>
+          </c:val>
+        </c:ser>
+        <c:ser>
+          <c:idx val="2"/>
+          <c:order val="2"/>
+          <c:tx>
+            <c:strRef>
+              <c:f>Sheet1!$D$1</c:f>
+              <c:strCache>
+                <c:ptCount val="1"/>
+                <c:pt idx="0">
                   <c:v>Linear autoregression</c:v>
                 </c:pt>
               </c:strCache>
@@ -361,7 +446,7 @@
           </c:cat>
           <c:val>
             <c:numRef>
-              <c:f>Sheet1!$C$2:$C$4</c:f>
+              <c:f>Sheet1!$D$2:$D$4</c:f>
               <c:numCache>
                 <c:formatCode>General</c:formatCode>
                 <c:ptCount val="3"/>
@@ -379,11 +464,11 @@
           </c:val>
         </c:ser>
         <c:ser>
-          <c:idx val="2"/>
-          <c:order val="2"/>
+          <c:idx val="3"/>
+          <c:order val="3"/>
           <c:tx>
             <c:strRef>
-              <c:f>Sheet1!$D$1</c:f>
+              <c:f>Sheet1!$E$1</c:f>
               <c:strCache>
                 <c:ptCount val="1"/>
                 <c:pt idx="0">
@@ -444,7 +529,7 @@
           </c:cat>
           <c:val>
             <c:numRef>
-              <c:f>Sheet1!$D$2:$D$4</c:f>
+              <c:f>Sheet1!$E$2:$E$4</c:f>
               <c:numCache>
                 <c:formatCode>General</c:formatCode>
                 <c:ptCount val="3"/>
@@ -462,11 +547,11 @@
           </c:val>
         </c:ser>
         <c:ser>
-          <c:idx val="3"/>
-          <c:order val="3"/>
+          <c:idx val="4"/>
+          <c:order val="4"/>
           <c:tx>
             <c:strRef>
-              <c:f>Sheet1!$E$1</c:f>
+              <c:f>Sheet1!$F$1</c:f>
               <c:strCache>
                 <c:ptCount val="1"/>
                 <c:pt idx="0">
@@ -527,18 +612,18 @@
           </c:cat>
           <c:val>
             <c:numRef>
-              <c:f>Sheet1!$E$2:$E$4</c:f>
+              <c:f>Sheet1!$F$2:$F$4</c:f>
               <c:numCache>
                 <c:formatCode>General</c:formatCode>
                 <c:ptCount val="3"/>
                 <c:pt idx="0">
-                  <c:v>8.6</c:v>
+                  <c:v>8.8</c:v>
                 </c:pt>
                 <c:pt idx="1">
-                  <c:v>14.8</c:v>
+                  <c:v>14.9</c:v>
                 </c:pt>
                 <c:pt idx="2">
-                  <c:v>20.3</c:v>
+                  <c:v>20.5</c:v>
                 </c:pt>
               </c:numCache>
             </c:numRef>
@@ -881,19 +966,19 @@
                 <c:formatCode>General</c:formatCode>
                 <c:ptCount val="5"/>
                 <c:pt idx="0">
-                  <c:v>16.09</c:v>
+                  <c:v>16.21</c:v>
                 </c:pt>
                 <c:pt idx="1">
-                  <c:v>15.73</c:v>
+                  <c:v>15.88</c:v>
                 </c:pt>
                 <c:pt idx="2">
-                  <c:v>15.79</c:v>
+                  <c:v>15.98</c:v>
                 </c:pt>
                 <c:pt idx="3">
-                  <c:v>14.76</c:v>
+                  <c:v>14.9</c:v>
                 </c:pt>
                 <c:pt idx="4">
-                  <c:v>14.74</c:v>
+                  <c:v>14.88</c:v>
                 </c:pt>
               </c:numCache>
             </c:numRef>
@@ -1045,6 +1130,553 @@
 </file>
 
 <file path=ppt/charts/chart3.xml><?xml version="1.0" encoding="utf-8"?>
+<c:chartSpace xmlns:c="http://schemas.openxmlformats.org/drawingml/2006/chart" xmlns:a="http://schemas.openxmlformats.org/drawingml/2006/main" xmlns:r="http://schemas.openxmlformats.org/officeDocument/2006/relationships">
+  <c:date1904 val="0"/>
+  <c:roundedCorners val="1"/>
+  <c:chart>
+    <c:title>
+      <c:tx>
+        <c:rich>
+          <a:bodyPr/>
+          <a:lstStyle/>
+          <a:p>
+            <a:pPr>
+              <a:defRPr sz="1300" b="0" i="0" u="none" strike="noStrike">
+                <a:solidFill>
+                  <a:srgbClr val="15232A"/>
+                </a:solidFill>
+                <a:latin typeface="Calibri"/>
+              </a:defRPr>
+            </a:pPr>
+            <a:r>
+              <a:rPr sz="1300" b="0" i="0" u="none" strike="noStrike">
+                <a:solidFill>
+                  <a:srgbClr val="15232A"/>
+                </a:solidFill>
+                <a:latin typeface="Calibri"/>
+              </a:rPr>
+              <a:t>30-min MAE vs added sensor noise (development patients)</a:t>
+            </a:r>
+          </a:p>
+        </c:rich>
+      </c:tx>
+      <c:layout/>
+      <c:overlay val="0"/>
+    </c:title>
+    <c:autoTitleDeleted val="0"/>
+    <c:plotArea>
+      <c:layout/>
+      <c:lineChart>
+        <c:varyColors val="0"/>
+        <c:ser>
+          <c:idx val="0"/>
+          <c:order val="0"/>
+          <c:tx>
+            <c:strRef>
+              <c:f>Sheet1!$B$1</c:f>
+              <c:strCache>
+                <c:ptCount val="1"/>
+                <c:pt idx="0">
+                  <c:v>v1 (clean training)</c:v>
+                </c:pt>
+              </c:strCache>
+            </c:strRef>
+          </c:tx>
+          <c:spPr>
+            <a:solidFill>
+              <a:srgbClr val="9AA9B1"/>
+            </a:solidFill>
+            <a:ln w="25400" cap="flat">
+              <a:solidFill>
+                <a:srgbClr val="9AA9B1"/>
+              </a:solidFill>
+              <a:prstDash val="solid"/>
+              <a:round/>
+            </a:ln>
+            <a:effectLst/>
+          </c:spPr>
+          <c:invertIfNegative val="0"/>
+          <c:dLbls>
+            <c:numFmt formatCode="0.0" sourceLinked="0"/>
+            <c:txPr>
+              <a:bodyPr/>
+              <a:lstStyle/>
+              <a:p>
+                <a:pPr>
+                  <a:defRPr b="0" i="0" strike="noStrike" sz="1000" u="none">
+                    <a:solidFill>
+                      <a:srgbClr val="15232A"/>
+                    </a:solidFill>
+                    <a:latin typeface="Calibri"/>
+                  </a:defRPr>
+                </a:pPr>
+              </a:p>
+            </c:txPr>
+            <c:dLblPos val="t"/>
+            <c:showLegendKey val="0"/>
+            <c:showVal val="1"/>
+            <c:showCatName val="0"/>
+            <c:showSerName val="0"/>
+            <c:showPercent val="0"/>
+            <c:showBubbleSize val="0"/>
+            <c:showLeaderLines val="0"/>
+          </c:dLbls>
+          <c:marker>
+            <c:symbol val="circle"/>
+            <c:size val="7"/>
+            <c:spPr>
+              <a:solidFill>
+                <a:srgbClr val="9AA9B1"/>
+              </a:solidFill>
+              <a:ln w="9525" cap="flat">
+                <a:solidFill>
+                  <a:srgbClr val="9AA9B1"/>
+                </a:solidFill>
+                <a:prstDash val="solid"/>
+                <a:round/>
+              </a:ln>
+              <a:effectLst/>
+            </c:spPr>
+          </c:marker>
+          <c:cat>
+            <c:multiLvlStrRef>
+              <c:f>Sheet1!$A$2:$A$5</c:f>
+              <c:multiLvlStrCache>
+                <c:ptCount val="4"/>
+                <c:lvl>
+                  <c:pt idx="0">
+                    <c:v>SD 0</c:v>
+                  </c:pt>
+                  <c:pt idx="1">
+                    <c:v>SD 5</c:v>
+                  </c:pt>
+                  <c:pt idx="2">
+                    <c:v>SD 10</c:v>
+                  </c:pt>
+                  <c:pt idx="3">
+                    <c:v>SD 20</c:v>
+                  </c:pt>
+                </c:lvl>
+              </c:multiLvlStrCache>
+            </c:multiLvlStrRef>
+          </c:cat>
+          <c:val>
+            <c:numRef>
+              <c:f>Sheet1!$B$2:$B$5</c:f>
+              <c:numCache>
+                <c:formatCode>General</c:formatCode>
+                <c:ptCount val="4"/>
+                <c:pt idx="0">
+                  <c:v>8.8</c:v>
+                </c:pt>
+                <c:pt idx="1">
+                  <c:v>13.3</c:v>
+                </c:pt>
+                <c:pt idx="2">
+                  <c:v>19.8</c:v>
+                </c:pt>
+                <c:pt idx="3">
+                  <c:v>29.9</c:v>
+                </c:pt>
+              </c:numCache>
+            </c:numRef>
+          </c:val>
+          <c:smooth val="0"/>
+        </c:ser>
+        <c:ser>
+          <c:idx val="1"/>
+          <c:order val="1"/>
+          <c:tx>
+            <c:strRef>
+              <c:f>Sheet1!$C$1</c:f>
+              <c:strCache>
+                <c:ptCount val="1"/>
+                <c:pt idx="0">
+                  <c:v>v2 (noise-augmented)</c:v>
+                </c:pt>
+              </c:strCache>
+            </c:strRef>
+          </c:tx>
+          <c:spPr>
+            <a:solidFill>
+              <a:srgbClr val="0D5F73"/>
+            </a:solidFill>
+            <a:ln w="25400" cap="flat">
+              <a:solidFill>
+                <a:srgbClr val="0D5F73"/>
+              </a:solidFill>
+              <a:prstDash val="solid"/>
+              <a:round/>
+            </a:ln>
+            <a:effectLst/>
+          </c:spPr>
+          <c:invertIfNegative val="0"/>
+          <c:dLbls>
+            <c:numFmt formatCode="0.0" sourceLinked="0"/>
+            <c:txPr>
+              <a:bodyPr/>
+              <a:lstStyle/>
+              <a:p>
+                <a:pPr>
+                  <a:defRPr b="0" i="0" strike="noStrike" sz="1000" u="none">
+                    <a:solidFill>
+                      <a:srgbClr val="15232A"/>
+                    </a:solidFill>
+                    <a:latin typeface="Calibri"/>
+                  </a:defRPr>
+                </a:pPr>
+              </a:p>
+            </c:txPr>
+            <c:dLblPos val="t"/>
+            <c:showLegendKey val="0"/>
+            <c:showVal val="1"/>
+            <c:showCatName val="0"/>
+            <c:showSerName val="0"/>
+            <c:showPercent val="0"/>
+            <c:showBubbleSize val="0"/>
+            <c:showLeaderLines val="0"/>
+          </c:dLbls>
+          <c:marker>
+            <c:symbol val="circle"/>
+            <c:size val="7"/>
+            <c:spPr>
+              <a:solidFill>
+                <a:srgbClr val="0D5F73"/>
+              </a:solidFill>
+              <a:ln w="9525" cap="flat">
+                <a:solidFill>
+                  <a:srgbClr val="0D5F73"/>
+                </a:solidFill>
+                <a:prstDash val="solid"/>
+                <a:round/>
+              </a:ln>
+              <a:effectLst/>
+            </c:spPr>
+          </c:marker>
+          <c:cat>
+            <c:multiLvlStrRef>
+              <c:f>Sheet1!$A$2:$A$5</c:f>
+              <c:multiLvlStrCache>
+                <c:ptCount val="4"/>
+                <c:lvl>
+                  <c:pt idx="0">
+                    <c:v>SD 0</c:v>
+                  </c:pt>
+                  <c:pt idx="1">
+                    <c:v>SD 5</c:v>
+                  </c:pt>
+                  <c:pt idx="2">
+                    <c:v>SD 10</c:v>
+                  </c:pt>
+                  <c:pt idx="3">
+                    <c:v>SD 20</c:v>
+                  </c:pt>
+                </c:lvl>
+              </c:multiLvlStrCache>
+            </c:multiLvlStrRef>
+          </c:cat>
+          <c:val>
+            <c:numRef>
+              <c:f>Sheet1!$C$2:$C$5</c:f>
+              <c:numCache>
+                <c:formatCode>General</c:formatCode>
+                <c:ptCount val="4"/>
+                <c:pt idx="0">
+                  <c:v>9</c:v>
+                </c:pt>
+                <c:pt idx="1">
+                  <c:v>11.1</c:v>
+                </c:pt>
+                <c:pt idx="2">
+                  <c:v>13.6</c:v>
+                </c:pt>
+                <c:pt idx="3">
+                  <c:v>20.4</c:v>
+                </c:pt>
+              </c:numCache>
+            </c:numRef>
+          </c:val>
+          <c:smooth val="0"/>
+        </c:ser>
+        <c:ser>
+          <c:idx val="2"/>
+          <c:order val="2"/>
+          <c:tx>
+            <c:strRef>
+              <c:f>Sheet1!$D$1</c:f>
+              <c:strCache>
+                <c:ptCount val="1"/>
+                <c:pt idx="0">
+                  <c:v>Last value carried forward</c:v>
+                </c:pt>
+              </c:strCache>
+            </c:strRef>
+          </c:tx>
+          <c:spPr>
+            <a:solidFill>
+              <a:srgbClr val="C5CFD4"/>
+            </a:solidFill>
+            <a:ln w="25400" cap="flat">
+              <a:solidFill>
+                <a:srgbClr val="C5CFD4"/>
+              </a:solidFill>
+              <a:prstDash val="solid"/>
+              <a:round/>
+            </a:ln>
+            <a:effectLst/>
+          </c:spPr>
+          <c:invertIfNegative val="0"/>
+          <c:dLbls>
+            <c:numFmt formatCode="0.0" sourceLinked="0"/>
+            <c:txPr>
+              <a:bodyPr/>
+              <a:lstStyle/>
+              <a:p>
+                <a:pPr>
+                  <a:defRPr b="0" i="0" strike="noStrike" sz="1000" u="none">
+                    <a:solidFill>
+                      <a:srgbClr val="15232A"/>
+                    </a:solidFill>
+                    <a:latin typeface="Calibri"/>
+                  </a:defRPr>
+                </a:pPr>
+              </a:p>
+            </c:txPr>
+            <c:dLblPos val="t"/>
+            <c:showLegendKey val="0"/>
+            <c:showVal val="1"/>
+            <c:showCatName val="0"/>
+            <c:showSerName val="0"/>
+            <c:showPercent val="0"/>
+            <c:showBubbleSize val="0"/>
+            <c:showLeaderLines val="0"/>
+          </c:dLbls>
+          <c:marker>
+            <c:symbol val="circle"/>
+            <c:size val="7"/>
+            <c:spPr>
+              <a:solidFill>
+                <a:srgbClr val="C5CFD4"/>
+              </a:solidFill>
+              <a:ln w="9525" cap="flat">
+                <a:solidFill>
+                  <a:srgbClr val="C5CFD4"/>
+                </a:solidFill>
+                <a:prstDash val="solid"/>
+                <a:round/>
+              </a:ln>
+              <a:effectLst/>
+            </c:spPr>
+          </c:marker>
+          <c:cat>
+            <c:multiLvlStrRef>
+              <c:f>Sheet1!$A$2:$A$5</c:f>
+              <c:multiLvlStrCache>
+                <c:ptCount val="4"/>
+                <c:lvl>
+                  <c:pt idx="0">
+                    <c:v>SD 0</c:v>
+                  </c:pt>
+                  <c:pt idx="1">
+                    <c:v>SD 5</c:v>
+                  </c:pt>
+                  <c:pt idx="2">
+                    <c:v>SD 10</c:v>
+                  </c:pt>
+                  <c:pt idx="3">
+                    <c:v>SD 20</c:v>
+                  </c:pt>
+                </c:lvl>
+              </c:multiLvlStrCache>
+            </c:multiLvlStrRef>
+          </c:cat>
+          <c:val>
+            <c:numRef>
+              <c:f>Sheet1!$D$2:$D$5</c:f>
+              <c:numCache>
+                <c:formatCode>General</c:formatCode>
+                <c:ptCount val="4"/>
+                <c:pt idx="0">
+                  <c:v>12</c:v>
+                </c:pt>
+                <c:pt idx="1">
+                  <c:v>12.9</c:v>
+                </c:pt>
+                <c:pt idx="2">
+                  <c:v>14.9</c:v>
+                </c:pt>
+                <c:pt idx="3">
+                  <c:v>20.5</c:v>
+                </c:pt>
+              </c:numCache>
+            </c:numRef>
+          </c:val>
+          <c:smooth val="0"/>
+        </c:ser>
+        <c:dLbls>
+          <c:numFmt formatCode="0.0" sourceLinked="0"/>
+          <c:txPr>
+            <a:bodyPr/>
+            <a:lstStyle/>
+            <a:p>
+              <a:pPr>
+                <a:defRPr b="0" i="0" strike="noStrike" sz="1000" u="none">
+                  <a:solidFill>
+                    <a:srgbClr val="15232A"/>
+                  </a:solidFill>
+                  <a:latin typeface="Calibri"/>
+                </a:defRPr>
+              </a:pPr>
+            </a:p>
+          </c:txPr>
+          <c:dLblPos val="t"/>
+          <c:showLegendKey val="0"/>
+          <c:showVal val="1"/>
+          <c:showCatName val="0"/>
+          <c:showSerName val="0"/>
+          <c:showPercent val="0"/>
+          <c:showBubbleSize val="0"/>
+          <c:showLeaderLines val="0"/>
+        </c:dLbls>
+        <c:marker val="1"/>
+        <c:axId val="2094734554"/>
+        <c:axId val="2094734552"/>
+        <c:axId val="2094734556"/>
+      </c:lineChart>
+      <c:catAx>
+        <c:axId val="2094734554"/>
+        <c:scaling>
+          <c:orientation val="minMax"/>
+        </c:scaling>
+        <c:delete val="0"/>
+        <c:axPos val="b"/>
+        <c:numFmt formatCode="General" sourceLinked="1"/>
+        <c:majorTickMark val="out"/>
+        <c:minorTickMark val="none"/>
+        <c:tickLblPos val="low"/>
+        <c:spPr>
+          <a:ln w="12700" cap="flat">
+            <a:noFill/>
+            <a:prstDash val="solid"/>
+            <a:round/>
+          </a:ln>
+        </c:spPr>
+        <c:txPr>
+          <a:bodyPr/>
+          <a:lstStyle/>
+          <a:p>
+            <a:pPr>
+              <a:defRPr sz="1200" b="0" i="0" u="none" strike="noStrike">
+                <a:solidFill>
+                  <a:srgbClr val="56676F"/>
+                </a:solidFill>
+                <a:latin typeface="Calibri"/>
+              </a:defRPr>
+            </a:pPr>
+            <a:endParaRPr lang="en-US"/>
+          </a:p>
+        </c:txPr>
+        <c:crossAx val="2094734552"/>
+        <c:crosses val="autoZero"/>
+        <c:auto val="1"/>
+        <c:lblAlgn val="ctr"/>
+        <c:noMultiLvlLbl val="1"/>
+      </c:catAx>
+      <c:valAx>
+        <c:axId val="2094734552"/>
+        <c:scaling>
+          <c:orientation val="minMax"/>
+        </c:scaling>
+        <c:delete val="0"/>
+        <c:axPos val="l"/>
+        <c:majorGridlines>
+          <c:spPr>
+            <a:ln w="6350" cap="flat">
+              <a:solidFill>
+                <a:srgbClr val="E3E9EC"/>
+              </a:solidFill>
+              <a:prstDash val="solid"/>
+              <a:round/>
+            </a:ln>
+          </c:spPr>
+        </c:majorGridlines>
+        <c:numFmt formatCode="General" sourceLinked="0"/>
+        <c:majorTickMark val="out"/>
+        <c:minorTickMark val="none"/>
+        <c:tickLblPos val="nextTo"/>
+        <c:spPr>
+          <a:ln w="12700" cap="flat">
+            <a:solidFill>
+              <a:srgbClr val="888888"/>
+            </a:solidFill>
+            <a:prstDash val="solid"/>
+            <a:round/>
+          </a:ln>
+        </c:spPr>
+        <c:txPr>
+          <a:bodyPr/>
+          <a:lstStyle/>
+          <a:p>
+            <a:pPr>
+              <a:defRPr sz="1000" b="0" i="0" u="none" strike="noStrike">
+                <a:solidFill>
+                  <a:srgbClr val="56676F"/>
+                </a:solidFill>
+                <a:latin typeface="Calibri"/>
+              </a:defRPr>
+            </a:pPr>
+            <a:endParaRPr lang="en-US"/>
+          </a:p>
+        </c:txPr>
+        <c:crossAx val="2094734554"/>
+        <c:crosses val="autoZero"/>
+        <c:crossBetween val="between"/>
+      </c:valAx>
+      <c:spPr>
+        <a:noFill/>
+        <a:ln>
+          <a:noFill/>
+        </a:ln>
+        <a:effectLst/>
+      </c:spPr>
+    </c:plotArea>
+    <c:legend>
+      <c:legendPos val="b"/>
+      <c:overlay val="0"/>
+      <c:txPr>
+        <a:bodyPr/>
+        <a:lstStyle/>
+        <a:p>
+          <a:pPr>
+            <a:defRPr sz="1100">
+              <a:solidFill>
+                <a:srgbClr val="15232A"/>
+              </a:solidFill>
+              <a:latin typeface="Calibri"/>
+              <a:cs typeface="Calibri"/>
+            </a:defRPr>
+          </a:pPr>
+          <a:endParaRPr lang="en-US"/>
+        </a:p>
+      </c:txPr>
+    </c:legend>
+    <c:plotVisOnly val="1"/>
+    <c:dispBlanksAs val="span"/>
+  </c:chart>
+  <c:spPr>
+    <a:noFill/>
+    <a:ln>
+      <a:noFill/>
+    </a:ln>
+    <a:effectLst/>
+  </c:spPr>
+  <c:externalData r:id="rId1">
+    <c:autoUpdate val="0"/>
+  </c:externalData>
+</c:chartSpace>
+</file>
+
+<file path=ppt/charts/chart4.xml><?xml version="1.0" encoding="utf-8"?>
 <c:chartSpace xmlns:c="http://schemas.openxmlformats.org/drawingml/2006/chart" xmlns:a="http://schemas.openxmlformats.org/drawingml/2006/main" xmlns:r="http://schemas.openxmlformats.org/officeDocument/2006/relationships">
   <c:date1904 val="0"/>
   <c:roundedCorners val="1"/>
@@ -1239,13 +1871,13 @@
                 <c:formatCode>General</c:formatCode>
                 <c:ptCount val="3"/>
                 <c:pt idx="0">
-                  <c:v>16.9</c:v>
+                  <c:v>17.2</c:v>
                 </c:pt>
                 <c:pt idx="1">
-                  <c:v>14.1</c:v>
+                  <c:v>14.3</c:v>
                 </c:pt>
                 <c:pt idx="2">
-                  <c:v>12.3</c:v>
+                  <c:v>12.5</c:v>
                 </c:pt>
               </c:numCache>
             </c:numRef>
@@ -2162,7 +2794,7 @@
           <a:p>
             <a:r>
               <a:rPr lang="en-US" dirty="0"/>
-              <a:t>Sensitivity is per episode. The ≥ 30 min column is the clinically useful one: many detections otherwise come only 15 minutes ahead. AUPRC should be compared with prevalence, which is the score of a random ranking.</a:t>
+              <a:t>Alarm fatigue is a documented safety problem in monitoring. A care team that ignores alerts gets nothing from even a perfect model, so we optimised for a usable alert load, not maximum sensitivity.</a:t>
             </a:r>
             <a:endParaRPr lang="en-US" dirty="0"/>
           </a:p>
@@ -2250,7 +2882,7 @@
           <a:p>
             <a:r>
               <a:rPr lang="en-US" dirty="0"/>
-              <a:t>The model was frozen; CGMacros was never used to train or tune it. CGMacros is CC BY-NC-SA and is downloaded by script, not redistributed.</a:t>
+              <a:t>The v1 test exposed two weaknesses: sensitivity to sensor noise and an unusable alert load. We fixed both using development data only, then re-scored the test set once and logged why. Clean accuracy dropped 1 to 2.4 percent depending on horizon; noisy accuracy improved about 30 percent.</a:t>
             </a:r>
             <a:endParaRPr lang="en-US" dirty="0"/>
           </a:p>
@@ -2338,7 +2970,7 @@
           <a:p>
             <a:r>
               <a:rPr lang="en-US" dirty="0"/>
-              <a:t>Show the live demo here. Every value on screen carries its provenance: research record, replayed CGM, model forecast, sensitivity, or live stream.</a:t>
+              <a:t>The model was frozen; CGMacros was never used to train or tune it. CGMacros is CC BY-NC-SA and is downloaded by script, not redistributed.</a:t>
             </a:r>
             <a:endParaRPr lang="en-US" dirty="0"/>
           </a:p>
@@ -2426,7 +3058,7 @@
           <a:p>
             <a:r>
               <a:rPr lang="en-US" dirty="0"/>
-              <a:t>Saying this ourselves is part of the pitch: every limitation here was found by our own tests.</a:t>
+              <a:t>Show the live demo here. Every value on screen carries its provenance: research record, replayed CGM, model forecast, sensitivity, or live stream.</a:t>
             </a:r>
             <a:endParaRPr lang="en-US" dirty="0"/>
           </a:p>
@@ -2514,7 +3146,7 @@
           <a:p>
             <a:r>
               <a:rPr lang="en-US" dirty="0"/>
-              <a:t>Customer demand and willingness to pay are hypotheses. The next step is evidence, not scale.</a:t>
+              <a:t>Saying this ourselves is part of the pitch: every limitation here was found by our own tests.</a:t>
             </a:r>
             <a:endParaRPr lang="en-US" dirty="0"/>
           </a:p>
@@ -2602,7 +3234,7 @@
           <a:p>
             <a:r>
               <a:rPr lang="en-US" dirty="0"/>
-              <a:t>Invite questions on the protocol, the twin state, or the limitations.</a:t>
+              <a:t>Customer demand and willingness to pay are hypotheses. The next step is evidence, not scale.</a:t>
             </a:r>
             <a:endParaRPr lang="en-US" dirty="0"/>
           </a:p>
@@ -2626,6 +3258,94 @@
             <a:fld id="{F7021451-1387-4CA6-816F-3879F97B5CBC}" type="slidenum">
               <a:rPr lang="en-US"/>
               <a:t>18</a:t>
+            </a:fld>
+            <a:endParaRPr lang="en-US"/>
+          </a:p>
+        </p:txBody>
+      </p:sp>
+    </p:spTree>
+    <p:extLst>
+      <p:ext uri="{BB962C8B-B14F-4D97-AF65-F5344CB8AC3E}">
+        <p14:creationId xmlns:p14="http://schemas.microsoft.com/office/powerpoint/2010/main" val="1024086991"/>
+      </p:ext>
+    </p:extLst>
+  </p:cSld>
+  <p:clrMapOvr>
+    <a:masterClrMapping/>
+  </p:clrMapOvr>
+</p:notes>
+</file>
+
+<file path=ppt/notesSlides/notesSlide19.xml><?xml version="1.0" encoding="utf-8"?>
+<p:notes xmlns:a="http://schemas.openxmlformats.org/drawingml/2006/main" xmlns:r="http://schemas.openxmlformats.org/officeDocument/2006/relationships" xmlns:p="http://schemas.openxmlformats.org/presentationml/2006/main">
+  <p:cSld>
+    <p:spTree>
+      <p:nvGrpSpPr>
+        <p:cNvPr id="1" name=""/>
+        <p:cNvGrpSpPr/>
+        <p:nvPr/>
+      </p:nvGrpSpPr>
+      <p:grpSpPr>
+        <a:xfrm>
+          <a:off x="0" y="0"/>
+          <a:ext cx="0" cy="0"/>
+          <a:chOff x="0" y="0"/>
+          <a:chExt cx="0" cy="0"/>
+        </a:xfrm>
+      </p:grpSpPr>
+      <p:sp>
+        <p:nvSpPr>
+          <p:cNvPr id="2" name="Slide Image Placeholder 1"/>
+          <p:cNvSpPr>
+            <a:spLocks noGrp="1" noRot="1" noChangeAspect="1"/>
+          </p:cNvSpPr>
+          <p:nvPr>
+            <p:ph type="sldImg"/>
+          </p:nvPr>
+        </p:nvSpPr>
+        <p:spPr/>
+      </p:sp>
+      <p:sp>
+        <p:nvSpPr>
+          <p:cNvPr id="3" name="Notes Placeholder 2"/>
+          <p:cNvSpPr>
+            <a:spLocks noGrp="1"/>
+          </p:cNvSpPr>
+          <p:nvPr>
+            <p:ph type="body" idx="1"/>
+          </p:nvPr>
+        </p:nvSpPr>
+        <p:spPr/>
+        <p:txBody>
+          <a:bodyPr/>
+          <a:lstStyle/>
+          <a:p>
+            <a:r>
+              <a:rPr lang="en-US" dirty="0"/>
+              <a:t>Invite questions on the protocol, the twin state, or the limitations.</a:t>
+            </a:r>
+            <a:endParaRPr lang="en-US" dirty="0"/>
+          </a:p>
+        </p:txBody>
+      </p:sp>
+      <p:sp>
+        <p:nvSpPr>
+          <p:cNvPr id="4" name="Slide Number Placeholder 3"/>
+          <p:cNvSpPr>
+            <a:spLocks noGrp="1"/>
+          </p:cNvSpPr>
+          <p:nvPr>
+            <p:ph type="sldNum" sz="quarter" idx="10"/>
+          </p:nvPr>
+        </p:nvSpPr>
+        <p:spPr/>
+        <p:txBody>
+          <a:bodyPr/>
+          <a:lstStyle/>
+          <a:p>
+            <a:fld id="{F7021451-1387-4CA6-816F-3879F97B5CBC}" type="slidenum">
+              <a:rPr lang="en-US"/>
+              <a:t>19</a:t>
             </a:fld>
             <a:endParaRPr lang="en-US"/>
           </a:p>
@@ -4345,7 +5065,7 @@
                 <a:ea typeface="Calibri" pitchFamily="34" charset="-122"/>
                 <a:cs typeface="Calibri" pitchFamily="34" charset="-120"/>
               </a:rPr>
-              <a:t>+30 min: -3.44 mg/dL (95% CI -4.10 to -2.81)</a:t>
+              <a:t>+30 min: -3.24 mg/dL (95% CI -3.87 to -2.62)</a:t>
             </a:r>
             <a:endParaRPr lang="en-US" sz="1350" dirty="0"/>
           </a:p>
@@ -4365,7 +5085,7 @@
                 <a:ea typeface="Calibri" pitchFamily="34" charset="-122"/>
                 <a:cs typeface="Calibri" pitchFamily="34" charset="-120"/>
               </a:rPr>
-              <a:t>+60 min: -5.32 mg/dL (95% CI -6.46 to -4.24)</a:t>
+              <a:t>+60 min: -5.17 mg/dL (95% CI -6.30 to -4.12)</a:t>
             </a:r>
             <a:endParaRPr lang="en-US" sz="1350" dirty="0"/>
           </a:p>
@@ -4385,7 +5105,7 @@
                 <a:ea typeface="Calibri" pitchFamily="34" charset="-122"/>
                 <a:cs typeface="Calibri" pitchFamily="34" charset="-120"/>
               </a:rPr>
-              <a:t>+120 min: -9.84 mg/dL (95% CI -11.85 to -8.13)</a:t>
+              <a:t>+120 min: -9.68 mg/dL (95% CI -11.68 to -7.99)</a:t>
             </a:r>
             <a:endParaRPr lang="en-US" sz="1350" dirty="0"/>
           </a:p>
@@ -4502,7 +5222,7 @@
                 <a:ea typeface="Calibri" pitchFamily="34" charset="-122"/>
                 <a:cs typeface="Calibri" pitchFamily="34" charset="-120"/>
               </a:rPr>
-              <a:t>GRU vs Pratirup</a:t>
+              <a:t>GRU and foundation model</a:t>
             </a:r>
             <a:endParaRPr lang="en-US" sz="1500" dirty="0"/>
           </a:p>
@@ -4541,7 +5261,7 @@
                 <a:ea typeface="Calibri" pitchFamily="34" charset="-122"/>
                 <a:cs typeface="Calibri" pitchFamily="34" charset="-120"/>
               </a:rPr>
-              <a:t>No measurable difference at 60 min: 0.04 mg/dL (95% CI -0.14 to 0.20). We serve the model we can explain.</a:t>
+              <a:t>Tuned GRU vs Pratirup at 60 min: 0.19 mg/dL (95% CI 0.02 to 0.35), about 1%: we serve the model we can explain. Chronos-Bolt zero-shot: 18.7 mg/dL.</a:t>
             </a:r>
             <a:endParaRPr lang="en-US" sz="1350" dirty="0"/>
           </a:p>
@@ -4881,7 +5601,7 @@
                 <a:ea typeface="Calibri" pitchFamily="34" charset="-122"/>
                 <a:cs typeface="Calibri" pitchFamily="34" charset="-120"/>
               </a:rPr>
-              <a:t>Clinical-record fields beyond CGM and logs; online self-correction (-0.02 mg/dL, CI crosses 0); Fitbit heart rate and activity in CGMacros (-0.02 mg/dL, CI crosses 0). We report this rather than hide it.</a:t>
+              <a:t>Clinical-record fields beyond CGM and logs; online self-correction (-0.02 mg/dL, CI crosses 0); Fitbit heart rate and activity in CGMacros (0.06 mg/dL, CI crosses 0). We report this rather than hide it.</a:t>
             </a:r>
             <a:endParaRPr lang="en-US" sz="1300" dirty="0"/>
           </a:p>
@@ -5034,7 +5754,7 @@
                 <a:ea typeface="Cambria" pitchFamily="34" charset="-122"/>
                 <a:cs typeface="Cambria" pitchFamily="34" charset="-120"/>
               </a:rPr>
-              <a:t>81.3%</a:t>
+              <a:t>80.8%</a:t>
             </a:r>
             <a:endParaRPr lang="en-US" sz="4400" dirty="0"/>
           </a:p>
@@ -5073,7 +5793,7 @@
                 <a:ea typeface="Calibri" pitchFamily="34" charset="-122"/>
                 <a:cs typeface="Calibri" pitchFamily="34" charset="-120"/>
               </a:rPr>
-              <a:t>of outcomes inside the 80% interval at +30 min (mean width 27.3 mg/dL)</a:t>
+              <a:t>of outcomes inside the 80% interval at +30 min (mean width 27.7 mg/dL)</a:t>
             </a:r>
             <a:endParaRPr lang="en-US" sz="1300" dirty="0"/>
           </a:p>
@@ -5112,7 +5832,7 @@
                 <a:ea typeface="Cambria" pitchFamily="34" charset="-122"/>
                 <a:cs typeface="Cambria" pitchFamily="34" charset="-120"/>
               </a:rPr>
-              <a:t>80.9%</a:t>
+              <a:t>81.1%</a:t>
             </a:r>
             <a:endParaRPr lang="en-US" sz="4400" dirty="0"/>
           </a:p>
@@ -5151,7 +5871,7 @@
                 <a:ea typeface="Calibri" pitchFamily="34" charset="-122"/>
                 <a:cs typeface="Calibri" pitchFamily="34" charset="-120"/>
               </a:rPr>
-              <a:t>of outcomes inside the 80% interval at +60 min (mean width 45.6 mg/dL)</a:t>
+              <a:t>of outcomes inside the 80% interval at +60 min (mean width 46.7 mg/dL)</a:t>
             </a:r>
             <a:endParaRPr lang="en-US" sz="1300" dirty="0"/>
           </a:p>
@@ -5190,7 +5910,7 @@
                 <a:ea typeface="Cambria" pitchFamily="34" charset="-122"/>
                 <a:cs typeface="Cambria" pitchFamily="34" charset="-120"/>
               </a:rPr>
-              <a:t>83.5%</a:t>
+              <a:t>82.9%</a:t>
             </a:r>
             <a:endParaRPr lang="en-US" sz="4400" dirty="0"/>
           </a:p>
@@ -5229,7 +5949,7 @@
                 <a:ea typeface="Calibri" pitchFamily="34" charset="-122"/>
                 <a:cs typeface="Calibri" pitchFamily="34" charset="-120"/>
               </a:rPr>
-              <a:t>of outcomes inside the 80% interval at +120 min (mean width 67.2 mg/dL)</a:t>
+              <a:t>of outcomes inside the 80% interval at +120 min (mean width 66.5 mg/dL)</a:t>
             </a:r>
             <a:endParaRPr lang="en-US" sz="1300" dirty="0"/>
           </a:p>
@@ -5439,7 +6159,7 @@
                 <a:ea typeface="Calibri" pitchFamily="34" charset="-122"/>
                 <a:cs typeface="Calibri" pitchFamily="34" charset="-120"/>
               </a:rPr>
-              <a:t>A care team can trust the band, not just the line. It held on CGMacros too: 78% in T2D, 81% in prediabetes. Under heavy sensor noise coverage falls (74% at ±10 mg/dL), a known limitation.</a:t>
+              <a:t>A care team can trust the band, not just the line. It held on CGMacros too: 78% in T2D, 81% in prediabetes. Under heavy sensor noise coverage falls (71% at ±10 mg/dL), a known limitation.</a:t>
             </a:r>
             <a:endParaRPr lang="en-US" sz="1300" dirty="0"/>
           </a:p>
@@ -5553,7 +6273,7 @@
                 <a:ea typeface="Cambria" pitchFamily="34" charset="-122"/>
                 <a:cs typeface="Cambria" pitchFamily="34" charset="-120"/>
               </a:rPr>
-              <a:t>Early warning: more episodes caught, earlier</a:t>
+              <a:t>Alerts a care team can live with</a:t>
             </a:r>
             <a:endParaRPr lang="en-US" sz="3000" dirty="0"/>
           </a:p>
@@ -5582,16 +6302,14 @@
             <a:tbl>
               <a:tblPr/>
               <a:tblGrid>
-                <a:gridCol w="2103120"/>
-                <a:gridCol w="1828800"/>
-                <a:gridCol w="914400"/>
-                <a:gridCol w="1188720"/>
-                <a:gridCol w="1325880"/>
-                <a:gridCol w="822960"/>
-                <a:gridCol w="1417320"/>
-                <a:gridCol w="1463040"/>
+                <a:gridCol w="2651760"/>
+                <a:gridCol w="1737360"/>
+                <a:gridCol w="1280160"/>
+                <a:gridCol w="1005840"/>
+                <a:gridCol w="2194560"/>
+                <a:gridCol w="2194560"/>
               </a:tblGrid>
-              <a:tr h="411480">
+              <a:tr h="457200">
                 <a:tc>
                   <a:txBody>
                     <a:bodyPr/>
@@ -5601,7 +6319,7 @@
                         <a:buNone/>
                       </a:pPr>
                       <a:r>
-                        <a:rPr lang="en-US" sz="1300" b="1" dirty="0">
+                        <a:rPr lang="en-US" sz="1400" b="1" dirty="0">
                           <a:solidFill>
                             <a:srgbClr val="15232A"/>
                           </a:solidFill>
@@ -5609,16 +6327,16 @@
                           <a:ea typeface="Calibri" pitchFamily="34" charset="-122"/>
                           <a:cs typeface="Calibri" pitchFamily="34" charset="-120"/>
                         </a:rPr>
-                        <a:t>Event within 60 min</a:t>
+                        <a:t>Cohort</a:t>
                       </a:r>
-                      <a:endParaRPr lang="en-US" sz="1300" dirty="0">
+                      <a:endParaRPr lang="en-US" sz="1400" dirty="0">
                         <a:latin typeface="Calibri" charset="0"/>
                         <a:ea typeface="Calibri" charset="0"/>
                         <a:cs typeface="Calibri" charset="0"/>
                       </a:endParaRPr>
                     </a:p>
                   </a:txBody>
-                  <a:tcPr marL="76200" marR="76200" marT="38100" marB="38100" anchor="ctr">
+                  <a:tcPr marL="101600" marR="101600" marT="50800" marB="50800" anchor="ctr">
                     <a:lnL w="9525" cap="flat" cmpd="sng" algn="ctr">
                       <a:solidFill>
                         <a:srgbClr val="D9E1E5"/>
@@ -5669,7 +6387,7 @@
                         <a:buNone/>
                       </a:pPr>
                       <a:r>
-                        <a:rPr lang="en-US" sz="1300" b="1" dirty="0">
+                        <a:rPr lang="en-US" sz="1400" b="1" dirty="0">
                           <a:solidFill>
                             <a:srgbClr val="15232A"/>
                           </a:solidFill>
@@ -5677,16 +6395,16 @@
                           <a:ea typeface="Calibri" pitchFamily="34" charset="-122"/>
                           <a:cs typeface="Calibri" pitchFamily="34" charset="-120"/>
                         </a:rPr>
-                        <a:t>Scorer</a:t>
+                        <a:t>Alerts / patient-day</a:t>
                       </a:r>
-                      <a:endParaRPr lang="en-US" sz="1300" dirty="0">
+                      <a:endParaRPr lang="en-US" sz="1400" dirty="0">
                         <a:latin typeface="Calibri" charset="0"/>
                         <a:ea typeface="Calibri" charset="0"/>
                         <a:cs typeface="Calibri" charset="0"/>
                       </a:endParaRPr>
                     </a:p>
                   </a:txBody>
-                  <a:tcPr marL="76200" marR="76200" marT="38100" marB="38100" anchor="ctr">
+                  <a:tcPr marL="101600" marR="101600" marT="50800" marB="50800" anchor="ctr">
                     <a:lnL w="9525" cap="flat" cmpd="sng" algn="ctr">
                       <a:solidFill>
                         <a:srgbClr val="D9E1E5"/>
@@ -5737,7 +6455,7 @@
                         <a:buNone/>
                       </a:pPr>
                       <a:r>
-                        <a:rPr lang="en-US" sz="1300" b="1" dirty="0">
+                        <a:rPr lang="en-US" sz="1400" b="1" dirty="0">
                           <a:solidFill>
                             <a:srgbClr val="15232A"/>
                           </a:solidFill>
@@ -5745,16 +6463,16 @@
                           <a:ea typeface="Calibri" pitchFamily="34" charset="-122"/>
                           <a:cs typeface="Calibri" pitchFamily="34" charset="-120"/>
                         </a:rPr>
-                        <a:t>Episodes</a:t>
+                        <a:t>False / day</a:t>
                       </a:r>
-                      <a:endParaRPr lang="en-US" sz="1300" dirty="0">
+                      <a:endParaRPr lang="en-US" sz="1400" dirty="0">
                         <a:latin typeface="Calibri" charset="0"/>
                         <a:ea typeface="Calibri" charset="0"/>
                         <a:cs typeface="Calibri" charset="0"/>
                       </a:endParaRPr>
                     </a:p>
                   </a:txBody>
-                  <a:tcPr marL="76200" marR="76200" marT="38100" marB="38100" anchor="ctr">
+                  <a:tcPr marL="101600" marR="101600" marT="50800" marB="50800" anchor="ctr">
                     <a:lnL w="9525" cap="flat" cmpd="sng" algn="ctr">
                       <a:solidFill>
                         <a:srgbClr val="D9E1E5"/>
@@ -5805,7 +6523,7 @@
                         <a:buNone/>
                       </a:pPr>
                       <a:r>
-                        <a:rPr lang="en-US" sz="1300" b="1" dirty="0">
+                        <a:rPr lang="en-US" sz="1400" b="1" dirty="0">
                           <a:solidFill>
                             <a:srgbClr val="15232A"/>
                           </a:solidFill>
@@ -5813,16 +6531,16 @@
                           <a:ea typeface="Calibri" pitchFamily="34" charset="-122"/>
                           <a:cs typeface="Calibri" pitchFamily="34" charset="-120"/>
                         </a:rPr>
-                        <a:t>Sensitivity</a:t>
+                        <a:t>PPV</a:t>
                       </a:r>
-                      <a:endParaRPr lang="en-US" sz="1300" dirty="0">
+                      <a:endParaRPr lang="en-US" sz="1400" dirty="0">
                         <a:latin typeface="Calibri" charset="0"/>
                         <a:ea typeface="Calibri" charset="0"/>
                         <a:cs typeface="Calibri" charset="0"/>
                       </a:endParaRPr>
                     </a:p>
                   </a:txBody>
-                  <a:tcPr marL="76200" marR="76200" marT="38100" marB="38100" anchor="ctr">
+                  <a:tcPr marL="101600" marR="101600" marT="50800" marB="50800" anchor="ctr">
                     <a:lnL w="9525" cap="flat" cmpd="sng" algn="ctr">
                       <a:solidFill>
                         <a:srgbClr val="D9E1E5"/>
@@ -5873,7 +6591,7 @@
                         <a:buNone/>
                       </a:pPr>
                       <a:r>
-                        <a:rPr lang="en-US" sz="1300" b="1" dirty="0">
+                        <a:rPr lang="en-US" sz="1400" b="1" dirty="0">
                           <a:solidFill>
                             <a:srgbClr val="15232A"/>
                           </a:solidFill>
@@ -5881,16 +6599,16 @@
                           <a:ea typeface="Calibri" pitchFamily="34" charset="-122"/>
                           <a:cs typeface="Calibri" pitchFamily="34" charset="-120"/>
                         </a:rPr>
-                        <a:t>≥ 30 min warning</a:t>
+                        <a:t>&lt; 70 caught (≥ 30 min)</a:t>
                       </a:r>
-                      <a:endParaRPr lang="en-US" sz="1300" dirty="0">
+                      <a:endParaRPr lang="en-US" sz="1400" dirty="0">
                         <a:latin typeface="Calibri" charset="0"/>
                         <a:ea typeface="Calibri" charset="0"/>
                         <a:cs typeface="Calibri" charset="0"/>
                       </a:endParaRPr>
                     </a:p>
                   </a:txBody>
-                  <a:tcPr marL="76200" marR="76200" marT="38100" marB="38100" anchor="ctr">
+                  <a:tcPr marL="101600" marR="101600" marT="50800" marB="50800" anchor="ctr">
                     <a:lnL w="9525" cap="flat" cmpd="sng" algn="ctr">
                       <a:solidFill>
                         <a:srgbClr val="D9E1E5"/>
@@ -5941,7 +6659,7 @@
                         <a:buNone/>
                       </a:pPr>
                       <a:r>
-                        <a:rPr lang="en-US" sz="1300" b="1" dirty="0">
+                        <a:rPr lang="en-US" sz="1400" b="1" dirty="0">
                           <a:solidFill>
                             <a:srgbClr val="15232A"/>
                           </a:solidFill>
@@ -5949,16 +6667,16 @@
                           <a:ea typeface="Calibri" pitchFamily="34" charset="-122"/>
                           <a:cs typeface="Calibri" pitchFamily="34" charset="-120"/>
                         </a:rPr>
-                        <a:t>PPV</a:t>
+                        <a:t>&gt; 250 caught (≥ 30 min)</a:t>
                       </a:r>
-                      <a:endParaRPr lang="en-US" sz="1300" dirty="0">
+                      <a:endParaRPr lang="en-US" sz="1400" dirty="0">
                         <a:latin typeface="Calibri" charset="0"/>
                         <a:ea typeface="Calibri" charset="0"/>
                         <a:cs typeface="Calibri" charset="0"/>
                       </a:endParaRPr>
                     </a:p>
                   </a:txBody>
-                  <a:tcPr marL="76200" marR="76200" marT="38100" marB="38100" anchor="ctr">
+                  <a:tcPr marL="101600" marR="101600" marT="50800" marB="50800" anchor="ctr">
                     <a:lnL w="9525" cap="flat" cmpd="sng" algn="ctr">
                       <a:solidFill>
                         <a:srgbClr val="D9E1E5"/>
@@ -6000,6 +6718,8 @@
                     </a:solidFill>
                   </a:tcPr>
                 </a:tc>
+              </a:tr>
+              <a:tr h="457200">
                 <a:tc>
                   <a:txBody>
                     <a:bodyPr/>
@@ -6009,7 +6729,7 @@
                         <a:buNone/>
                       </a:pPr>
                       <a:r>
-                        <a:rPr lang="en-US" sz="1300" b="1" dirty="0">
+                        <a:rPr lang="en-US" sz="1400" dirty="0">
                           <a:solidFill>
                             <a:srgbClr val="15232A"/>
                           </a:solidFill>
@@ -6017,154 +6737,16 @@
                           <a:ea typeface="Calibri" pitchFamily="34" charset="-122"/>
                           <a:cs typeface="Calibri" pitchFamily="34" charset="-120"/>
                         </a:rPr>
-                        <a:t>False alerts / patient-day</a:t>
+                        <a:t>Development (CV)</a:t>
                       </a:r>
-                      <a:endParaRPr lang="en-US" sz="1300" dirty="0">
+                      <a:endParaRPr lang="en-US" sz="1400" dirty="0">
                         <a:latin typeface="Calibri" charset="0"/>
                         <a:ea typeface="Calibri" charset="0"/>
                         <a:cs typeface="Calibri" charset="0"/>
                       </a:endParaRPr>
                     </a:p>
                   </a:txBody>
-                  <a:tcPr marL="76200" marR="76200" marT="38100" marB="38100" anchor="ctr">
-                    <a:lnL w="9525" cap="flat" cmpd="sng" algn="ctr">
-                      <a:solidFill>
-                        <a:srgbClr val="D9E1E5"/>
-                      </a:solidFill>
-                      <a:prstDash val="solid"/>
-                      <a:round/>
-                      <a:headEnd type="none" w="med" len="med"/>
-                      <a:tailEnd type="none" w="med" len="med"/>
-                    </a:lnL>
-                    <a:lnR w="9525" cap="flat" cmpd="sng" algn="ctr">
-                      <a:solidFill>
-                        <a:srgbClr val="D9E1E5"/>
-                      </a:solidFill>
-                      <a:prstDash val="solid"/>
-                      <a:round/>
-                      <a:headEnd type="none" w="med" len="med"/>
-                      <a:tailEnd type="none" w="med" len="med"/>
-                    </a:lnR>
-                    <a:lnT w="9525" cap="flat" cmpd="sng" algn="ctr">
-                      <a:solidFill>
-                        <a:srgbClr val="D9E1E5"/>
-                      </a:solidFill>
-                      <a:prstDash val="solid"/>
-                      <a:round/>
-                      <a:headEnd type="none" w="med" len="med"/>
-                      <a:tailEnd type="none" w="med" len="med"/>
-                    </a:lnT>
-                    <a:lnB w="9525" cap="flat" cmpd="sng" algn="ctr">
-                      <a:solidFill>
-                        <a:srgbClr val="D9E1E5"/>
-                      </a:solidFill>
-                      <a:prstDash val="solid"/>
-                      <a:round/>
-                      <a:headEnd type="none" w="med" len="med"/>
-                      <a:tailEnd type="none" w="med" len="med"/>
-                    </a:lnB>
-                    <a:solidFill>
-                      <a:srgbClr val="F3F6F7"/>
-                    </a:solidFill>
-                  </a:tcPr>
-                </a:tc>
-                <a:tc>
-                  <a:txBody>
-                    <a:bodyPr/>
-                    <a:lstStyle/>
-                    <a:p>
-                      <a:pPr indent="0" marL="0">
-                        <a:buNone/>
-                      </a:pPr>
-                      <a:r>
-                        <a:rPr lang="en-US" sz="1300" b="1" dirty="0">
-                          <a:solidFill>
-                            <a:srgbClr val="15232A"/>
-                          </a:solidFill>
-                          <a:latin typeface="Calibri" pitchFamily="34" charset="0"/>
-                          <a:ea typeface="Calibri" pitchFamily="34" charset="-122"/>
-                          <a:cs typeface="Calibri" pitchFamily="34" charset="-120"/>
-                        </a:rPr>
-                        <a:t>AUPRC (prevalence)</a:t>
-                      </a:r>
-                      <a:endParaRPr lang="en-US" sz="1300" dirty="0">
-                        <a:latin typeface="Calibri" charset="0"/>
-                        <a:ea typeface="Calibri" charset="0"/>
-                        <a:cs typeface="Calibri" charset="0"/>
-                      </a:endParaRPr>
-                    </a:p>
-                  </a:txBody>
-                  <a:tcPr marL="76200" marR="76200" marT="38100" marB="38100" anchor="ctr">
-                    <a:lnL w="9525" cap="flat" cmpd="sng" algn="ctr">
-                      <a:solidFill>
-                        <a:srgbClr val="D9E1E5"/>
-                      </a:solidFill>
-                      <a:prstDash val="solid"/>
-                      <a:round/>
-                      <a:headEnd type="none" w="med" len="med"/>
-                      <a:tailEnd type="none" w="med" len="med"/>
-                    </a:lnL>
-                    <a:lnR w="9525" cap="flat" cmpd="sng" algn="ctr">
-                      <a:solidFill>
-                        <a:srgbClr val="D9E1E5"/>
-                      </a:solidFill>
-                      <a:prstDash val="solid"/>
-                      <a:round/>
-                      <a:headEnd type="none" w="med" len="med"/>
-                      <a:tailEnd type="none" w="med" len="med"/>
-                    </a:lnR>
-                    <a:lnT w="9525" cap="flat" cmpd="sng" algn="ctr">
-                      <a:solidFill>
-                        <a:srgbClr val="D9E1E5"/>
-                      </a:solidFill>
-                      <a:prstDash val="solid"/>
-                      <a:round/>
-                      <a:headEnd type="none" w="med" len="med"/>
-                      <a:tailEnd type="none" w="med" len="med"/>
-                    </a:lnT>
-                    <a:lnB w="9525" cap="flat" cmpd="sng" algn="ctr">
-                      <a:solidFill>
-                        <a:srgbClr val="D9E1E5"/>
-                      </a:solidFill>
-                      <a:prstDash val="solid"/>
-                      <a:round/>
-                      <a:headEnd type="none" w="med" len="med"/>
-                      <a:tailEnd type="none" w="med" len="med"/>
-                    </a:lnB>
-                    <a:solidFill>
-                      <a:srgbClr val="F3F6F7"/>
-                    </a:solidFill>
-                  </a:tcPr>
-                </a:tc>
-              </a:tr>
-              <a:tr h="411480">
-                <a:tc>
-                  <a:txBody>
-                    <a:bodyPr/>
-                    <a:lstStyle/>
-                    <a:p>
-                      <a:pPr indent="0" marL="0">
-                        <a:buNone/>
-                      </a:pPr>
-                      <a:r>
-                        <a:rPr lang="en-US" sz="1300" dirty="0">
-                          <a:solidFill>
-                            <a:srgbClr val="0D5F73"/>
-                          </a:solidFill>
-                          <a:latin typeface="Calibri" pitchFamily="34" charset="0"/>
-                          <a:ea typeface="Calibri" pitchFamily="34" charset="-122"/>
-                          <a:cs typeface="Calibri" pitchFamily="34" charset="-120"/>
-                        </a:rPr>
-                        <a:t>Rise above 180 mg/dL</a:t>
-                      </a:r>
-                      <a:endParaRPr lang="en-US" sz="1300" dirty="0">
-                        <a:latin typeface="Calibri" charset="0"/>
-                        <a:ea typeface="Calibri" charset="0"/>
-                        <a:cs typeface="Calibri" charset="0"/>
-                      </a:endParaRPr>
-                    </a:p>
-                  </a:txBody>
-                  <a:tcPr marL="76200" marR="76200" marT="38100" marB="38100" anchor="ctr">
+                  <a:tcPr marL="101600" marR="101600" marT="50800" marB="50800" anchor="ctr">
                     <a:lnL w="9525" cap="flat" cmpd="sng" algn="ctr">
                       <a:solidFill>
                         <a:srgbClr val="D9E1E5"/>
@@ -6215,24 +6797,24 @@
                         <a:buNone/>
                       </a:pPr>
                       <a:r>
-                        <a:rPr lang="en-US" sz="1300" dirty="0">
+                        <a:rPr lang="en-US" sz="1400" dirty="0">
                           <a:solidFill>
-                            <a:srgbClr val="0D5F73"/>
+                            <a:srgbClr val="15232A"/>
                           </a:solidFill>
                           <a:latin typeface="Calibri" pitchFamily="34" charset="0"/>
                           <a:ea typeface="Calibri" pitchFamily="34" charset="-122"/>
                           <a:cs typeface="Calibri" pitchFamily="34" charset="-120"/>
                         </a:rPr>
-                        <a:t>Pratirup</a:t>
+                        <a:t>1.54</a:t>
                       </a:r>
-                      <a:endParaRPr lang="en-US" sz="1300" dirty="0">
+                      <a:endParaRPr lang="en-US" sz="1400" dirty="0">
                         <a:latin typeface="Calibri" charset="0"/>
                         <a:ea typeface="Calibri" charset="0"/>
                         <a:cs typeface="Calibri" charset="0"/>
                       </a:endParaRPr>
                     </a:p>
                   </a:txBody>
-                  <a:tcPr marL="76200" marR="76200" marT="38100" marB="38100" anchor="ctr">
+                  <a:tcPr marL="101600" marR="101600" marT="50800" marB="50800" anchor="ctr">
                     <a:lnL w="9525" cap="flat" cmpd="sng" algn="ctr">
                       <a:solidFill>
                         <a:srgbClr val="D9E1E5"/>
@@ -6283,24 +6865,24 @@
                         <a:buNone/>
                       </a:pPr>
                       <a:r>
-                        <a:rPr lang="en-US" sz="1300" dirty="0">
+                        <a:rPr lang="en-US" sz="1400" dirty="0">
                           <a:solidFill>
-                            <a:srgbClr val="0D5F73"/>
+                            <a:srgbClr val="15232A"/>
                           </a:solidFill>
                           <a:latin typeface="Calibri" pitchFamily="34" charset="0"/>
                           <a:ea typeface="Calibri" pitchFamily="34" charset="-122"/>
                           <a:cs typeface="Calibri" pitchFamily="34" charset="-120"/>
                         </a:rPr>
-                        <a:t>288</a:t>
+                        <a:t>1.00</a:t>
                       </a:r>
-                      <a:endParaRPr lang="en-US" sz="1300" dirty="0">
+                      <a:endParaRPr lang="en-US" sz="1400" dirty="0">
                         <a:latin typeface="Calibri" charset="0"/>
                         <a:ea typeface="Calibri" charset="0"/>
                         <a:cs typeface="Calibri" charset="0"/>
                       </a:endParaRPr>
                     </a:p>
                   </a:txBody>
-                  <a:tcPr marL="76200" marR="76200" marT="38100" marB="38100" anchor="ctr">
+                  <a:tcPr marL="101600" marR="101600" marT="50800" marB="50800" anchor="ctr">
                     <a:lnL w="9525" cap="flat" cmpd="sng" algn="ctr">
                       <a:solidFill>
                         <a:srgbClr val="D9E1E5"/>
@@ -6351,24 +6933,24 @@
                         <a:buNone/>
                       </a:pPr>
                       <a:r>
-                        <a:rPr lang="en-US" sz="1300" dirty="0">
+                        <a:rPr lang="en-US" sz="1400" dirty="0">
                           <a:solidFill>
-                            <a:srgbClr val="0D5F73"/>
+                            <a:srgbClr val="15232A"/>
                           </a:solidFill>
                           <a:latin typeface="Calibri" pitchFamily="34" charset="0"/>
                           <a:ea typeface="Calibri" pitchFamily="34" charset="-122"/>
                           <a:cs typeface="Calibri" pitchFamily="34" charset="-120"/>
                         </a:rPr>
-                        <a:t>95.5%</a:t>
+                        <a:t>36%</a:t>
                       </a:r>
-                      <a:endParaRPr lang="en-US" sz="1300" dirty="0">
+                      <a:endParaRPr lang="en-US" sz="1400" dirty="0">
                         <a:latin typeface="Calibri" charset="0"/>
                         <a:ea typeface="Calibri" charset="0"/>
                         <a:cs typeface="Calibri" charset="0"/>
                       </a:endParaRPr>
                     </a:p>
                   </a:txBody>
-                  <a:tcPr marL="76200" marR="76200" marT="38100" marB="38100" anchor="ctr">
+                  <a:tcPr marL="101600" marR="101600" marT="50800" marB="50800" anchor="ctr">
                     <a:lnL w="9525" cap="flat" cmpd="sng" algn="ctr">
                       <a:solidFill>
                         <a:srgbClr val="D9E1E5"/>
@@ -6419,24 +7001,24 @@
                         <a:buNone/>
                       </a:pPr>
                       <a:r>
-                        <a:rPr lang="en-US" sz="1300" dirty="0">
+                        <a:rPr lang="en-US" sz="1400" dirty="0">
                           <a:solidFill>
-                            <a:srgbClr val="0D5F73"/>
+                            <a:srgbClr val="15232A"/>
                           </a:solidFill>
                           <a:latin typeface="Calibri" pitchFamily="34" charset="0"/>
                           <a:ea typeface="Calibri" pitchFamily="34" charset="-122"/>
                           <a:cs typeface="Calibri" pitchFamily="34" charset="-120"/>
                         </a:rPr>
-                        <a:t>64.9%</a:t>
+                        <a:t>78% (45%) of 280</a:t>
                       </a:r>
-                      <a:endParaRPr lang="en-US" sz="1300" dirty="0">
+                      <a:endParaRPr lang="en-US" sz="1400" dirty="0">
                         <a:latin typeface="Calibri" charset="0"/>
                         <a:ea typeface="Calibri" charset="0"/>
                         <a:cs typeface="Calibri" charset="0"/>
                       </a:endParaRPr>
                     </a:p>
                   </a:txBody>
-                  <a:tcPr marL="76200" marR="76200" marT="38100" marB="38100" anchor="ctr">
+                  <a:tcPr marL="101600" marR="101600" marT="50800" marB="50800" anchor="ctr">
                     <a:lnL w="9525" cap="flat" cmpd="sng" algn="ctr">
                       <a:solidFill>
                         <a:srgbClr val="D9E1E5"/>
@@ -6487,7 +7069,77 @@
                         <a:buNone/>
                       </a:pPr>
                       <a:r>
-                        <a:rPr lang="en-US" sz="1300" dirty="0">
+                        <a:rPr lang="en-US" sz="1400" dirty="0">
+                          <a:solidFill>
+                            <a:srgbClr val="15232A"/>
+                          </a:solidFill>
+                          <a:latin typeface="Calibri" pitchFamily="34" charset="0"/>
+                          <a:ea typeface="Calibri" pitchFamily="34" charset="-122"/>
+                          <a:cs typeface="Calibri" pitchFamily="34" charset="-120"/>
+                        </a:rPr>
+                        <a:t>73% (40%) of 434</a:t>
+                      </a:r>
+                      <a:endParaRPr lang="en-US" sz="1400" dirty="0">
+                        <a:latin typeface="Calibri" charset="0"/>
+                        <a:ea typeface="Calibri" charset="0"/>
+                        <a:cs typeface="Calibri" charset="0"/>
+                      </a:endParaRPr>
+                    </a:p>
+                  </a:txBody>
+                  <a:tcPr marL="101600" marR="101600" marT="50800" marB="50800" anchor="ctr">
+                    <a:lnL w="9525" cap="flat" cmpd="sng" algn="ctr">
+                      <a:solidFill>
+                        <a:srgbClr val="D9E1E5"/>
+                      </a:solidFill>
+                      <a:prstDash val="solid"/>
+                      <a:round/>
+                      <a:headEnd type="none" w="med" len="med"/>
+                      <a:tailEnd type="none" w="med" len="med"/>
+                    </a:lnL>
+                    <a:lnR w="9525" cap="flat" cmpd="sng" algn="ctr">
+                      <a:solidFill>
+                        <a:srgbClr val="D9E1E5"/>
+                      </a:solidFill>
+                      <a:prstDash val="solid"/>
+                      <a:round/>
+                      <a:headEnd type="none" w="med" len="med"/>
+                      <a:tailEnd type="none" w="med" len="med"/>
+                    </a:lnR>
+                    <a:lnT w="9525" cap="flat" cmpd="sng" algn="ctr">
+                      <a:solidFill>
+                        <a:srgbClr val="D9E1E5"/>
+                      </a:solidFill>
+                      <a:prstDash val="solid"/>
+                      <a:round/>
+                      <a:headEnd type="none" w="med" len="med"/>
+                      <a:tailEnd type="none" w="med" len="med"/>
+                    </a:lnT>
+                    <a:lnB w="9525" cap="flat" cmpd="sng" algn="ctr">
+                      <a:solidFill>
+                        <a:srgbClr val="D9E1E5"/>
+                      </a:solidFill>
+                      <a:prstDash val="solid"/>
+                      <a:round/>
+                      <a:headEnd type="none" w="med" len="med"/>
+                      <a:tailEnd type="none" w="med" len="med"/>
+                    </a:lnB>
+                    <a:solidFill>
+                      <a:srgbClr val="FFFFFF"/>
+                    </a:solidFill>
+                  </a:tcPr>
+                </a:tc>
+              </a:tr>
+              <a:tr h="457200">
+                <a:tc>
+                  <a:txBody>
+                    <a:bodyPr/>
+                    <a:lstStyle/>
+                    <a:p>
+                      <a:pPr indent="0" marL="0">
+                        <a:buNone/>
+                      </a:pPr>
+                      <a:r>
+                        <a:rPr lang="en-US" sz="1400" b="1" dirty="0">
                           <a:solidFill>
                             <a:srgbClr val="0D5F73"/>
                           </a:solidFill>
@@ -6495,16 +7147,426 @@
                           <a:ea typeface="Calibri" pitchFamily="34" charset="-122"/>
                           <a:cs typeface="Calibri" pitchFamily="34" charset="-120"/>
                         </a:rPr>
-                        <a:t>46.9%</a:t>
+                        <a:t>Held-out test</a:t>
                       </a:r>
-                      <a:endParaRPr lang="en-US" sz="1300" dirty="0">
+                      <a:endParaRPr lang="en-US" sz="1400" dirty="0">
                         <a:latin typeface="Calibri" charset="0"/>
                         <a:ea typeface="Calibri" charset="0"/>
                         <a:cs typeface="Calibri" charset="0"/>
                       </a:endParaRPr>
                     </a:p>
                   </a:txBody>
-                  <a:tcPr marL="76200" marR="76200" marT="38100" marB="38100" anchor="ctr">
+                  <a:tcPr marL="101600" marR="101600" marT="50800" marB="50800" anchor="ctr">
+                    <a:lnL w="9525" cap="flat" cmpd="sng" algn="ctr">
+                      <a:solidFill>
+                        <a:srgbClr val="D9E1E5"/>
+                      </a:solidFill>
+                      <a:prstDash val="solid"/>
+                      <a:round/>
+                      <a:headEnd type="none" w="med" len="med"/>
+                      <a:tailEnd type="none" w="med" len="med"/>
+                    </a:lnL>
+                    <a:lnR w="9525" cap="flat" cmpd="sng" algn="ctr">
+                      <a:solidFill>
+                        <a:srgbClr val="D9E1E5"/>
+                      </a:solidFill>
+                      <a:prstDash val="solid"/>
+                      <a:round/>
+                      <a:headEnd type="none" w="med" len="med"/>
+                      <a:tailEnd type="none" w="med" len="med"/>
+                    </a:lnR>
+                    <a:lnT w="9525" cap="flat" cmpd="sng" algn="ctr">
+                      <a:solidFill>
+                        <a:srgbClr val="D9E1E5"/>
+                      </a:solidFill>
+                      <a:prstDash val="solid"/>
+                      <a:round/>
+                      <a:headEnd type="none" w="med" len="med"/>
+                      <a:tailEnd type="none" w="med" len="med"/>
+                    </a:lnT>
+                    <a:lnB w="9525" cap="flat" cmpd="sng" algn="ctr">
+                      <a:solidFill>
+                        <a:srgbClr val="D9E1E5"/>
+                      </a:solidFill>
+                      <a:prstDash val="solid"/>
+                      <a:round/>
+                      <a:headEnd type="none" w="med" len="med"/>
+                      <a:tailEnd type="none" w="med" len="med"/>
+                    </a:lnB>
+                    <a:solidFill>
+                      <a:srgbClr val="E1EFF2"/>
+                    </a:solidFill>
+                  </a:tcPr>
+                </a:tc>
+                <a:tc>
+                  <a:txBody>
+                    <a:bodyPr/>
+                    <a:lstStyle/>
+                    <a:p>
+                      <a:pPr indent="0" marL="0">
+                        <a:buNone/>
+                      </a:pPr>
+                      <a:r>
+                        <a:rPr lang="en-US" sz="1400" b="1" dirty="0">
+                          <a:solidFill>
+                            <a:srgbClr val="0D5F73"/>
+                          </a:solidFill>
+                          <a:latin typeface="Calibri" pitchFamily="34" charset="0"/>
+                          <a:ea typeface="Calibri" pitchFamily="34" charset="-122"/>
+                          <a:cs typeface="Calibri" pitchFamily="34" charset="-120"/>
+                        </a:rPr>
+                        <a:t>1.89</a:t>
+                      </a:r>
+                      <a:endParaRPr lang="en-US" sz="1400" dirty="0">
+                        <a:latin typeface="Calibri" charset="0"/>
+                        <a:ea typeface="Calibri" charset="0"/>
+                        <a:cs typeface="Calibri" charset="0"/>
+                      </a:endParaRPr>
+                    </a:p>
+                  </a:txBody>
+                  <a:tcPr marL="101600" marR="101600" marT="50800" marB="50800" anchor="ctr">
+                    <a:lnL w="9525" cap="flat" cmpd="sng" algn="ctr">
+                      <a:solidFill>
+                        <a:srgbClr val="D9E1E5"/>
+                      </a:solidFill>
+                      <a:prstDash val="solid"/>
+                      <a:round/>
+                      <a:headEnd type="none" w="med" len="med"/>
+                      <a:tailEnd type="none" w="med" len="med"/>
+                    </a:lnL>
+                    <a:lnR w="9525" cap="flat" cmpd="sng" algn="ctr">
+                      <a:solidFill>
+                        <a:srgbClr val="D9E1E5"/>
+                      </a:solidFill>
+                      <a:prstDash val="solid"/>
+                      <a:round/>
+                      <a:headEnd type="none" w="med" len="med"/>
+                      <a:tailEnd type="none" w="med" len="med"/>
+                    </a:lnR>
+                    <a:lnT w="9525" cap="flat" cmpd="sng" algn="ctr">
+                      <a:solidFill>
+                        <a:srgbClr val="D9E1E5"/>
+                      </a:solidFill>
+                      <a:prstDash val="solid"/>
+                      <a:round/>
+                      <a:headEnd type="none" w="med" len="med"/>
+                      <a:tailEnd type="none" w="med" len="med"/>
+                    </a:lnT>
+                    <a:lnB w="9525" cap="flat" cmpd="sng" algn="ctr">
+                      <a:solidFill>
+                        <a:srgbClr val="D9E1E5"/>
+                      </a:solidFill>
+                      <a:prstDash val="solid"/>
+                      <a:round/>
+                      <a:headEnd type="none" w="med" len="med"/>
+                      <a:tailEnd type="none" w="med" len="med"/>
+                    </a:lnB>
+                    <a:solidFill>
+                      <a:srgbClr val="E1EFF2"/>
+                    </a:solidFill>
+                  </a:tcPr>
+                </a:tc>
+                <a:tc>
+                  <a:txBody>
+                    <a:bodyPr/>
+                    <a:lstStyle/>
+                    <a:p>
+                      <a:pPr indent="0" marL="0">
+                        <a:buNone/>
+                      </a:pPr>
+                      <a:r>
+                        <a:rPr lang="en-US" sz="1400" b="1" dirty="0">
+                          <a:solidFill>
+                            <a:srgbClr val="0D5F73"/>
+                          </a:solidFill>
+                          <a:latin typeface="Calibri" pitchFamily="34" charset="0"/>
+                          <a:ea typeface="Calibri" pitchFamily="34" charset="-122"/>
+                          <a:cs typeface="Calibri" pitchFamily="34" charset="-120"/>
+                        </a:rPr>
+                        <a:t>1.38</a:t>
+                      </a:r>
+                      <a:endParaRPr lang="en-US" sz="1400" dirty="0">
+                        <a:latin typeface="Calibri" charset="0"/>
+                        <a:ea typeface="Calibri" charset="0"/>
+                        <a:cs typeface="Calibri" charset="0"/>
+                      </a:endParaRPr>
+                    </a:p>
+                  </a:txBody>
+                  <a:tcPr marL="101600" marR="101600" marT="50800" marB="50800" anchor="ctr">
+                    <a:lnL w="9525" cap="flat" cmpd="sng" algn="ctr">
+                      <a:solidFill>
+                        <a:srgbClr val="D9E1E5"/>
+                      </a:solidFill>
+                      <a:prstDash val="solid"/>
+                      <a:round/>
+                      <a:headEnd type="none" w="med" len="med"/>
+                      <a:tailEnd type="none" w="med" len="med"/>
+                    </a:lnL>
+                    <a:lnR w="9525" cap="flat" cmpd="sng" algn="ctr">
+                      <a:solidFill>
+                        <a:srgbClr val="D9E1E5"/>
+                      </a:solidFill>
+                      <a:prstDash val="solid"/>
+                      <a:round/>
+                      <a:headEnd type="none" w="med" len="med"/>
+                      <a:tailEnd type="none" w="med" len="med"/>
+                    </a:lnR>
+                    <a:lnT w="9525" cap="flat" cmpd="sng" algn="ctr">
+                      <a:solidFill>
+                        <a:srgbClr val="D9E1E5"/>
+                      </a:solidFill>
+                      <a:prstDash val="solid"/>
+                      <a:round/>
+                      <a:headEnd type="none" w="med" len="med"/>
+                      <a:tailEnd type="none" w="med" len="med"/>
+                    </a:lnT>
+                    <a:lnB w="9525" cap="flat" cmpd="sng" algn="ctr">
+                      <a:solidFill>
+                        <a:srgbClr val="D9E1E5"/>
+                      </a:solidFill>
+                      <a:prstDash val="solid"/>
+                      <a:round/>
+                      <a:headEnd type="none" w="med" len="med"/>
+                      <a:tailEnd type="none" w="med" len="med"/>
+                    </a:lnB>
+                    <a:solidFill>
+                      <a:srgbClr val="E1EFF2"/>
+                    </a:solidFill>
+                  </a:tcPr>
+                </a:tc>
+                <a:tc>
+                  <a:txBody>
+                    <a:bodyPr/>
+                    <a:lstStyle/>
+                    <a:p>
+                      <a:pPr indent="0" marL="0">
+                        <a:buNone/>
+                      </a:pPr>
+                      <a:r>
+                        <a:rPr lang="en-US" sz="1400" b="1" dirty="0">
+                          <a:solidFill>
+                            <a:srgbClr val="0D5F73"/>
+                          </a:solidFill>
+                          <a:latin typeface="Calibri" pitchFamily="34" charset="0"/>
+                          <a:ea typeface="Calibri" pitchFamily="34" charset="-122"/>
+                          <a:cs typeface="Calibri" pitchFamily="34" charset="-120"/>
+                        </a:rPr>
+                        <a:t>27%</a:t>
+                      </a:r>
+                      <a:endParaRPr lang="en-US" sz="1400" dirty="0">
+                        <a:latin typeface="Calibri" charset="0"/>
+                        <a:ea typeface="Calibri" charset="0"/>
+                        <a:cs typeface="Calibri" charset="0"/>
+                      </a:endParaRPr>
+                    </a:p>
+                  </a:txBody>
+                  <a:tcPr marL="101600" marR="101600" marT="50800" marB="50800" anchor="ctr">
+                    <a:lnL w="9525" cap="flat" cmpd="sng" algn="ctr">
+                      <a:solidFill>
+                        <a:srgbClr val="D9E1E5"/>
+                      </a:solidFill>
+                      <a:prstDash val="solid"/>
+                      <a:round/>
+                      <a:headEnd type="none" w="med" len="med"/>
+                      <a:tailEnd type="none" w="med" len="med"/>
+                    </a:lnL>
+                    <a:lnR w="9525" cap="flat" cmpd="sng" algn="ctr">
+                      <a:solidFill>
+                        <a:srgbClr val="D9E1E5"/>
+                      </a:solidFill>
+                      <a:prstDash val="solid"/>
+                      <a:round/>
+                      <a:headEnd type="none" w="med" len="med"/>
+                      <a:tailEnd type="none" w="med" len="med"/>
+                    </a:lnR>
+                    <a:lnT w="9525" cap="flat" cmpd="sng" algn="ctr">
+                      <a:solidFill>
+                        <a:srgbClr val="D9E1E5"/>
+                      </a:solidFill>
+                      <a:prstDash val="solid"/>
+                      <a:round/>
+                      <a:headEnd type="none" w="med" len="med"/>
+                      <a:tailEnd type="none" w="med" len="med"/>
+                    </a:lnT>
+                    <a:lnB w="9525" cap="flat" cmpd="sng" algn="ctr">
+                      <a:solidFill>
+                        <a:srgbClr val="D9E1E5"/>
+                      </a:solidFill>
+                      <a:prstDash val="solid"/>
+                      <a:round/>
+                      <a:headEnd type="none" w="med" len="med"/>
+                      <a:tailEnd type="none" w="med" len="med"/>
+                    </a:lnB>
+                    <a:solidFill>
+                      <a:srgbClr val="E1EFF2"/>
+                    </a:solidFill>
+                  </a:tcPr>
+                </a:tc>
+                <a:tc>
+                  <a:txBody>
+                    <a:bodyPr/>
+                    <a:lstStyle/>
+                    <a:p>
+                      <a:pPr indent="0" marL="0">
+                        <a:buNone/>
+                      </a:pPr>
+                      <a:r>
+                        <a:rPr lang="en-US" sz="1400" b="1" dirty="0">
+                          <a:solidFill>
+                            <a:srgbClr val="0D5F73"/>
+                          </a:solidFill>
+                          <a:latin typeface="Calibri" pitchFamily="34" charset="0"/>
+                          <a:ea typeface="Calibri" pitchFamily="34" charset="-122"/>
+                          <a:cs typeface="Calibri" pitchFamily="34" charset="-120"/>
+                        </a:rPr>
+                        <a:t>83% (57%) of 76</a:t>
+                      </a:r>
+                      <a:endParaRPr lang="en-US" sz="1400" dirty="0">
+                        <a:latin typeface="Calibri" charset="0"/>
+                        <a:ea typeface="Calibri" charset="0"/>
+                        <a:cs typeface="Calibri" charset="0"/>
+                      </a:endParaRPr>
+                    </a:p>
+                  </a:txBody>
+                  <a:tcPr marL="101600" marR="101600" marT="50800" marB="50800" anchor="ctr">
+                    <a:lnL w="9525" cap="flat" cmpd="sng" algn="ctr">
+                      <a:solidFill>
+                        <a:srgbClr val="D9E1E5"/>
+                      </a:solidFill>
+                      <a:prstDash val="solid"/>
+                      <a:round/>
+                      <a:headEnd type="none" w="med" len="med"/>
+                      <a:tailEnd type="none" w="med" len="med"/>
+                    </a:lnL>
+                    <a:lnR w="9525" cap="flat" cmpd="sng" algn="ctr">
+                      <a:solidFill>
+                        <a:srgbClr val="D9E1E5"/>
+                      </a:solidFill>
+                      <a:prstDash val="solid"/>
+                      <a:round/>
+                      <a:headEnd type="none" w="med" len="med"/>
+                      <a:tailEnd type="none" w="med" len="med"/>
+                    </a:lnR>
+                    <a:lnT w="9525" cap="flat" cmpd="sng" algn="ctr">
+                      <a:solidFill>
+                        <a:srgbClr val="D9E1E5"/>
+                      </a:solidFill>
+                      <a:prstDash val="solid"/>
+                      <a:round/>
+                      <a:headEnd type="none" w="med" len="med"/>
+                      <a:tailEnd type="none" w="med" len="med"/>
+                    </a:lnT>
+                    <a:lnB w="9525" cap="flat" cmpd="sng" algn="ctr">
+                      <a:solidFill>
+                        <a:srgbClr val="D9E1E5"/>
+                      </a:solidFill>
+                      <a:prstDash val="solid"/>
+                      <a:round/>
+                      <a:headEnd type="none" w="med" len="med"/>
+                      <a:tailEnd type="none" w="med" len="med"/>
+                    </a:lnB>
+                    <a:solidFill>
+                      <a:srgbClr val="E1EFF2"/>
+                    </a:solidFill>
+                  </a:tcPr>
+                </a:tc>
+                <a:tc>
+                  <a:txBody>
+                    <a:bodyPr/>
+                    <a:lstStyle/>
+                    <a:p>
+                      <a:pPr indent="0" marL="0">
+                        <a:buNone/>
+                      </a:pPr>
+                      <a:r>
+                        <a:rPr lang="en-US" sz="1400" b="1" dirty="0">
+                          <a:solidFill>
+                            <a:srgbClr val="0D5F73"/>
+                          </a:solidFill>
+                          <a:latin typeface="Calibri" pitchFamily="34" charset="0"/>
+                          <a:ea typeface="Calibri" pitchFamily="34" charset="-122"/>
+                          <a:cs typeface="Calibri" pitchFamily="34" charset="-120"/>
+                        </a:rPr>
+                        <a:t>78% (52%) of 54</a:t>
+                      </a:r>
+                      <a:endParaRPr lang="en-US" sz="1400" dirty="0">
+                        <a:latin typeface="Calibri" charset="0"/>
+                        <a:ea typeface="Calibri" charset="0"/>
+                        <a:cs typeface="Calibri" charset="0"/>
+                      </a:endParaRPr>
+                    </a:p>
+                  </a:txBody>
+                  <a:tcPr marL="101600" marR="101600" marT="50800" marB="50800" anchor="ctr">
+                    <a:lnL w="9525" cap="flat" cmpd="sng" algn="ctr">
+                      <a:solidFill>
+                        <a:srgbClr val="D9E1E5"/>
+                      </a:solidFill>
+                      <a:prstDash val="solid"/>
+                      <a:round/>
+                      <a:headEnd type="none" w="med" len="med"/>
+                      <a:tailEnd type="none" w="med" len="med"/>
+                    </a:lnL>
+                    <a:lnR w="9525" cap="flat" cmpd="sng" algn="ctr">
+                      <a:solidFill>
+                        <a:srgbClr val="D9E1E5"/>
+                      </a:solidFill>
+                      <a:prstDash val="solid"/>
+                      <a:round/>
+                      <a:headEnd type="none" w="med" len="med"/>
+                      <a:tailEnd type="none" w="med" len="med"/>
+                    </a:lnR>
+                    <a:lnT w="9525" cap="flat" cmpd="sng" algn="ctr">
+                      <a:solidFill>
+                        <a:srgbClr val="D9E1E5"/>
+                      </a:solidFill>
+                      <a:prstDash val="solid"/>
+                      <a:round/>
+                      <a:headEnd type="none" w="med" len="med"/>
+                      <a:tailEnd type="none" w="med" len="med"/>
+                    </a:lnT>
+                    <a:lnB w="9525" cap="flat" cmpd="sng" algn="ctr">
+                      <a:solidFill>
+                        <a:srgbClr val="D9E1E5"/>
+                      </a:solidFill>
+                      <a:prstDash val="solid"/>
+                      <a:round/>
+                      <a:headEnd type="none" w="med" len="med"/>
+                      <a:tailEnd type="none" w="med" len="med"/>
+                    </a:lnB>
+                    <a:solidFill>
+                      <a:srgbClr val="E1EFF2"/>
+                    </a:solidFill>
+                  </a:tcPr>
+                </a:tc>
+              </a:tr>
+              <a:tr h="457200">
+                <a:tc>
+                  <a:txBody>
+                    <a:bodyPr/>
+                    <a:lstStyle/>
+                    <a:p>
+                      <a:pPr indent="0" marL="0">
+                        <a:buNone/>
+                      </a:pPr>
+                      <a:r>
+                        <a:rPr lang="en-US" sz="1400" dirty="0">
+                          <a:solidFill>
+                            <a:srgbClr val="15232A"/>
+                          </a:solidFill>
+                          <a:latin typeface="Calibri" pitchFamily="34" charset="0"/>
+                          <a:ea typeface="Calibri" pitchFamily="34" charset="-122"/>
+                          <a:cs typeface="Calibri" pitchFamily="34" charset="-120"/>
+                        </a:rPr>
+                        <a:t>CGMacros T2D (external)</a:t>
+                      </a:r>
+                      <a:endParaRPr lang="en-US" sz="1400" dirty="0">
+                        <a:latin typeface="Calibri" charset="0"/>
+                        <a:ea typeface="Calibri" charset="0"/>
+                        <a:cs typeface="Calibri" charset="0"/>
+                      </a:endParaRPr>
+                    </a:p>
+                  </a:txBody>
+                  <a:tcPr marL="101600" marR="101600" marT="50800" marB="50800" anchor="ctr">
                     <a:lnL w="9525" cap="flat" cmpd="sng" algn="ctr">
                       <a:solidFill>
                         <a:srgbClr val="D9E1E5"/>
@@ -6555,24 +7617,24 @@
                         <a:buNone/>
                       </a:pPr>
                       <a:r>
-                        <a:rPr lang="en-US" sz="1300" dirty="0">
+                        <a:rPr lang="en-US" sz="1400" dirty="0">
                           <a:solidFill>
-                            <a:srgbClr val="0D5F73"/>
+                            <a:srgbClr val="15232A"/>
                           </a:solidFill>
                           <a:latin typeface="Calibri" pitchFamily="34" charset="0"/>
                           <a:ea typeface="Calibri" pitchFamily="34" charset="-122"/>
                           <a:cs typeface="Calibri" pitchFamily="34" charset="-120"/>
                         </a:rPr>
-                        <a:t>1.51</a:t>
+                        <a:t>1.78</a:t>
                       </a:r>
-                      <a:endParaRPr lang="en-US" sz="1300" dirty="0">
+                      <a:endParaRPr lang="en-US" sz="1400" dirty="0">
                         <a:latin typeface="Calibri" charset="0"/>
                         <a:ea typeface="Calibri" charset="0"/>
                         <a:cs typeface="Calibri" charset="0"/>
                       </a:endParaRPr>
                     </a:p>
                   </a:txBody>
-                  <a:tcPr marL="76200" marR="76200" marT="38100" marB="38100" anchor="ctr">
+                  <a:tcPr marL="101600" marR="101600" marT="50800" marB="50800" anchor="ctr">
                     <a:lnL w="9525" cap="flat" cmpd="sng" algn="ctr">
                       <a:solidFill>
                         <a:srgbClr val="D9E1E5"/>
@@ -6623,134 +7685,7 @@
                         <a:buNone/>
                       </a:pPr>
                       <a:r>
-                        <a:rPr lang="en-US" sz="1300" dirty="0">
-                          <a:solidFill>
-                            <a:srgbClr val="0D5F73"/>
-                          </a:solidFill>
-                          <a:latin typeface="Calibri" pitchFamily="34" charset="0"/>
-                          <a:ea typeface="Calibri" pitchFamily="34" charset="-122"/>
-                          <a:cs typeface="Calibri" pitchFamily="34" charset="-120"/>
-                        </a:rPr>
-                        <a:t>0.55 (0.049)</a:t>
-                      </a:r>
-                      <a:endParaRPr lang="en-US" sz="1300" dirty="0">
-                        <a:latin typeface="Calibri" charset="0"/>
-                        <a:ea typeface="Calibri" charset="0"/>
-                        <a:cs typeface="Calibri" charset="0"/>
-                      </a:endParaRPr>
-                    </a:p>
-                  </a:txBody>
-                  <a:tcPr marL="76200" marR="76200" marT="38100" marB="38100" anchor="ctr">
-                    <a:lnL w="9525" cap="flat" cmpd="sng" algn="ctr">
-                      <a:solidFill>
-                        <a:srgbClr val="D9E1E5"/>
-                      </a:solidFill>
-                      <a:prstDash val="solid"/>
-                      <a:round/>
-                      <a:headEnd type="none" w="med" len="med"/>
-                      <a:tailEnd type="none" w="med" len="med"/>
-                    </a:lnL>
-                    <a:lnR w="9525" cap="flat" cmpd="sng" algn="ctr">
-                      <a:solidFill>
-                        <a:srgbClr val="D9E1E5"/>
-                      </a:solidFill>
-                      <a:prstDash val="solid"/>
-                      <a:round/>
-                      <a:headEnd type="none" w="med" len="med"/>
-                      <a:tailEnd type="none" w="med" len="med"/>
-                    </a:lnR>
-                    <a:lnT w="9525" cap="flat" cmpd="sng" algn="ctr">
-                      <a:solidFill>
-                        <a:srgbClr val="D9E1E5"/>
-                      </a:solidFill>
-                      <a:prstDash val="solid"/>
-                      <a:round/>
-                      <a:headEnd type="none" w="med" len="med"/>
-                      <a:tailEnd type="none" w="med" len="med"/>
-                    </a:lnT>
-                    <a:lnB w="9525" cap="flat" cmpd="sng" algn="ctr">
-                      <a:solidFill>
-                        <a:srgbClr val="D9E1E5"/>
-                      </a:solidFill>
-                      <a:prstDash val="solid"/>
-                      <a:round/>
-                      <a:headEnd type="none" w="med" len="med"/>
-                      <a:tailEnd type="none" w="med" len="med"/>
-                    </a:lnB>
-                    <a:solidFill>
-                      <a:srgbClr val="FFFFFF"/>
-                    </a:solidFill>
-                  </a:tcPr>
-                </a:tc>
-              </a:tr>
-              <a:tr h="411480">
-                <a:tc>
-                  <a:txBody>
-                    <a:bodyPr/>
-                    <a:lstStyle/>
-                    <a:p>
-                      <a:pPr indent="0" marL="0">
-                        <a:buNone/>
-                      </a:pPr>
-                      <a:endParaRPr lang="en-US" sz="1300" dirty="0">
-                        <a:latin typeface="Calibri" charset="0"/>
-                        <a:ea typeface="Calibri" charset="0"/>
-                        <a:cs typeface="Calibri" charset="0"/>
-                      </a:endParaRPr>
-                    </a:p>
-                  </a:txBody>
-                  <a:tcPr marL="76200" marR="76200" marT="38100" marB="38100" anchor="ctr">
-                    <a:lnL w="9525" cap="flat" cmpd="sng" algn="ctr">
-                      <a:solidFill>
-                        <a:srgbClr val="D9E1E5"/>
-                      </a:solidFill>
-                      <a:prstDash val="solid"/>
-                      <a:round/>
-                      <a:headEnd type="none" w="med" len="med"/>
-                      <a:tailEnd type="none" w="med" len="med"/>
-                    </a:lnL>
-                    <a:lnR w="9525" cap="flat" cmpd="sng" algn="ctr">
-                      <a:solidFill>
-                        <a:srgbClr val="D9E1E5"/>
-                      </a:solidFill>
-                      <a:prstDash val="solid"/>
-                      <a:round/>
-                      <a:headEnd type="none" w="med" len="med"/>
-                      <a:tailEnd type="none" w="med" len="med"/>
-                    </a:lnR>
-                    <a:lnT w="9525" cap="flat" cmpd="sng" algn="ctr">
-                      <a:solidFill>
-                        <a:srgbClr val="D9E1E5"/>
-                      </a:solidFill>
-                      <a:prstDash val="solid"/>
-                      <a:round/>
-                      <a:headEnd type="none" w="med" len="med"/>
-                      <a:tailEnd type="none" w="med" len="med"/>
-                    </a:lnT>
-                    <a:lnB w="9525" cap="flat" cmpd="sng" algn="ctr">
-                      <a:solidFill>
-                        <a:srgbClr val="D9E1E5"/>
-                      </a:solidFill>
-                      <a:prstDash val="solid"/>
-                      <a:round/>
-                      <a:headEnd type="none" w="med" len="med"/>
-                      <a:tailEnd type="none" w="med" len="med"/>
-                    </a:lnB>
-                    <a:solidFill>
-                      <a:srgbClr val="FAFBFC"/>
-                    </a:solidFill>
-                  </a:tcPr>
-                </a:tc>
-                <a:tc>
-                  <a:txBody>
-                    <a:bodyPr/>
-                    <a:lstStyle/>
-                    <a:p>
-                      <a:pPr indent="0" marL="0">
-                        <a:buNone/>
-                      </a:pPr>
-                      <a:r>
-                        <a:rPr lang="en-US" sz="1300" dirty="0">
+                        <a:rPr lang="en-US" sz="1400" dirty="0">
                           <a:solidFill>
                             <a:srgbClr val="15232A"/>
                           </a:solidFill>
@@ -6758,483 +7693,16 @@
                           <a:ea typeface="Calibri" pitchFamily="34" charset="-122"/>
                           <a:cs typeface="Calibri" pitchFamily="34" charset="-120"/>
                         </a:rPr>
-                        <a:t>Rate-of-change rule</a:t>
+                        <a:t>1.23</a:t>
                       </a:r>
-                      <a:endParaRPr lang="en-US" sz="1300" dirty="0">
+                      <a:endParaRPr lang="en-US" sz="1400" dirty="0">
                         <a:latin typeface="Calibri" charset="0"/>
                         <a:ea typeface="Calibri" charset="0"/>
                         <a:cs typeface="Calibri" charset="0"/>
                       </a:endParaRPr>
                     </a:p>
                   </a:txBody>
-                  <a:tcPr marL="76200" marR="76200" marT="38100" marB="38100" anchor="ctr">
-                    <a:lnL w="9525" cap="flat" cmpd="sng" algn="ctr">
-                      <a:solidFill>
-                        <a:srgbClr val="D9E1E5"/>
-                      </a:solidFill>
-                      <a:prstDash val="solid"/>
-                      <a:round/>
-                      <a:headEnd type="none" w="med" len="med"/>
-                      <a:tailEnd type="none" w="med" len="med"/>
-                    </a:lnL>
-                    <a:lnR w="9525" cap="flat" cmpd="sng" algn="ctr">
-                      <a:solidFill>
-                        <a:srgbClr val="D9E1E5"/>
-                      </a:solidFill>
-                      <a:prstDash val="solid"/>
-                      <a:round/>
-                      <a:headEnd type="none" w="med" len="med"/>
-                      <a:tailEnd type="none" w="med" len="med"/>
-                    </a:lnR>
-                    <a:lnT w="9525" cap="flat" cmpd="sng" algn="ctr">
-                      <a:solidFill>
-                        <a:srgbClr val="D9E1E5"/>
-                      </a:solidFill>
-                      <a:prstDash val="solid"/>
-                      <a:round/>
-                      <a:headEnd type="none" w="med" len="med"/>
-                      <a:tailEnd type="none" w="med" len="med"/>
-                    </a:lnT>
-                    <a:lnB w="9525" cap="flat" cmpd="sng" algn="ctr">
-                      <a:solidFill>
-                        <a:srgbClr val="D9E1E5"/>
-                      </a:solidFill>
-                      <a:prstDash val="solid"/>
-                      <a:round/>
-                      <a:headEnd type="none" w="med" len="med"/>
-                      <a:tailEnd type="none" w="med" len="med"/>
-                    </a:lnB>
-                    <a:solidFill>
-                      <a:srgbClr val="FAFBFC"/>
-                    </a:solidFill>
-                  </a:tcPr>
-                </a:tc>
-                <a:tc>
-                  <a:txBody>
-                    <a:bodyPr/>
-                    <a:lstStyle/>
-                    <a:p>
-                      <a:pPr indent="0" marL="0">
-                        <a:buNone/>
-                      </a:pPr>
-                      <a:endParaRPr lang="en-US" sz="1300" dirty="0">
-                        <a:latin typeface="Calibri" charset="0"/>
-                        <a:ea typeface="Calibri" charset="0"/>
-                        <a:cs typeface="Calibri" charset="0"/>
-                      </a:endParaRPr>
-                    </a:p>
-                  </a:txBody>
-                  <a:tcPr marL="76200" marR="76200" marT="38100" marB="38100" anchor="ctr">
-                    <a:lnL w="9525" cap="flat" cmpd="sng" algn="ctr">
-                      <a:solidFill>
-                        <a:srgbClr val="D9E1E5"/>
-                      </a:solidFill>
-                      <a:prstDash val="solid"/>
-                      <a:round/>
-                      <a:headEnd type="none" w="med" len="med"/>
-                      <a:tailEnd type="none" w="med" len="med"/>
-                    </a:lnL>
-                    <a:lnR w="9525" cap="flat" cmpd="sng" algn="ctr">
-                      <a:solidFill>
-                        <a:srgbClr val="D9E1E5"/>
-                      </a:solidFill>
-                      <a:prstDash val="solid"/>
-                      <a:round/>
-                      <a:headEnd type="none" w="med" len="med"/>
-                      <a:tailEnd type="none" w="med" len="med"/>
-                    </a:lnR>
-                    <a:lnT w="9525" cap="flat" cmpd="sng" algn="ctr">
-                      <a:solidFill>
-                        <a:srgbClr val="D9E1E5"/>
-                      </a:solidFill>
-                      <a:prstDash val="solid"/>
-                      <a:round/>
-                      <a:headEnd type="none" w="med" len="med"/>
-                      <a:tailEnd type="none" w="med" len="med"/>
-                    </a:lnT>
-                    <a:lnB w="9525" cap="flat" cmpd="sng" algn="ctr">
-                      <a:solidFill>
-                        <a:srgbClr val="D9E1E5"/>
-                      </a:solidFill>
-                      <a:prstDash val="solid"/>
-                      <a:round/>
-                      <a:headEnd type="none" w="med" len="med"/>
-                      <a:tailEnd type="none" w="med" len="med"/>
-                    </a:lnB>
-                    <a:solidFill>
-                      <a:srgbClr val="FAFBFC"/>
-                    </a:solidFill>
-                  </a:tcPr>
-                </a:tc>
-                <a:tc>
-                  <a:txBody>
-                    <a:bodyPr/>
-                    <a:lstStyle/>
-                    <a:p>
-                      <a:pPr indent="0" marL="0">
-                        <a:buNone/>
-                      </a:pPr>
-                      <a:r>
-                        <a:rPr lang="en-US" sz="1300" dirty="0">
-                          <a:solidFill>
-                            <a:srgbClr val="15232A"/>
-                          </a:solidFill>
-                          <a:latin typeface="Calibri" pitchFamily="34" charset="0"/>
-                          <a:ea typeface="Calibri" pitchFamily="34" charset="-122"/>
-                          <a:cs typeface="Calibri" pitchFamily="34" charset="-120"/>
-                        </a:rPr>
-                        <a:t>89.2%</a:t>
-                      </a:r>
-                      <a:endParaRPr lang="en-US" sz="1300" dirty="0">
-                        <a:latin typeface="Calibri" charset="0"/>
-                        <a:ea typeface="Calibri" charset="0"/>
-                        <a:cs typeface="Calibri" charset="0"/>
-                      </a:endParaRPr>
-                    </a:p>
-                  </a:txBody>
-                  <a:tcPr marL="76200" marR="76200" marT="38100" marB="38100" anchor="ctr">
-                    <a:lnL w="9525" cap="flat" cmpd="sng" algn="ctr">
-                      <a:solidFill>
-                        <a:srgbClr val="D9E1E5"/>
-                      </a:solidFill>
-                      <a:prstDash val="solid"/>
-                      <a:round/>
-                      <a:headEnd type="none" w="med" len="med"/>
-                      <a:tailEnd type="none" w="med" len="med"/>
-                    </a:lnL>
-                    <a:lnR w="9525" cap="flat" cmpd="sng" algn="ctr">
-                      <a:solidFill>
-                        <a:srgbClr val="D9E1E5"/>
-                      </a:solidFill>
-                      <a:prstDash val="solid"/>
-                      <a:round/>
-                      <a:headEnd type="none" w="med" len="med"/>
-                      <a:tailEnd type="none" w="med" len="med"/>
-                    </a:lnR>
-                    <a:lnT w="9525" cap="flat" cmpd="sng" algn="ctr">
-                      <a:solidFill>
-                        <a:srgbClr val="D9E1E5"/>
-                      </a:solidFill>
-                      <a:prstDash val="solid"/>
-                      <a:round/>
-                      <a:headEnd type="none" w="med" len="med"/>
-                      <a:tailEnd type="none" w="med" len="med"/>
-                    </a:lnT>
-                    <a:lnB w="9525" cap="flat" cmpd="sng" algn="ctr">
-                      <a:solidFill>
-                        <a:srgbClr val="D9E1E5"/>
-                      </a:solidFill>
-                      <a:prstDash val="solid"/>
-                      <a:round/>
-                      <a:headEnd type="none" w="med" len="med"/>
-                      <a:tailEnd type="none" w="med" len="med"/>
-                    </a:lnB>
-                    <a:solidFill>
-                      <a:srgbClr val="FAFBFC"/>
-                    </a:solidFill>
-                  </a:tcPr>
-                </a:tc>
-                <a:tc>
-                  <a:txBody>
-                    <a:bodyPr/>
-                    <a:lstStyle/>
-                    <a:p>
-                      <a:pPr indent="0" marL="0">
-                        <a:buNone/>
-                      </a:pPr>
-                      <a:r>
-                        <a:rPr lang="en-US" sz="1300" dirty="0">
-                          <a:solidFill>
-                            <a:srgbClr val="15232A"/>
-                          </a:solidFill>
-                          <a:latin typeface="Calibri" pitchFamily="34" charset="0"/>
-                          <a:ea typeface="Calibri" pitchFamily="34" charset="-122"/>
-                          <a:cs typeface="Calibri" pitchFamily="34" charset="-120"/>
-                        </a:rPr>
-                        <a:t>47.6%</a:t>
-                      </a:r>
-                      <a:endParaRPr lang="en-US" sz="1300" dirty="0">
-                        <a:latin typeface="Calibri" charset="0"/>
-                        <a:ea typeface="Calibri" charset="0"/>
-                        <a:cs typeface="Calibri" charset="0"/>
-                      </a:endParaRPr>
-                    </a:p>
-                  </a:txBody>
-                  <a:tcPr marL="76200" marR="76200" marT="38100" marB="38100" anchor="ctr">
-                    <a:lnL w="9525" cap="flat" cmpd="sng" algn="ctr">
-                      <a:solidFill>
-                        <a:srgbClr val="D9E1E5"/>
-                      </a:solidFill>
-                      <a:prstDash val="solid"/>
-                      <a:round/>
-                      <a:headEnd type="none" w="med" len="med"/>
-                      <a:tailEnd type="none" w="med" len="med"/>
-                    </a:lnL>
-                    <a:lnR w="9525" cap="flat" cmpd="sng" algn="ctr">
-                      <a:solidFill>
-                        <a:srgbClr val="D9E1E5"/>
-                      </a:solidFill>
-                      <a:prstDash val="solid"/>
-                      <a:round/>
-                      <a:headEnd type="none" w="med" len="med"/>
-                      <a:tailEnd type="none" w="med" len="med"/>
-                    </a:lnR>
-                    <a:lnT w="9525" cap="flat" cmpd="sng" algn="ctr">
-                      <a:solidFill>
-                        <a:srgbClr val="D9E1E5"/>
-                      </a:solidFill>
-                      <a:prstDash val="solid"/>
-                      <a:round/>
-                      <a:headEnd type="none" w="med" len="med"/>
-                      <a:tailEnd type="none" w="med" len="med"/>
-                    </a:lnT>
-                    <a:lnB w="9525" cap="flat" cmpd="sng" algn="ctr">
-                      <a:solidFill>
-                        <a:srgbClr val="D9E1E5"/>
-                      </a:solidFill>
-                      <a:prstDash val="solid"/>
-                      <a:round/>
-                      <a:headEnd type="none" w="med" len="med"/>
-                      <a:tailEnd type="none" w="med" len="med"/>
-                    </a:lnB>
-                    <a:solidFill>
-                      <a:srgbClr val="FAFBFC"/>
-                    </a:solidFill>
-                  </a:tcPr>
-                </a:tc>
-                <a:tc>
-                  <a:txBody>
-                    <a:bodyPr/>
-                    <a:lstStyle/>
-                    <a:p>
-                      <a:pPr indent="0" marL="0">
-                        <a:buNone/>
-                      </a:pPr>
-                      <a:r>
-                        <a:rPr lang="en-US" sz="1300" dirty="0">
-                          <a:solidFill>
-                            <a:srgbClr val="15232A"/>
-                          </a:solidFill>
-                          <a:latin typeface="Calibri" pitchFamily="34" charset="0"/>
-                          <a:ea typeface="Calibri" pitchFamily="34" charset="-122"/>
-                          <a:cs typeface="Calibri" pitchFamily="34" charset="-120"/>
-                        </a:rPr>
-                        <a:t>40.8%</a:t>
-                      </a:r>
-                      <a:endParaRPr lang="en-US" sz="1300" dirty="0">
-                        <a:latin typeface="Calibri" charset="0"/>
-                        <a:ea typeface="Calibri" charset="0"/>
-                        <a:cs typeface="Calibri" charset="0"/>
-                      </a:endParaRPr>
-                    </a:p>
-                  </a:txBody>
-                  <a:tcPr marL="76200" marR="76200" marT="38100" marB="38100" anchor="ctr">
-                    <a:lnL w="9525" cap="flat" cmpd="sng" algn="ctr">
-                      <a:solidFill>
-                        <a:srgbClr val="D9E1E5"/>
-                      </a:solidFill>
-                      <a:prstDash val="solid"/>
-                      <a:round/>
-                      <a:headEnd type="none" w="med" len="med"/>
-                      <a:tailEnd type="none" w="med" len="med"/>
-                    </a:lnL>
-                    <a:lnR w="9525" cap="flat" cmpd="sng" algn="ctr">
-                      <a:solidFill>
-                        <a:srgbClr val="D9E1E5"/>
-                      </a:solidFill>
-                      <a:prstDash val="solid"/>
-                      <a:round/>
-                      <a:headEnd type="none" w="med" len="med"/>
-                      <a:tailEnd type="none" w="med" len="med"/>
-                    </a:lnR>
-                    <a:lnT w="9525" cap="flat" cmpd="sng" algn="ctr">
-                      <a:solidFill>
-                        <a:srgbClr val="D9E1E5"/>
-                      </a:solidFill>
-                      <a:prstDash val="solid"/>
-                      <a:round/>
-                      <a:headEnd type="none" w="med" len="med"/>
-                      <a:tailEnd type="none" w="med" len="med"/>
-                    </a:lnT>
-                    <a:lnB w="9525" cap="flat" cmpd="sng" algn="ctr">
-                      <a:solidFill>
-                        <a:srgbClr val="D9E1E5"/>
-                      </a:solidFill>
-                      <a:prstDash val="solid"/>
-                      <a:round/>
-                      <a:headEnd type="none" w="med" len="med"/>
-                      <a:tailEnd type="none" w="med" len="med"/>
-                    </a:lnB>
-                    <a:solidFill>
-                      <a:srgbClr val="FAFBFC"/>
-                    </a:solidFill>
-                  </a:tcPr>
-                </a:tc>
-                <a:tc>
-                  <a:txBody>
-                    <a:bodyPr/>
-                    <a:lstStyle/>
-                    <a:p>
-                      <a:pPr indent="0" marL="0">
-                        <a:buNone/>
-                      </a:pPr>
-                      <a:r>
-                        <a:rPr lang="en-US" sz="1300" dirty="0">
-                          <a:solidFill>
-                            <a:srgbClr val="15232A"/>
-                          </a:solidFill>
-                          <a:latin typeface="Calibri" pitchFamily="34" charset="0"/>
-                          <a:ea typeface="Calibri" pitchFamily="34" charset="-122"/>
-                          <a:cs typeface="Calibri" pitchFamily="34" charset="-120"/>
-                        </a:rPr>
-                        <a:t>1.81</a:t>
-                      </a:r>
-                      <a:endParaRPr lang="en-US" sz="1300" dirty="0">
-                        <a:latin typeface="Calibri" charset="0"/>
-                        <a:ea typeface="Calibri" charset="0"/>
-                        <a:cs typeface="Calibri" charset="0"/>
-                      </a:endParaRPr>
-                    </a:p>
-                  </a:txBody>
-                  <a:tcPr marL="76200" marR="76200" marT="38100" marB="38100" anchor="ctr">
-                    <a:lnL w="9525" cap="flat" cmpd="sng" algn="ctr">
-                      <a:solidFill>
-                        <a:srgbClr val="D9E1E5"/>
-                      </a:solidFill>
-                      <a:prstDash val="solid"/>
-                      <a:round/>
-                      <a:headEnd type="none" w="med" len="med"/>
-                      <a:tailEnd type="none" w="med" len="med"/>
-                    </a:lnL>
-                    <a:lnR w="9525" cap="flat" cmpd="sng" algn="ctr">
-                      <a:solidFill>
-                        <a:srgbClr val="D9E1E5"/>
-                      </a:solidFill>
-                      <a:prstDash val="solid"/>
-                      <a:round/>
-                      <a:headEnd type="none" w="med" len="med"/>
-                      <a:tailEnd type="none" w="med" len="med"/>
-                    </a:lnR>
-                    <a:lnT w="9525" cap="flat" cmpd="sng" algn="ctr">
-                      <a:solidFill>
-                        <a:srgbClr val="D9E1E5"/>
-                      </a:solidFill>
-                      <a:prstDash val="solid"/>
-                      <a:round/>
-                      <a:headEnd type="none" w="med" len="med"/>
-                      <a:tailEnd type="none" w="med" len="med"/>
-                    </a:lnT>
-                    <a:lnB w="9525" cap="flat" cmpd="sng" algn="ctr">
-                      <a:solidFill>
-                        <a:srgbClr val="D9E1E5"/>
-                      </a:solidFill>
-                      <a:prstDash val="solid"/>
-                      <a:round/>
-                      <a:headEnd type="none" w="med" len="med"/>
-                      <a:tailEnd type="none" w="med" len="med"/>
-                    </a:lnB>
-                    <a:solidFill>
-                      <a:srgbClr val="FAFBFC"/>
-                    </a:solidFill>
-                  </a:tcPr>
-                </a:tc>
-                <a:tc>
-                  <a:txBody>
-                    <a:bodyPr/>
-                    <a:lstStyle/>
-                    <a:p>
-                      <a:pPr indent="0" marL="0">
-                        <a:buNone/>
-                      </a:pPr>
-                      <a:r>
-                        <a:rPr lang="en-US" sz="1300" dirty="0">
-                          <a:solidFill>
-                            <a:srgbClr val="15232A"/>
-                          </a:solidFill>
-                          <a:latin typeface="Calibri" pitchFamily="34" charset="0"/>
-                          <a:ea typeface="Calibri" pitchFamily="34" charset="-122"/>
-                          <a:cs typeface="Calibri" pitchFamily="34" charset="-120"/>
-                        </a:rPr>
-                        <a:t>0.40 (0.049)</a:t>
-                      </a:r>
-                      <a:endParaRPr lang="en-US" sz="1300" dirty="0">
-                        <a:latin typeface="Calibri" charset="0"/>
-                        <a:ea typeface="Calibri" charset="0"/>
-                        <a:cs typeface="Calibri" charset="0"/>
-                      </a:endParaRPr>
-                    </a:p>
-                  </a:txBody>
-                  <a:tcPr marL="76200" marR="76200" marT="38100" marB="38100" anchor="ctr">
-                    <a:lnL w="9525" cap="flat" cmpd="sng" algn="ctr">
-                      <a:solidFill>
-                        <a:srgbClr val="D9E1E5"/>
-                      </a:solidFill>
-                      <a:prstDash val="solid"/>
-                      <a:round/>
-                      <a:headEnd type="none" w="med" len="med"/>
-                      <a:tailEnd type="none" w="med" len="med"/>
-                    </a:lnL>
-                    <a:lnR w="9525" cap="flat" cmpd="sng" algn="ctr">
-                      <a:solidFill>
-                        <a:srgbClr val="D9E1E5"/>
-                      </a:solidFill>
-                      <a:prstDash val="solid"/>
-                      <a:round/>
-                      <a:headEnd type="none" w="med" len="med"/>
-                      <a:tailEnd type="none" w="med" len="med"/>
-                    </a:lnR>
-                    <a:lnT w="9525" cap="flat" cmpd="sng" algn="ctr">
-                      <a:solidFill>
-                        <a:srgbClr val="D9E1E5"/>
-                      </a:solidFill>
-                      <a:prstDash val="solid"/>
-                      <a:round/>
-                      <a:headEnd type="none" w="med" len="med"/>
-                      <a:tailEnd type="none" w="med" len="med"/>
-                    </a:lnT>
-                    <a:lnB w="9525" cap="flat" cmpd="sng" algn="ctr">
-                      <a:solidFill>
-                        <a:srgbClr val="D9E1E5"/>
-                      </a:solidFill>
-                      <a:prstDash val="solid"/>
-                      <a:round/>
-                      <a:headEnd type="none" w="med" len="med"/>
-                      <a:tailEnd type="none" w="med" len="med"/>
-                    </a:lnB>
-                    <a:solidFill>
-                      <a:srgbClr val="FAFBFC"/>
-                    </a:solidFill>
-                  </a:tcPr>
-                </a:tc>
-              </a:tr>
-              <a:tr h="411480">
-                <a:tc>
-                  <a:txBody>
-                    <a:bodyPr/>
-                    <a:lstStyle/>
-                    <a:p>
-                      <a:pPr indent="0" marL="0">
-                        <a:buNone/>
-                      </a:pPr>
-                      <a:r>
-                        <a:rPr lang="en-US" sz="1300" dirty="0">
-                          <a:solidFill>
-                            <a:srgbClr val="0D5F73"/>
-                          </a:solidFill>
-                          <a:latin typeface="Calibri" pitchFamily="34" charset="0"/>
-                          <a:ea typeface="Calibri" pitchFamily="34" charset="-122"/>
-                          <a:cs typeface="Calibri" pitchFamily="34" charset="-120"/>
-                        </a:rPr>
-                        <a:t>Rise above 250 mg/dL</a:t>
-                      </a:r>
-                      <a:endParaRPr lang="en-US" sz="1300" dirty="0">
-                        <a:latin typeface="Calibri" charset="0"/>
-                        <a:ea typeface="Calibri" charset="0"/>
-                        <a:cs typeface="Calibri" charset="0"/>
-                      </a:endParaRPr>
-                    </a:p>
-                  </a:txBody>
-                  <a:tcPr marL="76200" marR="76200" marT="38100" marB="38100" anchor="ctr">
+                  <a:tcPr marL="101600" marR="101600" marT="50800" marB="50800" anchor="ctr">
                     <a:lnL w="9525" cap="flat" cmpd="sng" algn="ctr">
                       <a:solidFill>
                         <a:srgbClr val="D9E1E5"/>
@@ -7285,24 +7753,24 @@
                         <a:buNone/>
                       </a:pPr>
                       <a:r>
-                        <a:rPr lang="en-US" sz="1300" dirty="0">
+                        <a:rPr lang="en-US" sz="1400" dirty="0">
                           <a:solidFill>
-                            <a:srgbClr val="0D5F73"/>
+                            <a:srgbClr val="15232A"/>
                           </a:solidFill>
                           <a:latin typeface="Calibri" pitchFamily="34" charset="0"/>
                           <a:ea typeface="Calibri" pitchFamily="34" charset="-122"/>
                           <a:cs typeface="Calibri" pitchFamily="34" charset="-120"/>
                         </a:rPr>
-                        <a:t>Pratirup</a:t>
+                        <a:t>31%</a:t>
                       </a:r>
-                      <a:endParaRPr lang="en-US" sz="1300" dirty="0">
+                      <a:endParaRPr lang="en-US" sz="1400" dirty="0">
                         <a:latin typeface="Calibri" charset="0"/>
                         <a:ea typeface="Calibri" charset="0"/>
                         <a:cs typeface="Calibri" charset="0"/>
                       </a:endParaRPr>
                     </a:p>
                   </a:txBody>
-                  <a:tcPr marL="76200" marR="76200" marT="38100" marB="38100" anchor="ctr">
+                  <a:tcPr marL="101600" marR="101600" marT="50800" marB="50800" anchor="ctr">
                     <a:lnL w="9525" cap="flat" cmpd="sng" algn="ctr">
                       <a:solidFill>
                         <a:srgbClr val="D9E1E5"/>
@@ -7353,24 +7821,24 @@
                         <a:buNone/>
                       </a:pPr>
                       <a:r>
-                        <a:rPr lang="en-US" sz="1300" dirty="0">
+                        <a:rPr lang="en-US" sz="1400" dirty="0">
                           <a:solidFill>
-                            <a:srgbClr val="0D5F73"/>
+                            <a:srgbClr val="15232A"/>
                           </a:solidFill>
                           <a:latin typeface="Calibri" pitchFamily="34" charset="0"/>
                           <a:ea typeface="Calibri" pitchFamily="34" charset="-122"/>
                           <a:cs typeface="Calibri" pitchFamily="34" charset="-120"/>
                         </a:rPr>
-                        <a:t>54</a:t>
+                        <a:t>88% (56%) of 34</a:t>
                       </a:r>
-                      <a:endParaRPr lang="en-US" sz="1300" dirty="0">
+                      <a:endParaRPr lang="en-US" sz="1400" dirty="0">
                         <a:latin typeface="Calibri" charset="0"/>
                         <a:ea typeface="Calibri" charset="0"/>
                         <a:cs typeface="Calibri" charset="0"/>
                       </a:endParaRPr>
                     </a:p>
                   </a:txBody>
-                  <a:tcPr marL="76200" marR="76200" marT="38100" marB="38100" anchor="ctr">
+                  <a:tcPr marL="101600" marR="101600" marT="50800" marB="50800" anchor="ctr">
                     <a:lnL w="9525" cap="flat" cmpd="sng" algn="ctr">
                       <a:solidFill>
                         <a:srgbClr val="D9E1E5"/>
@@ -7421,406 +7889,7 @@
                         <a:buNone/>
                       </a:pPr>
                       <a:r>
-                        <a:rPr lang="en-US" sz="1300" dirty="0">
-                          <a:solidFill>
-                            <a:srgbClr val="0D5F73"/>
-                          </a:solidFill>
-                          <a:latin typeface="Calibri" pitchFamily="34" charset="0"/>
-                          <a:ea typeface="Calibri" pitchFamily="34" charset="-122"/>
-                          <a:cs typeface="Calibri" pitchFamily="34" charset="-120"/>
-                        </a:rPr>
-                        <a:t>98.1%</a:t>
-                      </a:r>
-                      <a:endParaRPr lang="en-US" sz="1300" dirty="0">
-                        <a:latin typeface="Calibri" charset="0"/>
-                        <a:ea typeface="Calibri" charset="0"/>
-                        <a:cs typeface="Calibri" charset="0"/>
-                      </a:endParaRPr>
-                    </a:p>
-                  </a:txBody>
-                  <a:tcPr marL="76200" marR="76200" marT="38100" marB="38100" anchor="ctr">
-                    <a:lnL w="9525" cap="flat" cmpd="sng" algn="ctr">
-                      <a:solidFill>
-                        <a:srgbClr val="D9E1E5"/>
-                      </a:solidFill>
-                      <a:prstDash val="solid"/>
-                      <a:round/>
-                      <a:headEnd type="none" w="med" len="med"/>
-                      <a:tailEnd type="none" w="med" len="med"/>
-                    </a:lnL>
-                    <a:lnR w="9525" cap="flat" cmpd="sng" algn="ctr">
-                      <a:solidFill>
-                        <a:srgbClr val="D9E1E5"/>
-                      </a:solidFill>
-                      <a:prstDash val="solid"/>
-                      <a:round/>
-                      <a:headEnd type="none" w="med" len="med"/>
-                      <a:tailEnd type="none" w="med" len="med"/>
-                    </a:lnR>
-                    <a:lnT w="9525" cap="flat" cmpd="sng" algn="ctr">
-                      <a:solidFill>
-                        <a:srgbClr val="D9E1E5"/>
-                      </a:solidFill>
-                      <a:prstDash val="solid"/>
-                      <a:round/>
-                      <a:headEnd type="none" w="med" len="med"/>
-                      <a:tailEnd type="none" w="med" len="med"/>
-                    </a:lnT>
-                    <a:lnB w="9525" cap="flat" cmpd="sng" algn="ctr">
-                      <a:solidFill>
-                        <a:srgbClr val="D9E1E5"/>
-                      </a:solidFill>
-                      <a:prstDash val="solid"/>
-                      <a:round/>
-                      <a:headEnd type="none" w="med" len="med"/>
-                      <a:tailEnd type="none" w="med" len="med"/>
-                    </a:lnB>
-                    <a:solidFill>
-                      <a:srgbClr val="FFFFFF"/>
-                    </a:solidFill>
-                  </a:tcPr>
-                </a:tc>
-                <a:tc>
-                  <a:txBody>
-                    <a:bodyPr/>
-                    <a:lstStyle/>
-                    <a:p>
-                      <a:pPr indent="0" marL="0">
-                        <a:buNone/>
-                      </a:pPr>
-                      <a:r>
-                        <a:rPr lang="en-US" sz="1300" dirty="0">
-                          <a:solidFill>
-                            <a:srgbClr val="0D5F73"/>
-                          </a:solidFill>
-                          <a:latin typeface="Calibri" pitchFamily="34" charset="0"/>
-                          <a:ea typeface="Calibri" pitchFamily="34" charset="-122"/>
-                          <a:cs typeface="Calibri" pitchFamily="34" charset="-120"/>
-                        </a:rPr>
-                        <a:t>81.5%</a:t>
-                      </a:r>
-                      <a:endParaRPr lang="en-US" sz="1300" dirty="0">
-                        <a:latin typeface="Calibri" charset="0"/>
-                        <a:ea typeface="Calibri" charset="0"/>
-                        <a:cs typeface="Calibri" charset="0"/>
-                      </a:endParaRPr>
-                    </a:p>
-                  </a:txBody>
-                  <a:tcPr marL="76200" marR="76200" marT="38100" marB="38100" anchor="ctr">
-                    <a:lnL w="9525" cap="flat" cmpd="sng" algn="ctr">
-                      <a:solidFill>
-                        <a:srgbClr val="D9E1E5"/>
-                      </a:solidFill>
-                      <a:prstDash val="solid"/>
-                      <a:round/>
-                      <a:headEnd type="none" w="med" len="med"/>
-                      <a:tailEnd type="none" w="med" len="med"/>
-                    </a:lnL>
-                    <a:lnR w="9525" cap="flat" cmpd="sng" algn="ctr">
-                      <a:solidFill>
-                        <a:srgbClr val="D9E1E5"/>
-                      </a:solidFill>
-                      <a:prstDash val="solid"/>
-                      <a:round/>
-                      <a:headEnd type="none" w="med" len="med"/>
-                      <a:tailEnd type="none" w="med" len="med"/>
-                    </a:lnR>
-                    <a:lnT w="9525" cap="flat" cmpd="sng" algn="ctr">
-                      <a:solidFill>
-                        <a:srgbClr val="D9E1E5"/>
-                      </a:solidFill>
-                      <a:prstDash val="solid"/>
-                      <a:round/>
-                      <a:headEnd type="none" w="med" len="med"/>
-                      <a:tailEnd type="none" w="med" len="med"/>
-                    </a:lnT>
-                    <a:lnB w="9525" cap="flat" cmpd="sng" algn="ctr">
-                      <a:solidFill>
-                        <a:srgbClr val="D9E1E5"/>
-                      </a:solidFill>
-                      <a:prstDash val="solid"/>
-                      <a:round/>
-                      <a:headEnd type="none" w="med" len="med"/>
-                      <a:tailEnd type="none" w="med" len="med"/>
-                    </a:lnB>
-                    <a:solidFill>
-                      <a:srgbClr val="FFFFFF"/>
-                    </a:solidFill>
-                  </a:tcPr>
-                </a:tc>
-                <a:tc>
-                  <a:txBody>
-                    <a:bodyPr/>
-                    <a:lstStyle/>
-                    <a:p>
-                      <a:pPr indent="0" marL="0">
-                        <a:buNone/>
-                      </a:pPr>
-                      <a:r>
-                        <a:rPr lang="en-US" sz="1300" dirty="0">
-                          <a:solidFill>
-                            <a:srgbClr val="0D5F73"/>
-                          </a:solidFill>
-                          <a:latin typeface="Calibri" pitchFamily="34" charset="0"/>
-                          <a:ea typeface="Calibri" pitchFamily="34" charset="-122"/>
-                          <a:cs typeface="Calibri" pitchFamily="34" charset="-120"/>
-                        </a:rPr>
-                        <a:t>15.6%</a:t>
-                      </a:r>
-                      <a:endParaRPr lang="en-US" sz="1300" dirty="0">
-                        <a:latin typeface="Calibri" charset="0"/>
-                        <a:ea typeface="Calibri" charset="0"/>
-                        <a:cs typeface="Calibri" charset="0"/>
-                      </a:endParaRPr>
-                    </a:p>
-                  </a:txBody>
-                  <a:tcPr marL="76200" marR="76200" marT="38100" marB="38100" anchor="ctr">
-                    <a:lnL w="9525" cap="flat" cmpd="sng" algn="ctr">
-                      <a:solidFill>
-                        <a:srgbClr val="D9E1E5"/>
-                      </a:solidFill>
-                      <a:prstDash val="solid"/>
-                      <a:round/>
-                      <a:headEnd type="none" w="med" len="med"/>
-                      <a:tailEnd type="none" w="med" len="med"/>
-                    </a:lnL>
-                    <a:lnR w="9525" cap="flat" cmpd="sng" algn="ctr">
-                      <a:solidFill>
-                        <a:srgbClr val="D9E1E5"/>
-                      </a:solidFill>
-                      <a:prstDash val="solid"/>
-                      <a:round/>
-                      <a:headEnd type="none" w="med" len="med"/>
-                      <a:tailEnd type="none" w="med" len="med"/>
-                    </a:lnR>
-                    <a:lnT w="9525" cap="flat" cmpd="sng" algn="ctr">
-                      <a:solidFill>
-                        <a:srgbClr val="D9E1E5"/>
-                      </a:solidFill>
-                      <a:prstDash val="solid"/>
-                      <a:round/>
-                      <a:headEnd type="none" w="med" len="med"/>
-                      <a:tailEnd type="none" w="med" len="med"/>
-                    </a:lnT>
-                    <a:lnB w="9525" cap="flat" cmpd="sng" algn="ctr">
-                      <a:solidFill>
-                        <a:srgbClr val="D9E1E5"/>
-                      </a:solidFill>
-                      <a:prstDash val="solid"/>
-                      <a:round/>
-                      <a:headEnd type="none" w="med" len="med"/>
-                      <a:tailEnd type="none" w="med" len="med"/>
-                    </a:lnB>
-                    <a:solidFill>
-                      <a:srgbClr val="FFFFFF"/>
-                    </a:solidFill>
-                  </a:tcPr>
-                </a:tc>
-                <a:tc>
-                  <a:txBody>
-                    <a:bodyPr/>
-                    <a:lstStyle/>
-                    <a:p>
-                      <a:pPr indent="0" marL="0">
-                        <a:buNone/>
-                      </a:pPr>
-                      <a:r>
-                        <a:rPr lang="en-US" sz="1300" dirty="0">
-                          <a:solidFill>
-                            <a:srgbClr val="0D5F73"/>
-                          </a:solidFill>
-                          <a:latin typeface="Calibri" pitchFamily="34" charset="0"/>
-                          <a:ea typeface="Calibri" pitchFamily="34" charset="-122"/>
-                          <a:cs typeface="Calibri" pitchFamily="34" charset="-120"/>
-                        </a:rPr>
-                        <a:t>1.39</a:t>
-                      </a:r>
-                      <a:endParaRPr lang="en-US" sz="1300" dirty="0">
-                        <a:latin typeface="Calibri" charset="0"/>
-                        <a:ea typeface="Calibri" charset="0"/>
-                        <a:cs typeface="Calibri" charset="0"/>
-                      </a:endParaRPr>
-                    </a:p>
-                  </a:txBody>
-                  <a:tcPr marL="76200" marR="76200" marT="38100" marB="38100" anchor="ctr">
-                    <a:lnL w="9525" cap="flat" cmpd="sng" algn="ctr">
-                      <a:solidFill>
-                        <a:srgbClr val="D9E1E5"/>
-                      </a:solidFill>
-                      <a:prstDash val="solid"/>
-                      <a:round/>
-                      <a:headEnd type="none" w="med" len="med"/>
-                      <a:tailEnd type="none" w="med" len="med"/>
-                    </a:lnL>
-                    <a:lnR w="9525" cap="flat" cmpd="sng" algn="ctr">
-                      <a:solidFill>
-                        <a:srgbClr val="D9E1E5"/>
-                      </a:solidFill>
-                      <a:prstDash val="solid"/>
-                      <a:round/>
-                      <a:headEnd type="none" w="med" len="med"/>
-                      <a:tailEnd type="none" w="med" len="med"/>
-                    </a:lnR>
-                    <a:lnT w="9525" cap="flat" cmpd="sng" algn="ctr">
-                      <a:solidFill>
-                        <a:srgbClr val="D9E1E5"/>
-                      </a:solidFill>
-                      <a:prstDash val="solid"/>
-                      <a:round/>
-                      <a:headEnd type="none" w="med" len="med"/>
-                      <a:tailEnd type="none" w="med" len="med"/>
-                    </a:lnT>
-                    <a:lnB w="9525" cap="flat" cmpd="sng" algn="ctr">
-                      <a:solidFill>
-                        <a:srgbClr val="D9E1E5"/>
-                      </a:solidFill>
-                      <a:prstDash val="solid"/>
-                      <a:round/>
-                      <a:headEnd type="none" w="med" len="med"/>
-                      <a:tailEnd type="none" w="med" len="med"/>
-                    </a:lnB>
-                    <a:solidFill>
-                      <a:srgbClr val="FFFFFF"/>
-                    </a:solidFill>
-                  </a:tcPr>
-                </a:tc>
-                <a:tc>
-                  <a:txBody>
-                    <a:bodyPr/>
-                    <a:lstStyle/>
-                    <a:p>
-                      <a:pPr indent="0" marL="0">
-                        <a:buNone/>
-                      </a:pPr>
-                      <a:r>
-                        <a:rPr lang="en-US" sz="1300" dirty="0">
-                          <a:solidFill>
-                            <a:srgbClr val="0D5F73"/>
-                          </a:solidFill>
-                          <a:latin typeface="Calibri" pitchFamily="34" charset="0"/>
-                          <a:ea typeface="Calibri" pitchFamily="34" charset="-122"/>
-                          <a:cs typeface="Calibri" pitchFamily="34" charset="-120"/>
-                        </a:rPr>
-                        <a:t>0.55 (0.008)</a:t>
-                      </a:r>
-                      <a:endParaRPr lang="en-US" sz="1300" dirty="0">
-                        <a:latin typeface="Calibri" charset="0"/>
-                        <a:ea typeface="Calibri" charset="0"/>
-                        <a:cs typeface="Calibri" charset="0"/>
-                      </a:endParaRPr>
-                    </a:p>
-                  </a:txBody>
-                  <a:tcPr marL="76200" marR="76200" marT="38100" marB="38100" anchor="ctr">
-                    <a:lnL w="9525" cap="flat" cmpd="sng" algn="ctr">
-                      <a:solidFill>
-                        <a:srgbClr val="D9E1E5"/>
-                      </a:solidFill>
-                      <a:prstDash val="solid"/>
-                      <a:round/>
-                      <a:headEnd type="none" w="med" len="med"/>
-                      <a:tailEnd type="none" w="med" len="med"/>
-                    </a:lnL>
-                    <a:lnR w="9525" cap="flat" cmpd="sng" algn="ctr">
-                      <a:solidFill>
-                        <a:srgbClr val="D9E1E5"/>
-                      </a:solidFill>
-                      <a:prstDash val="solid"/>
-                      <a:round/>
-                      <a:headEnd type="none" w="med" len="med"/>
-                      <a:tailEnd type="none" w="med" len="med"/>
-                    </a:lnR>
-                    <a:lnT w="9525" cap="flat" cmpd="sng" algn="ctr">
-                      <a:solidFill>
-                        <a:srgbClr val="D9E1E5"/>
-                      </a:solidFill>
-                      <a:prstDash val="solid"/>
-                      <a:round/>
-                      <a:headEnd type="none" w="med" len="med"/>
-                      <a:tailEnd type="none" w="med" len="med"/>
-                    </a:lnT>
-                    <a:lnB w="9525" cap="flat" cmpd="sng" algn="ctr">
-                      <a:solidFill>
-                        <a:srgbClr val="D9E1E5"/>
-                      </a:solidFill>
-                      <a:prstDash val="solid"/>
-                      <a:round/>
-                      <a:headEnd type="none" w="med" len="med"/>
-                      <a:tailEnd type="none" w="med" len="med"/>
-                    </a:lnB>
-                    <a:solidFill>
-                      <a:srgbClr val="FFFFFF"/>
-                    </a:solidFill>
-                  </a:tcPr>
-                </a:tc>
-              </a:tr>
-              <a:tr h="411480">
-                <a:tc>
-                  <a:txBody>
-                    <a:bodyPr/>
-                    <a:lstStyle/>
-                    <a:p>
-                      <a:pPr indent="0" marL="0">
-                        <a:buNone/>
-                      </a:pPr>
-                      <a:endParaRPr lang="en-US" sz="1300" dirty="0">
-                        <a:latin typeface="Calibri" charset="0"/>
-                        <a:ea typeface="Calibri" charset="0"/>
-                        <a:cs typeface="Calibri" charset="0"/>
-                      </a:endParaRPr>
-                    </a:p>
-                  </a:txBody>
-                  <a:tcPr marL="76200" marR="76200" marT="38100" marB="38100" anchor="ctr">
-                    <a:lnL w="9525" cap="flat" cmpd="sng" algn="ctr">
-                      <a:solidFill>
-                        <a:srgbClr val="D9E1E5"/>
-                      </a:solidFill>
-                      <a:prstDash val="solid"/>
-                      <a:round/>
-                      <a:headEnd type="none" w="med" len="med"/>
-                      <a:tailEnd type="none" w="med" len="med"/>
-                    </a:lnL>
-                    <a:lnR w="9525" cap="flat" cmpd="sng" algn="ctr">
-                      <a:solidFill>
-                        <a:srgbClr val="D9E1E5"/>
-                      </a:solidFill>
-                      <a:prstDash val="solid"/>
-                      <a:round/>
-                      <a:headEnd type="none" w="med" len="med"/>
-                      <a:tailEnd type="none" w="med" len="med"/>
-                    </a:lnR>
-                    <a:lnT w="9525" cap="flat" cmpd="sng" algn="ctr">
-                      <a:solidFill>
-                        <a:srgbClr val="D9E1E5"/>
-                      </a:solidFill>
-                      <a:prstDash val="solid"/>
-                      <a:round/>
-                      <a:headEnd type="none" w="med" len="med"/>
-                      <a:tailEnd type="none" w="med" len="med"/>
-                    </a:lnT>
-                    <a:lnB w="9525" cap="flat" cmpd="sng" algn="ctr">
-                      <a:solidFill>
-                        <a:srgbClr val="D9E1E5"/>
-                      </a:solidFill>
-                      <a:prstDash val="solid"/>
-                      <a:round/>
-                      <a:headEnd type="none" w="med" len="med"/>
-                      <a:tailEnd type="none" w="med" len="med"/>
-                    </a:lnB>
-                    <a:solidFill>
-                      <a:srgbClr val="FAFBFC"/>
-                    </a:solidFill>
-                  </a:tcPr>
-                </a:tc>
-                <a:tc>
-                  <a:txBody>
-                    <a:bodyPr/>
-                    <a:lstStyle/>
-                    <a:p>
-                      <a:pPr indent="0" marL="0">
-                        <a:buNone/>
-                      </a:pPr>
-                      <a:r>
-                        <a:rPr lang="en-US" sz="1300" dirty="0">
+                        <a:rPr lang="en-US" sz="1400" dirty="0">
                           <a:solidFill>
                             <a:srgbClr val="15232A"/>
                           </a:solidFill>
@@ -7828,483 +7897,16 @@
                           <a:ea typeface="Calibri" pitchFamily="34" charset="-122"/>
                           <a:cs typeface="Calibri" pitchFamily="34" charset="-120"/>
                         </a:rPr>
-                        <a:t>Rate-of-change rule</a:t>
+                        <a:t>75% (39%) of 71</a:t>
                       </a:r>
-                      <a:endParaRPr lang="en-US" sz="1300" dirty="0">
+                      <a:endParaRPr lang="en-US" sz="1400" dirty="0">
                         <a:latin typeface="Calibri" charset="0"/>
                         <a:ea typeface="Calibri" charset="0"/>
                         <a:cs typeface="Calibri" charset="0"/>
                       </a:endParaRPr>
                     </a:p>
                   </a:txBody>
-                  <a:tcPr marL="76200" marR="76200" marT="38100" marB="38100" anchor="ctr">
-                    <a:lnL w="9525" cap="flat" cmpd="sng" algn="ctr">
-                      <a:solidFill>
-                        <a:srgbClr val="D9E1E5"/>
-                      </a:solidFill>
-                      <a:prstDash val="solid"/>
-                      <a:round/>
-                      <a:headEnd type="none" w="med" len="med"/>
-                      <a:tailEnd type="none" w="med" len="med"/>
-                    </a:lnL>
-                    <a:lnR w="9525" cap="flat" cmpd="sng" algn="ctr">
-                      <a:solidFill>
-                        <a:srgbClr val="D9E1E5"/>
-                      </a:solidFill>
-                      <a:prstDash val="solid"/>
-                      <a:round/>
-                      <a:headEnd type="none" w="med" len="med"/>
-                      <a:tailEnd type="none" w="med" len="med"/>
-                    </a:lnR>
-                    <a:lnT w="9525" cap="flat" cmpd="sng" algn="ctr">
-                      <a:solidFill>
-                        <a:srgbClr val="D9E1E5"/>
-                      </a:solidFill>
-                      <a:prstDash val="solid"/>
-                      <a:round/>
-                      <a:headEnd type="none" w="med" len="med"/>
-                      <a:tailEnd type="none" w="med" len="med"/>
-                    </a:lnT>
-                    <a:lnB w="9525" cap="flat" cmpd="sng" algn="ctr">
-                      <a:solidFill>
-                        <a:srgbClr val="D9E1E5"/>
-                      </a:solidFill>
-                      <a:prstDash val="solid"/>
-                      <a:round/>
-                      <a:headEnd type="none" w="med" len="med"/>
-                      <a:tailEnd type="none" w="med" len="med"/>
-                    </a:lnB>
-                    <a:solidFill>
-                      <a:srgbClr val="FAFBFC"/>
-                    </a:solidFill>
-                  </a:tcPr>
-                </a:tc>
-                <a:tc>
-                  <a:txBody>
-                    <a:bodyPr/>
-                    <a:lstStyle/>
-                    <a:p>
-                      <a:pPr indent="0" marL="0">
-                        <a:buNone/>
-                      </a:pPr>
-                      <a:endParaRPr lang="en-US" sz="1300" dirty="0">
-                        <a:latin typeface="Calibri" charset="0"/>
-                        <a:ea typeface="Calibri" charset="0"/>
-                        <a:cs typeface="Calibri" charset="0"/>
-                      </a:endParaRPr>
-                    </a:p>
-                  </a:txBody>
-                  <a:tcPr marL="76200" marR="76200" marT="38100" marB="38100" anchor="ctr">
-                    <a:lnL w="9525" cap="flat" cmpd="sng" algn="ctr">
-                      <a:solidFill>
-                        <a:srgbClr val="D9E1E5"/>
-                      </a:solidFill>
-                      <a:prstDash val="solid"/>
-                      <a:round/>
-                      <a:headEnd type="none" w="med" len="med"/>
-                      <a:tailEnd type="none" w="med" len="med"/>
-                    </a:lnL>
-                    <a:lnR w="9525" cap="flat" cmpd="sng" algn="ctr">
-                      <a:solidFill>
-                        <a:srgbClr val="D9E1E5"/>
-                      </a:solidFill>
-                      <a:prstDash val="solid"/>
-                      <a:round/>
-                      <a:headEnd type="none" w="med" len="med"/>
-                      <a:tailEnd type="none" w="med" len="med"/>
-                    </a:lnR>
-                    <a:lnT w="9525" cap="flat" cmpd="sng" algn="ctr">
-                      <a:solidFill>
-                        <a:srgbClr val="D9E1E5"/>
-                      </a:solidFill>
-                      <a:prstDash val="solid"/>
-                      <a:round/>
-                      <a:headEnd type="none" w="med" len="med"/>
-                      <a:tailEnd type="none" w="med" len="med"/>
-                    </a:lnT>
-                    <a:lnB w="9525" cap="flat" cmpd="sng" algn="ctr">
-                      <a:solidFill>
-                        <a:srgbClr val="D9E1E5"/>
-                      </a:solidFill>
-                      <a:prstDash val="solid"/>
-                      <a:round/>
-                      <a:headEnd type="none" w="med" len="med"/>
-                      <a:tailEnd type="none" w="med" len="med"/>
-                    </a:lnB>
-                    <a:solidFill>
-                      <a:srgbClr val="FAFBFC"/>
-                    </a:solidFill>
-                  </a:tcPr>
-                </a:tc>
-                <a:tc>
-                  <a:txBody>
-                    <a:bodyPr/>
-                    <a:lstStyle/>
-                    <a:p>
-                      <a:pPr indent="0" marL="0">
-                        <a:buNone/>
-                      </a:pPr>
-                      <a:r>
-                        <a:rPr lang="en-US" sz="1300" dirty="0">
-                          <a:solidFill>
-                            <a:srgbClr val="15232A"/>
-                          </a:solidFill>
-                          <a:latin typeface="Calibri" pitchFamily="34" charset="0"/>
-                          <a:ea typeface="Calibri" pitchFamily="34" charset="-122"/>
-                          <a:cs typeface="Calibri" pitchFamily="34" charset="-120"/>
-                        </a:rPr>
-                        <a:t>98.1%</a:t>
-                      </a:r>
-                      <a:endParaRPr lang="en-US" sz="1300" dirty="0">
-                        <a:latin typeface="Calibri" charset="0"/>
-                        <a:ea typeface="Calibri" charset="0"/>
-                        <a:cs typeface="Calibri" charset="0"/>
-                      </a:endParaRPr>
-                    </a:p>
-                  </a:txBody>
-                  <a:tcPr marL="76200" marR="76200" marT="38100" marB="38100" anchor="ctr">
-                    <a:lnL w="9525" cap="flat" cmpd="sng" algn="ctr">
-                      <a:solidFill>
-                        <a:srgbClr val="D9E1E5"/>
-                      </a:solidFill>
-                      <a:prstDash val="solid"/>
-                      <a:round/>
-                      <a:headEnd type="none" w="med" len="med"/>
-                      <a:tailEnd type="none" w="med" len="med"/>
-                    </a:lnL>
-                    <a:lnR w="9525" cap="flat" cmpd="sng" algn="ctr">
-                      <a:solidFill>
-                        <a:srgbClr val="D9E1E5"/>
-                      </a:solidFill>
-                      <a:prstDash val="solid"/>
-                      <a:round/>
-                      <a:headEnd type="none" w="med" len="med"/>
-                      <a:tailEnd type="none" w="med" len="med"/>
-                    </a:lnR>
-                    <a:lnT w="9525" cap="flat" cmpd="sng" algn="ctr">
-                      <a:solidFill>
-                        <a:srgbClr val="D9E1E5"/>
-                      </a:solidFill>
-                      <a:prstDash val="solid"/>
-                      <a:round/>
-                      <a:headEnd type="none" w="med" len="med"/>
-                      <a:tailEnd type="none" w="med" len="med"/>
-                    </a:lnT>
-                    <a:lnB w="9525" cap="flat" cmpd="sng" algn="ctr">
-                      <a:solidFill>
-                        <a:srgbClr val="D9E1E5"/>
-                      </a:solidFill>
-                      <a:prstDash val="solid"/>
-                      <a:round/>
-                      <a:headEnd type="none" w="med" len="med"/>
-                      <a:tailEnd type="none" w="med" len="med"/>
-                    </a:lnB>
-                    <a:solidFill>
-                      <a:srgbClr val="FAFBFC"/>
-                    </a:solidFill>
-                  </a:tcPr>
-                </a:tc>
-                <a:tc>
-                  <a:txBody>
-                    <a:bodyPr/>
-                    <a:lstStyle/>
-                    <a:p>
-                      <a:pPr indent="0" marL="0">
-                        <a:buNone/>
-                      </a:pPr>
-                      <a:r>
-                        <a:rPr lang="en-US" sz="1300" dirty="0">
-                          <a:solidFill>
-                            <a:srgbClr val="15232A"/>
-                          </a:solidFill>
-                          <a:latin typeface="Calibri" pitchFamily="34" charset="0"/>
-                          <a:ea typeface="Calibri" pitchFamily="34" charset="-122"/>
-                          <a:cs typeface="Calibri" pitchFamily="34" charset="-120"/>
-                        </a:rPr>
-                        <a:t>77.8%</a:t>
-                      </a:r>
-                      <a:endParaRPr lang="en-US" sz="1300" dirty="0">
-                        <a:latin typeface="Calibri" charset="0"/>
-                        <a:ea typeface="Calibri" charset="0"/>
-                        <a:cs typeface="Calibri" charset="0"/>
-                      </a:endParaRPr>
-                    </a:p>
-                  </a:txBody>
-                  <a:tcPr marL="76200" marR="76200" marT="38100" marB="38100" anchor="ctr">
-                    <a:lnL w="9525" cap="flat" cmpd="sng" algn="ctr">
-                      <a:solidFill>
-                        <a:srgbClr val="D9E1E5"/>
-                      </a:solidFill>
-                      <a:prstDash val="solid"/>
-                      <a:round/>
-                      <a:headEnd type="none" w="med" len="med"/>
-                      <a:tailEnd type="none" w="med" len="med"/>
-                    </a:lnL>
-                    <a:lnR w="9525" cap="flat" cmpd="sng" algn="ctr">
-                      <a:solidFill>
-                        <a:srgbClr val="D9E1E5"/>
-                      </a:solidFill>
-                      <a:prstDash val="solid"/>
-                      <a:round/>
-                      <a:headEnd type="none" w="med" len="med"/>
-                      <a:tailEnd type="none" w="med" len="med"/>
-                    </a:lnR>
-                    <a:lnT w="9525" cap="flat" cmpd="sng" algn="ctr">
-                      <a:solidFill>
-                        <a:srgbClr val="D9E1E5"/>
-                      </a:solidFill>
-                      <a:prstDash val="solid"/>
-                      <a:round/>
-                      <a:headEnd type="none" w="med" len="med"/>
-                      <a:tailEnd type="none" w="med" len="med"/>
-                    </a:lnT>
-                    <a:lnB w="9525" cap="flat" cmpd="sng" algn="ctr">
-                      <a:solidFill>
-                        <a:srgbClr val="D9E1E5"/>
-                      </a:solidFill>
-                      <a:prstDash val="solid"/>
-                      <a:round/>
-                      <a:headEnd type="none" w="med" len="med"/>
-                      <a:tailEnd type="none" w="med" len="med"/>
-                    </a:lnB>
-                    <a:solidFill>
-                      <a:srgbClr val="FAFBFC"/>
-                    </a:solidFill>
-                  </a:tcPr>
-                </a:tc>
-                <a:tc>
-                  <a:txBody>
-                    <a:bodyPr/>
-                    <a:lstStyle/>
-                    <a:p>
-                      <a:pPr indent="0" marL="0">
-                        <a:buNone/>
-                      </a:pPr>
-                      <a:r>
-                        <a:rPr lang="en-US" sz="1300" dirty="0">
-                          <a:solidFill>
-                            <a:srgbClr val="15232A"/>
-                          </a:solidFill>
-                          <a:latin typeface="Calibri" pitchFamily="34" charset="0"/>
-                          <a:ea typeface="Calibri" pitchFamily="34" charset="-122"/>
-                          <a:cs typeface="Calibri" pitchFamily="34" charset="-120"/>
-                        </a:rPr>
-                        <a:t>12.6%</a:t>
-                      </a:r>
-                      <a:endParaRPr lang="en-US" sz="1300" dirty="0">
-                        <a:latin typeface="Calibri" charset="0"/>
-                        <a:ea typeface="Calibri" charset="0"/>
-                        <a:cs typeface="Calibri" charset="0"/>
-                      </a:endParaRPr>
-                    </a:p>
-                  </a:txBody>
-                  <a:tcPr marL="76200" marR="76200" marT="38100" marB="38100" anchor="ctr">
-                    <a:lnL w="9525" cap="flat" cmpd="sng" algn="ctr">
-                      <a:solidFill>
-                        <a:srgbClr val="D9E1E5"/>
-                      </a:solidFill>
-                      <a:prstDash val="solid"/>
-                      <a:round/>
-                      <a:headEnd type="none" w="med" len="med"/>
-                      <a:tailEnd type="none" w="med" len="med"/>
-                    </a:lnL>
-                    <a:lnR w="9525" cap="flat" cmpd="sng" algn="ctr">
-                      <a:solidFill>
-                        <a:srgbClr val="D9E1E5"/>
-                      </a:solidFill>
-                      <a:prstDash val="solid"/>
-                      <a:round/>
-                      <a:headEnd type="none" w="med" len="med"/>
-                      <a:tailEnd type="none" w="med" len="med"/>
-                    </a:lnR>
-                    <a:lnT w="9525" cap="flat" cmpd="sng" algn="ctr">
-                      <a:solidFill>
-                        <a:srgbClr val="D9E1E5"/>
-                      </a:solidFill>
-                      <a:prstDash val="solid"/>
-                      <a:round/>
-                      <a:headEnd type="none" w="med" len="med"/>
-                      <a:tailEnd type="none" w="med" len="med"/>
-                    </a:lnT>
-                    <a:lnB w="9525" cap="flat" cmpd="sng" algn="ctr">
-                      <a:solidFill>
-                        <a:srgbClr val="D9E1E5"/>
-                      </a:solidFill>
-                      <a:prstDash val="solid"/>
-                      <a:round/>
-                      <a:headEnd type="none" w="med" len="med"/>
-                      <a:tailEnd type="none" w="med" len="med"/>
-                    </a:lnB>
-                    <a:solidFill>
-                      <a:srgbClr val="FAFBFC"/>
-                    </a:solidFill>
-                  </a:tcPr>
-                </a:tc>
-                <a:tc>
-                  <a:txBody>
-                    <a:bodyPr/>
-                    <a:lstStyle/>
-                    <a:p>
-                      <a:pPr indent="0" marL="0">
-                        <a:buNone/>
-                      </a:pPr>
-                      <a:r>
-                        <a:rPr lang="en-US" sz="1300" dirty="0">
-                          <a:solidFill>
-                            <a:srgbClr val="15232A"/>
-                          </a:solidFill>
-                          <a:latin typeface="Calibri" pitchFamily="34" charset="0"/>
-                          <a:ea typeface="Calibri" pitchFamily="34" charset="-122"/>
-                          <a:cs typeface="Calibri" pitchFamily="34" charset="-120"/>
-                        </a:rPr>
-                        <a:t>1.79</a:t>
-                      </a:r>
-                      <a:endParaRPr lang="en-US" sz="1300" dirty="0">
-                        <a:latin typeface="Calibri" charset="0"/>
-                        <a:ea typeface="Calibri" charset="0"/>
-                        <a:cs typeface="Calibri" charset="0"/>
-                      </a:endParaRPr>
-                    </a:p>
-                  </a:txBody>
-                  <a:tcPr marL="76200" marR="76200" marT="38100" marB="38100" anchor="ctr">
-                    <a:lnL w="9525" cap="flat" cmpd="sng" algn="ctr">
-                      <a:solidFill>
-                        <a:srgbClr val="D9E1E5"/>
-                      </a:solidFill>
-                      <a:prstDash val="solid"/>
-                      <a:round/>
-                      <a:headEnd type="none" w="med" len="med"/>
-                      <a:tailEnd type="none" w="med" len="med"/>
-                    </a:lnL>
-                    <a:lnR w="9525" cap="flat" cmpd="sng" algn="ctr">
-                      <a:solidFill>
-                        <a:srgbClr val="D9E1E5"/>
-                      </a:solidFill>
-                      <a:prstDash val="solid"/>
-                      <a:round/>
-                      <a:headEnd type="none" w="med" len="med"/>
-                      <a:tailEnd type="none" w="med" len="med"/>
-                    </a:lnR>
-                    <a:lnT w="9525" cap="flat" cmpd="sng" algn="ctr">
-                      <a:solidFill>
-                        <a:srgbClr val="D9E1E5"/>
-                      </a:solidFill>
-                      <a:prstDash val="solid"/>
-                      <a:round/>
-                      <a:headEnd type="none" w="med" len="med"/>
-                      <a:tailEnd type="none" w="med" len="med"/>
-                    </a:lnT>
-                    <a:lnB w="9525" cap="flat" cmpd="sng" algn="ctr">
-                      <a:solidFill>
-                        <a:srgbClr val="D9E1E5"/>
-                      </a:solidFill>
-                      <a:prstDash val="solid"/>
-                      <a:round/>
-                      <a:headEnd type="none" w="med" len="med"/>
-                      <a:tailEnd type="none" w="med" len="med"/>
-                    </a:lnB>
-                    <a:solidFill>
-                      <a:srgbClr val="FAFBFC"/>
-                    </a:solidFill>
-                  </a:tcPr>
-                </a:tc>
-                <a:tc>
-                  <a:txBody>
-                    <a:bodyPr/>
-                    <a:lstStyle/>
-                    <a:p>
-                      <a:pPr indent="0" marL="0">
-                        <a:buNone/>
-                      </a:pPr>
-                      <a:r>
-                        <a:rPr lang="en-US" sz="1300" dirty="0">
-                          <a:solidFill>
-                            <a:srgbClr val="15232A"/>
-                          </a:solidFill>
-                          <a:latin typeface="Calibri" pitchFamily="34" charset="0"/>
-                          <a:ea typeface="Calibri" pitchFamily="34" charset="-122"/>
-                          <a:cs typeface="Calibri" pitchFamily="34" charset="-120"/>
-                        </a:rPr>
-                        <a:t>0.32 (0.008)</a:t>
-                      </a:r>
-                      <a:endParaRPr lang="en-US" sz="1300" dirty="0">
-                        <a:latin typeface="Calibri" charset="0"/>
-                        <a:ea typeface="Calibri" charset="0"/>
-                        <a:cs typeface="Calibri" charset="0"/>
-                      </a:endParaRPr>
-                    </a:p>
-                  </a:txBody>
-                  <a:tcPr marL="76200" marR="76200" marT="38100" marB="38100" anchor="ctr">
-                    <a:lnL w="9525" cap="flat" cmpd="sng" algn="ctr">
-                      <a:solidFill>
-                        <a:srgbClr val="D9E1E5"/>
-                      </a:solidFill>
-                      <a:prstDash val="solid"/>
-                      <a:round/>
-                      <a:headEnd type="none" w="med" len="med"/>
-                      <a:tailEnd type="none" w="med" len="med"/>
-                    </a:lnL>
-                    <a:lnR w="9525" cap="flat" cmpd="sng" algn="ctr">
-                      <a:solidFill>
-                        <a:srgbClr val="D9E1E5"/>
-                      </a:solidFill>
-                      <a:prstDash val="solid"/>
-                      <a:round/>
-                      <a:headEnd type="none" w="med" len="med"/>
-                      <a:tailEnd type="none" w="med" len="med"/>
-                    </a:lnR>
-                    <a:lnT w="9525" cap="flat" cmpd="sng" algn="ctr">
-                      <a:solidFill>
-                        <a:srgbClr val="D9E1E5"/>
-                      </a:solidFill>
-                      <a:prstDash val="solid"/>
-                      <a:round/>
-                      <a:headEnd type="none" w="med" len="med"/>
-                      <a:tailEnd type="none" w="med" len="med"/>
-                    </a:lnT>
-                    <a:lnB w="9525" cap="flat" cmpd="sng" algn="ctr">
-                      <a:solidFill>
-                        <a:srgbClr val="D9E1E5"/>
-                      </a:solidFill>
-                      <a:prstDash val="solid"/>
-                      <a:round/>
-                      <a:headEnd type="none" w="med" len="med"/>
-                      <a:tailEnd type="none" w="med" len="med"/>
-                    </a:lnB>
-                    <a:solidFill>
-                      <a:srgbClr val="FAFBFC"/>
-                    </a:solidFill>
-                  </a:tcPr>
-                </a:tc>
-              </a:tr>
-              <a:tr h="411480">
-                <a:tc>
-                  <a:txBody>
-                    <a:bodyPr/>
-                    <a:lstStyle/>
-                    <a:p>
-                      <a:pPr indent="0" marL="0">
-                        <a:buNone/>
-                      </a:pPr>
-                      <a:r>
-                        <a:rPr lang="en-US" sz="1300" dirty="0">
-                          <a:solidFill>
-                            <a:srgbClr val="0D5F73"/>
-                          </a:solidFill>
-                          <a:latin typeface="Calibri" pitchFamily="34" charset="0"/>
-                          <a:ea typeface="Calibri" pitchFamily="34" charset="-122"/>
-                          <a:cs typeface="Calibri" pitchFamily="34" charset="-120"/>
-                        </a:rPr>
-                        <a:t>Fall below 70 mg/dL</a:t>
-                      </a:r>
-                      <a:endParaRPr lang="en-US" sz="1300" dirty="0">
-                        <a:latin typeface="Calibri" charset="0"/>
-                        <a:ea typeface="Calibri" charset="0"/>
-                        <a:cs typeface="Calibri" charset="0"/>
-                      </a:endParaRPr>
-                    </a:p>
-                  </a:txBody>
-                  <a:tcPr marL="76200" marR="76200" marT="38100" marB="38100" anchor="ctr">
+                  <a:tcPr marL="101600" marR="101600" marT="50800" marB="50800" anchor="ctr">
                     <a:lnL w="9525" cap="flat" cmpd="sng" algn="ctr">
                       <a:solidFill>
                         <a:srgbClr val="D9E1E5"/>
@@ -8343,1006 +7945,6 @@
                     </a:lnB>
                     <a:solidFill>
                       <a:srgbClr val="FFFFFF"/>
-                    </a:solidFill>
-                  </a:tcPr>
-                </a:tc>
-                <a:tc>
-                  <a:txBody>
-                    <a:bodyPr/>
-                    <a:lstStyle/>
-                    <a:p>
-                      <a:pPr indent="0" marL="0">
-                        <a:buNone/>
-                      </a:pPr>
-                      <a:r>
-                        <a:rPr lang="en-US" sz="1300" dirty="0">
-                          <a:solidFill>
-                            <a:srgbClr val="0D5F73"/>
-                          </a:solidFill>
-                          <a:latin typeface="Calibri" pitchFamily="34" charset="0"/>
-                          <a:ea typeface="Calibri" pitchFamily="34" charset="-122"/>
-                          <a:cs typeface="Calibri" pitchFamily="34" charset="-120"/>
-                        </a:rPr>
-                        <a:t>Pratirup</a:t>
-                      </a:r>
-                      <a:endParaRPr lang="en-US" sz="1300" dirty="0">
-                        <a:latin typeface="Calibri" charset="0"/>
-                        <a:ea typeface="Calibri" charset="0"/>
-                        <a:cs typeface="Calibri" charset="0"/>
-                      </a:endParaRPr>
-                    </a:p>
-                  </a:txBody>
-                  <a:tcPr marL="76200" marR="76200" marT="38100" marB="38100" anchor="ctr">
-                    <a:lnL w="9525" cap="flat" cmpd="sng" algn="ctr">
-                      <a:solidFill>
-                        <a:srgbClr val="D9E1E5"/>
-                      </a:solidFill>
-                      <a:prstDash val="solid"/>
-                      <a:round/>
-                      <a:headEnd type="none" w="med" len="med"/>
-                      <a:tailEnd type="none" w="med" len="med"/>
-                    </a:lnL>
-                    <a:lnR w="9525" cap="flat" cmpd="sng" algn="ctr">
-                      <a:solidFill>
-                        <a:srgbClr val="D9E1E5"/>
-                      </a:solidFill>
-                      <a:prstDash val="solid"/>
-                      <a:round/>
-                      <a:headEnd type="none" w="med" len="med"/>
-                      <a:tailEnd type="none" w="med" len="med"/>
-                    </a:lnR>
-                    <a:lnT w="9525" cap="flat" cmpd="sng" algn="ctr">
-                      <a:solidFill>
-                        <a:srgbClr val="D9E1E5"/>
-                      </a:solidFill>
-                      <a:prstDash val="solid"/>
-                      <a:round/>
-                      <a:headEnd type="none" w="med" len="med"/>
-                      <a:tailEnd type="none" w="med" len="med"/>
-                    </a:lnT>
-                    <a:lnB w="9525" cap="flat" cmpd="sng" algn="ctr">
-                      <a:solidFill>
-                        <a:srgbClr val="D9E1E5"/>
-                      </a:solidFill>
-                      <a:prstDash val="solid"/>
-                      <a:round/>
-                      <a:headEnd type="none" w="med" len="med"/>
-                      <a:tailEnd type="none" w="med" len="med"/>
-                    </a:lnB>
-                    <a:solidFill>
-                      <a:srgbClr val="FFFFFF"/>
-                    </a:solidFill>
-                  </a:tcPr>
-                </a:tc>
-                <a:tc>
-                  <a:txBody>
-                    <a:bodyPr/>
-                    <a:lstStyle/>
-                    <a:p>
-                      <a:pPr indent="0" marL="0">
-                        <a:buNone/>
-                      </a:pPr>
-                      <a:r>
-                        <a:rPr lang="en-US" sz="1300" dirty="0">
-                          <a:solidFill>
-                            <a:srgbClr val="0D5F73"/>
-                          </a:solidFill>
-                          <a:latin typeface="Calibri" pitchFamily="34" charset="0"/>
-                          <a:ea typeface="Calibri" pitchFamily="34" charset="-122"/>
-                          <a:cs typeface="Calibri" pitchFamily="34" charset="-120"/>
-                        </a:rPr>
-                        <a:t>76</a:t>
-                      </a:r>
-                      <a:endParaRPr lang="en-US" sz="1300" dirty="0">
-                        <a:latin typeface="Calibri" charset="0"/>
-                        <a:ea typeface="Calibri" charset="0"/>
-                        <a:cs typeface="Calibri" charset="0"/>
-                      </a:endParaRPr>
-                    </a:p>
-                  </a:txBody>
-                  <a:tcPr marL="76200" marR="76200" marT="38100" marB="38100" anchor="ctr">
-                    <a:lnL w="9525" cap="flat" cmpd="sng" algn="ctr">
-                      <a:solidFill>
-                        <a:srgbClr val="D9E1E5"/>
-                      </a:solidFill>
-                      <a:prstDash val="solid"/>
-                      <a:round/>
-                      <a:headEnd type="none" w="med" len="med"/>
-                      <a:tailEnd type="none" w="med" len="med"/>
-                    </a:lnL>
-                    <a:lnR w="9525" cap="flat" cmpd="sng" algn="ctr">
-                      <a:solidFill>
-                        <a:srgbClr val="D9E1E5"/>
-                      </a:solidFill>
-                      <a:prstDash val="solid"/>
-                      <a:round/>
-                      <a:headEnd type="none" w="med" len="med"/>
-                      <a:tailEnd type="none" w="med" len="med"/>
-                    </a:lnR>
-                    <a:lnT w="9525" cap="flat" cmpd="sng" algn="ctr">
-                      <a:solidFill>
-                        <a:srgbClr val="D9E1E5"/>
-                      </a:solidFill>
-                      <a:prstDash val="solid"/>
-                      <a:round/>
-                      <a:headEnd type="none" w="med" len="med"/>
-                      <a:tailEnd type="none" w="med" len="med"/>
-                    </a:lnT>
-                    <a:lnB w="9525" cap="flat" cmpd="sng" algn="ctr">
-                      <a:solidFill>
-                        <a:srgbClr val="D9E1E5"/>
-                      </a:solidFill>
-                      <a:prstDash val="solid"/>
-                      <a:round/>
-                      <a:headEnd type="none" w="med" len="med"/>
-                      <a:tailEnd type="none" w="med" len="med"/>
-                    </a:lnB>
-                    <a:solidFill>
-                      <a:srgbClr val="FFFFFF"/>
-                    </a:solidFill>
-                  </a:tcPr>
-                </a:tc>
-                <a:tc>
-                  <a:txBody>
-                    <a:bodyPr/>
-                    <a:lstStyle/>
-                    <a:p>
-                      <a:pPr indent="0" marL="0">
-                        <a:buNone/>
-                      </a:pPr>
-                      <a:r>
-                        <a:rPr lang="en-US" sz="1300" dirty="0">
-                          <a:solidFill>
-                            <a:srgbClr val="0D5F73"/>
-                          </a:solidFill>
-                          <a:latin typeface="Calibri" pitchFamily="34" charset="0"/>
-                          <a:ea typeface="Calibri" pitchFamily="34" charset="-122"/>
-                          <a:cs typeface="Calibri" pitchFamily="34" charset="-120"/>
-                        </a:rPr>
-                        <a:t>94.7%</a:t>
-                      </a:r>
-                      <a:endParaRPr lang="en-US" sz="1300" dirty="0">
-                        <a:latin typeface="Calibri" charset="0"/>
-                        <a:ea typeface="Calibri" charset="0"/>
-                        <a:cs typeface="Calibri" charset="0"/>
-                      </a:endParaRPr>
-                    </a:p>
-                  </a:txBody>
-                  <a:tcPr marL="76200" marR="76200" marT="38100" marB="38100" anchor="ctr">
-                    <a:lnL w="9525" cap="flat" cmpd="sng" algn="ctr">
-                      <a:solidFill>
-                        <a:srgbClr val="D9E1E5"/>
-                      </a:solidFill>
-                      <a:prstDash val="solid"/>
-                      <a:round/>
-                      <a:headEnd type="none" w="med" len="med"/>
-                      <a:tailEnd type="none" w="med" len="med"/>
-                    </a:lnL>
-                    <a:lnR w="9525" cap="flat" cmpd="sng" algn="ctr">
-                      <a:solidFill>
-                        <a:srgbClr val="D9E1E5"/>
-                      </a:solidFill>
-                      <a:prstDash val="solid"/>
-                      <a:round/>
-                      <a:headEnd type="none" w="med" len="med"/>
-                      <a:tailEnd type="none" w="med" len="med"/>
-                    </a:lnR>
-                    <a:lnT w="9525" cap="flat" cmpd="sng" algn="ctr">
-                      <a:solidFill>
-                        <a:srgbClr val="D9E1E5"/>
-                      </a:solidFill>
-                      <a:prstDash val="solid"/>
-                      <a:round/>
-                      <a:headEnd type="none" w="med" len="med"/>
-                      <a:tailEnd type="none" w="med" len="med"/>
-                    </a:lnT>
-                    <a:lnB w="9525" cap="flat" cmpd="sng" algn="ctr">
-                      <a:solidFill>
-                        <a:srgbClr val="D9E1E5"/>
-                      </a:solidFill>
-                      <a:prstDash val="solid"/>
-                      <a:round/>
-                      <a:headEnd type="none" w="med" len="med"/>
-                      <a:tailEnd type="none" w="med" len="med"/>
-                    </a:lnB>
-                    <a:solidFill>
-                      <a:srgbClr val="FFFFFF"/>
-                    </a:solidFill>
-                  </a:tcPr>
-                </a:tc>
-                <a:tc>
-                  <a:txBody>
-                    <a:bodyPr/>
-                    <a:lstStyle/>
-                    <a:p>
-                      <a:pPr indent="0" marL="0">
-                        <a:buNone/>
-                      </a:pPr>
-                      <a:r>
-                        <a:rPr lang="en-US" sz="1300" dirty="0">
-                          <a:solidFill>
-                            <a:srgbClr val="0D5F73"/>
-                          </a:solidFill>
-                          <a:latin typeface="Calibri" pitchFamily="34" charset="0"/>
-                          <a:ea typeface="Calibri" pitchFamily="34" charset="-122"/>
-                          <a:cs typeface="Calibri" pitchFamily="34" charset="-120"/>
-                        </a:rPr>
-                        <a:t>64.5%</a:t>
-                      </a:r>
-                      <a:endParaRPr lang="en-US" sz="1300" dirty="0">
-                        <a:latin typeface="Calibri" charset="0"/>
-                        <a:ea typeface="Calibri" charset="0"/>
-                        <a:cs typeface="Calibri" charset="0"/>
-                      </a:endParaRPr>
-                    </a:p>
-                  </a:txBody>
-                  <a:tcPr marL="76200" marR="76200" marT="38100" marB="38100" anchor="ctr">
-                    <a:lnL w="9525" cap="flat" cmpd="sng" algn="ctr">
-                      <a:solidFill>
-                        <a:srgbClr val="D9E1E5"/>
-                      </a:solidFill>
-                      <a:prstDash val="solid"/>
-                      <a:round/>
-                      <a:headEnd type="none" w="med" len="med"/>
-                      <a:tailEnd type="none" w="med" len="med"/>
-                    </a:lnL>
-                    <a:lnR w="9525" cap="flat" cmpd="sng" algn="ctr">
-                      <a:solidFill>
-                        <a:srgbClr val="D9E1E5"/>
-                      </a:solidFill>
-                      <a:prstDash val="solid"/>
-                      <a:round/>
-                      <a:headEnd type="none" w="med" len="med"/>
-                      <a:tailEnd type="none" w="med" len="med"/>
-                    </a:lnR>
-                    <a:lnT w="9525" cap="flat" cmpd="sng" algn="ctr">
-                      <a:solidFill>
-                        <a:srgbClr val="D9E1E5"/>
-                      </a:solidFill>
-                      <a:prstDash val="solid"/>
-                      <a:round/>
-                      <a:headEnd type="none" w="med" len="med"/>
-                      <a:tailEnd type="none" w="med" len="med"/>
-                    </a:lnT>
-                    <a:lnB w="9525" cap="flat" cmpd="sng" algn="ctr">
-                      <a:solidFill>
-                        <a:srgbClr val="D9E1E5"/>
-                      </a:solidFill>
-                      <a:prstDash val="solid"/>
-                      <a:round/>
-                      <a:headEnd type="none" w="med" len="med"/>
-                      <a:tailEnd type="none" w="med" len="med"/>
-                    </a:lnB>
-                    <a:solidFill>
-                      <a:srgbClr val="FFFFFF"/>
-                    </a:solidFill>
-                  </a:tcPr>
-                </a:tc>
-                <a:tc>
-                  <a:txBody>
-                    <a:bodyPr/>
-                    <a:lstStyle/>
-                    <a:p>
-                      <a:pPr indent="0" marL="0">
-                        <a:buNone/>
-                      </a:pPr>
-                      <a:r>
-                        <a:rPr lang="en-US" sz="1300" dirty="0">
-                          <a:solidFill>
-                            <a:srgbClr val="0D5F73"/>
-                          </a:solidFill>
-                          <a:latin typeface="Calibri" pitchFamily="34" charset="0"/>
-                          <a:ea typeface="Calibri" pitchFamily="34" charset="-122"/>
-                          <a:cs typeface="Calibri" pitchFamily="34" charset="-120"/>
-                        </a:rPr>
-                        <a:t>10.2%</a:t>
-                      </a:r>
-                      <a:endParaRPr lang="en-US" sz="1300" dirty="0">
-                        <a:latin typeface="Calibri" charset="0"/>
-                        <a:ea typeface="Calibri" charset="0"/>
-                        <a:cs typeface="Calibri" charset="0"/>
-                      </a:endParaRPr>
-                    </a:p>
-                  </a:txBody>
-                  <a:tcPr marL="76200" marR="76200" marT="38100" marB="38100" anchor="ctr">
-                    <a:lnL w="9525" cap="flat" cmpd="sng" algn="ctr">
-                      <a:solidFill>
-                        <a:srgbClr val="D9E1E5"/>
-                      </a:solidFill>
-                      <a:prstDash val="solid"/>
-                      <a:round/>
-                      <a:headEnd type="none" w="med" len="med"/>
-                      <a:tailEnd type="none" w="med" len="med"/>
-                    </a:lnL>
-                    <a:lnR w="9525" cap="flat" cmpd="sng" algn="ctr">
-                      <a:solidFill>
-                        <a:srgbClr val="D9E1E5"/>
-                      </a:solidFill>
-                      <a:prstDash val="solid"/>
-                      <a:round/>
-                      <a:headEnd type="none" w="med" len="med"/>
-                      <a:tailEnd type="none" w="med" len="med"/>
-                    </a:lnR>
-                    <a:lnT w="9525" cap="flat" cmpd="sng" algn="ctr">
-                      <a:solidFill>
-                        <a:srgbClr val="D9E1E5"/>
-                      </a:solidFill>
-                      <a:prstDash val="solid"/>
-                      <a:round/>
-                      <a:headEnd type="none" w="med" len="med"/>
-                      <a:tailEnd type="none" w="med" len="med"/>
-                    </a:lnT>
-                    <a:lnB w="9525" cap="flat" cmpd="sng" algn="ctr">
-                      <a:solidFill>
-                        <a:srgbClr val="D9E1E5"/>
-                      </a:solidFill>
-                      <a:prstDash val="solid"/>
-                      <a:round/>
-                      <a:headEnd type="none" w="med" len="med"/>
-                      <a:tailEnd type="none" w="med" len="med"/>
-                    </a:lnB>
-                    <a:solidFill>
-                      <a:srgbClr val="FFFFFF"/>
-                    </a:solidFill>
-                  </a:tcPr>
-                </a:tc>
-                <a:tc>
-                  <a:txBody>
-                    <a:bodyPr/>
-                    <a:lstStyle/>
-                    <a:p>
-                      <a:pPr indent="0" marL="0">
-                        <a:buNone/>
-                      </a:pPr>
-                      <a:r>
-                        <a:rPr lang="en-US" sz="1300" dirty="0">
-                          <a:solidFill>
-                            <a:srgbClr val="0D5F73"/>
-                          </a:solidFill>
-                          <a:latin typeface="Calibri" pitchFamily="34" charset="0"/>
-                          <a:ea typeface="Calibri" pitchFamily="34" charset="-122"/>
-                          <a:cs typeface="Calibri" pitchFamily="34" charset="-120"/>
-                        </a:rPr>
-                        <a:t>3.08</a:t>
-                      </a:r>
-                      <a:endParaRPr lang="en-US" sz="1300" dirty="0">
-                        <a:latin typeface="Calibri" charset="0"/>
-                        <a:ea typeface="Calibri" charset="0"/>
-                        <a:cs typeface="Calibri" charset="0"/>
-                      </a:endParaRPr>
-                    </a:p>
-                  </a:txBody>
-                  <a:tcPr marL="76200" marR="76200" marT="38100" marB="38100" anchor="ctr">
-                    <a:lnL w="9525" cap="flat" cmpd="sng" algn="ctr">
-                      <a:solidFill>
-                        <a:srgbClr val="D9E1E5"/>
-                      </a:solidFill>
-                      <a:prstDash val="solid"/>
-                      <a:round/>
-                      <a:headEnd type="none" w="med" len="med"/>
-                      <a:tailEnd type="none" w="med" len="med"/>
-                    </a:lnL>
-                    <a:lnR w="9525" cap="flat" cmpd="sng" algn="ctr">
-                      <a:solidFill>
-                        <a:srgbClr val="D9E1E5"/>
-                      </a:solidFill>
-                      <a:prstDash val="solid"/>
-                      <a:round/>
-                      <a:headEnd type="none" w="med" len="med"/>
-                      <a:tailEnd type="none" w="med" len="med"/>
-                    </a:lnR>
-                    <a:lnT w="9525" cap="flat" cmpd="sng" algn="ctr">
-                      <a:solidFill>
-                        <a:srgbClr val="D9E1E5"/>
-                      </a:solidFill>
-                      <a:prstDash val="solid"/>
-                      <a:round/>
-                      <a:headEnd type="none" w="med" len="med"/>
-                      <a:tailEnd type="none" w="med" len="med"/>
-                    </a:lnT>
-                    <a:lnB w="9525" cap="flat" cmpd="sng" algn="ctr">
-                      <a:solidFill>
-                        <a:srgbClr val="D9E1E5"/>
-                      </a:solidFill>
-                      <a:prstDash val="solid"/>
-                      <a:round/>
-                      <a:headEnd type="none" w="med" len="med"/>
-                      <a:tailEnd type="none" w="med" len="med"/>
-                    </a:lnB>
-                    <a:solidFill>
-                      <a:srgbClr val="FFFFFF"/>
-                    </a:solidFill>
-                  </a:tcPr>
-                </a:tc>
-                <a:tc>
-                  <a:txBody>
-                    <a:bodyPr/>
-                    <a:lstStyle/>
-                    <a:p>
-                      <a:pPr indent="0" marL="0">
-                        <a:buNone/>
-                      </a:pPr>
-                      <a:r>
-                        <a:rPr lang="en-US" sz="1300" dirty="0">
-                          <a:solidFill>
-                            <a:srgbClr val="0D5F73"/>
-                          </a:solidFill>
-                          <a:latin typeface="Calibri" pitchFamily="34" charset="0"/>
-                          <a:ea typeface="Calibri" pitchFamily="34" charset="-122"/>
-                          <a:cs typeface="Calibri" pitchFamily="34" charset="-120"/>
-                        </a:rPr>
-                        <a:t>0.34 (0.011)</a:t>
-                      </a:r>
-                      <a:endParaRPr lang="en-US" sz="1300" dirty="0">
-                        <a:latin typeface="Calibri" charset="0"/>
-                        <a:ea typeface="Calibri" charset="0"/>
-                        <a:cs typeface="Calibri" charset="0"/>
-                      </a:endParaRPr>
-                    </a:p>
-                  </a:txBody>
-                  <a:tcPr marL="76200" marR="76200" marT="38100" marB="38100" anchor="ctr">
-                    <a:lnL w="9525" cap="flat" cmpd="sng" algn="ctr">
-                      <a:solidFill>
-                        <a:srgbClr val="D9E1E5"/>
-                      </a:solidFill>
-                      <a:prstDash val="solid"/>
-                      <a:round/>
-                      <a:headEnd type="none" w="med" len="med"/>
-                      <a:tailEnd type="none" w="med" len="med"/>
-                    </a:lnL>
-                    <a:lnR w="9525" cap="flat" cmpd="sng" algn="ctr">
-                      <a:solidFill>
-                        <a:srgbClr val="D9E1E5"/>
-                      </a:solidFill>
-                      <a:prstDash val="solid"/>
-                      <a:round/>
-                      <a:headEnd type="none" w="med" len="med"/>
-                      <a:tailEnd type="none" w="med" len="med"/>
-                    </a:lnR>
-                    <a:lnT w="9525" cap="flat" cmpd="sng" algn="ctr">
-                      <a:solidFill>
-                        <a:srgbClr val="D9E1E5"/>
-                      </a:solidFill>
-                      <a:prstDash val="solid"/>
-                      <a:round/>
-                      <a:headEnd type="none" w="med" len="med"/>
-                      <a:tailEnd type="none" w="med" len="med"/>
-                    </a:lnT>
-                    <a:lnB w="9525" cap="flat" cmpd="sng" algn="ctr">
-                      <a:solidFill>
-                        <a:srgbClr val="D9E1E5"/>
-                      </a:solidFill>
-                      <a:prstDash val="solid"/>
-                      <a:round/>
-                      <a:headEnd type="none" w="med" len="med"/>
-                      <a:tailEnd type="none" w="med" len="med"/>
-                    </a:lnB>
-                    <a:solidFill>
-                      <a:srgbClr val="FFFFFF"/>
-                    </a:solidFill>
-                  </a:tcPr>
-                </a:tc>
-              </a:tr>
-              <a:tr h="411480">
-                <a:tc>
-                  <a:txBody>
-                    <a:bodyPr/>
-                    <a:lstStyle/>
-                    <a:p>
-                      <a:pPr indent="0" marL="0">
-                        <a:buNone/>
-                      </a:pPr>
-                      <a:endParaRPr lang="en-US" sz="1300" dirty="0">
-                        <a:latin typeface="Calibri" charset="0"/>
-                        <a:ea typeface="Calibri" charset="0"/>
-                        <a:cs typeface="Calibri" charset="0"/>
-                      </a:endParaRPr>
-                    </a:p>
-                  </a:txBody>
-                  <a:tcPr marL="76200" marR="76200" marT="38100" marB="38100" anchor="ctr">
-                    <a:lnL w="9525" cap="flat" cmpd="sng" algn="ctr">
-                      <a:solidFill>
-                        <a:srgbClr val="D9E1E5"/>
-                      </a:solidFill>
-                      <a:prstDash val="solid"/>
-                      <a:round/>
-                      <a:headEnd type="none" w="med" len="med"/>
-                      <a:tailEnd type="none" w="med" len="med"/>
-                    </a:lnL>
-                    <a:lnR w="9525" cap="flat" cmpd="sng" algn="ctr">
-                      <a:solidFill>
-                        <a:srgbClr val="D9E1E5"/>
-                      </a:solidFill>
-                      <a:prstDash val="solid"/>
-                      <a:round/>
-                      <a:headEnd type="none" w="med" len="med"/>
-                      <a:tailEnd type="none" w="med" len="med"/>
-                    </a:lnR>
-                    <a:lnT w="9525" cap="flat" cmpd="sng" algn="ctr">
-                      <a:solidFill>
-                        <a:srgbClr val="D9E1E5"/>
-                      </a:solidFill>
-                      <a:prstDash val="solid"/>
-                      <a:round/>
-                      <a:headEnd type="none" w="med" len="med"/>
-                      <a:tailEnd type="none" w="med" len="med"/>
-                    </a:lnT>
-                    <a:lnB w="9525" cap="flat" cmpd="sng" algn="ctr">
-                      <a:solidFill>
-                        <a:srgbClr val="D9E1E5"/>
-                      </a:solidFill>
-                      <a:prstDash val="solid"/>
-                      <a:round/>
-                      <a:headEnd type="none" w="med" len="med"/>
-                      <a:tailEnd type="none" w="med" len="med"/>
-                    </a:lnB>
-                    <a:solidFill>
-                      <a:srgbClr val="FAFBFC"/>
-                    </a:solidFill>
-                  </a:tcPr>
-                </a:tc>
-                <a:tc>
-                  <a:txBody>
-                    <a:bodyPr/>
-                    <a:lstStyle/>
-                    <a:p>
-                      <a:pPr indent="0" marL="0">
-                        <a:buNone/>
-                      </a:pPr>
-                      <a:r>
-                        <a:rPr lang="en-US" sz="1300" dirty="0">
-                          <a:solidFill>
-                            <a:srgbClr val="15232A"/>
-                          </a:solidFill>
-                          <a:latin typeface="Calibri" pitchFamily="34" charset="0"/>
-                          <a:ea typeface="Calibri" pitchFamily="34" charset="-122"/>
-                          <a:cs typeface="Calibri" pitchFamily="34" charset="-120"/>
-                        </a:rPr>
-                        <a:t>Rate-of-change rule</a:t>
-                      </a:r>
-                      <a:endParaRPr lang="en-US" sz="1300" dirty="0">
-                        <a:latin typeface="Calibri" charset="0"/>
-                        <a:ea typeface="Calibri" charset="0"/>
-                        <a:cs typeface="Calibri" charset="0"/>
-                      </a:endParaRPr>
-                    </a:p>
-                  </a:txBody>
-                  <a:tcPr marL="76200" marR="76200" marT="38100" marB="38100" anchor="ctr">
-                    <a:lnL w="9525" cap="flat" cmpd="sng" algn="ctr">
-                      <a:solidFill>
-                        <a:srgbClr val="D9E1E5"/>
-                      </a:solidFill>
-                      <a:prstDash val="solid"/>
-                      <a:round/>
-                      <a:headEnd type="none" w="med" len="med"/>
-                      <a:tailEnd type="none" w="med" len="med"/>
-                    </a:lnL>
-                    <a:lnR w="9525" cap="flat" cmpd="sng" algn="ctr">
-                      <a:solidFill>
-                        <a:srgbClr val="D9E1E5"/>
-                      </a:solidFill>
-                      <a:prstDash val="solid"/>
-                      <a:round/>
-                      <a:headEnd type="none" w="med" len="med"/>
-                      <a:tailEnd type="none" w="med" len="med"/>
-                    </a:lnR>
-                    <a:lnT w="9525" cap="flat" cmpd="sng" algn="ctr">
-                      <a:solidFill>
-                        <a:srgbClr val="D9E1E5"/>
-                      </a:solidFill>
-                      <a:prstDash val="solid"/>
-                      <a:round/>
-                      <a:headEnd type="none" w="med" len="med"/>
-                      <a:tailEnd type="none" w="med" len="med"/>
-                    </a:lnT>
-                    <a:lnB w="9525" cap="flat" cmpd="sng" algn="ctr">
-                      <a:solidFill>
-                        <a:srgbClr val="D9E1E5"/>
-                      </a:solidFill>
-                      <a:prstDash val="solid"/>
-                      <a:round/>
-                      <a:headEnd type="none" w="med" len="med"/>
-                      <a:tailEnd type="none" w="med" len="med"/>
-                    </a:lnB>
-                    <a:solidFill>
-                      <a:srgbClr val="FAFBFC"/>
-                    </a:solidFill>
-                  </a:tcPr>
-                </a:tc>
-                <a:tc>
-                  <a:txBody>
-                    <a:bodyPr/>
-                    <a:lstStyle/>
-                    <a:p>
-                      <a:pPr indent="0" marL="0">
-                        <a:buNone/>
-                      </a:pPr>
-                      <a:endParaRPr lang="en-US" sz="1300" dirty="0">
-                        <a:latin typeface="Calibri" charset="0"/>
-                        <a:ea typeface="Calibri" charset="0"/>
-                        <a:cs typeface="Calibri" charset="0"/>
-                      </a:endParaRPr>
-                    </a:p>
-                  </a:txBody>
-                  <a:tcPr marL="76200" marR="76200" marT="38100" marB="38100" anchor="ctr">
-                    <a:lnL w="9525" cap="flat" cmpd="sng" algn="ctr">
-                      <a:solidFill>
-                        <a:srgbClr val="D9E1E5"/>
-                      </a:solidFill>
-                      <a:prstDash val="solid"/>
-                      <a:round/>
-                      <a:headEnd type="none" w="med" len="med"/>
-                      <a:tailEnd type="none" w="med" len="med"/>
-                    </a:lnL>
-                    <a:lnR w="9525" cap="flat" cmpd="sng" algn="ctr">
-                      <a:solidFill>
-                        <a:srgbClr val="D9E1E5"/>
-                      </a:solidFill>
-                      <a:prstDash val="solid"/>
-                      <a:round/>
-                      <a:headEnd type="none" w="med" len="med"/>
-                      <a:tailEnd type="none" w="med" len="med"/>
-                    </a:lnR>
-                    <a:lnT w="9525" cap="flat" cmpd="sng" algn="ctr">
-                      <a:solidFill>
-                        <a:srgbClr val="D9E1E5"/>
-                      </a:solidFill>
-                      <a:prstDash val="solid"/>
-                      <a:round/>
-                      <a:headEnd type="none" w="med" len="med"/>
-                      <a:tailEnd type="none" w="med" len="med"/>
-                    </a:lnT>
-                    <a:lnB w="9525" cap="flat" cmpd="sng" algn="ctr">
-                      <a:solidFill>
-                        <a:srgbClr val="D9E1E5"/>
-                      </a:solidFill>
-                      <a:prstDash val="solid"/>
-                      <a:round/>
-                      <a:headEnd type="none" w="med" len="med"/>
-                      <a:tailEnd type="none" w="med" len="med"/>
-                    </a:lnB>
-                    <a:solidFill>
-                      <a:srgbClr val="FAFBFC"/>
-                    </a:solidFill>
-                  </a:tcPr>
-                </a:tc>
-                <a:tc>
-                  <a:txBody>
-                    <a:bodyPr/>
-                    <a:lstStyle/>
-                    <a:p>
-                      <a:pPr indent="0" marL="0">
-                        <a:buNone/>
-                      </a:pPr>
-                      <a:r>
-                        <a:rPr lang="en-US" sz="1300" dirty="0">
-                          <a:solidFill>
-                            <a:srgbClr val="15232A"/>
-                          </a:solidFill>
-                          <a:latin typeface="Calibri" pitchFamily="34" charset="0"/>
-                          <a:ea typeface="Calibri" pitchFamily="34" charset="-122"/>
-                          <a:cs typeface="Calibri" pitchFamily="34" charset="-120"/>
-                        </a:rPr>
-                        <a:t>73.7%</a:t>
-                      </a:r>
-                      <a:endParaRPr lang="en-US" sz="1300" dirty="0">
-                        <a:latin typeface="Calibri" charset="0"/>
-                        <a:ea typeface="Calibri" charset="0"/>
-                        <a:cs typeface="Calibri" charset="0"/>
-                      </a:endParaRPr>
-                    </a:p>
-                  </a:txBody>
-                  <a:tcPr marL="76200" marR="76200" marT="38100" marB="38100" anchor="ctr">
-                    <a:lnL w="9525" cap="flat" cmpd="sng" algn="ctr">
-                      <a:solidFill>
-                        <a:srgbClr val="D9E1E5"/>
-                      </a:solidFill>
-                      <a:prstDash val="solid"/>
-                      <a:round/>
-                      <a:headEnd type="none" w="med" len="med"/>
-                      <a:tailEnd type="none" w="med" len="med"/>
-                    </a:lnL>
-                    <a:lnR w="9525" cap="flat" cmpd="sng" algn="ctr">
-                      <a:solidFill>
-                        <a:srgbClr val="D9E1E5"/>
-                      </a:solidFill>
-                      <a:prstDash val="solid"/>
-                      <a:round/>
-                      <a:headEnd type="none" w="med" len="med"/>
-                      <a:tailEnd type="none" w="med" len="med"/>
-                    </a:lnR>
-                    <a:lnT w="9525" cap="flat" cmpd="sng" algn="ctr">
-                      <a:solidFill>
-                        <a:srgbClr val="D9E1E5"/>
-                      </a:solidFill>
-                      <a:prstDash val="solid"/>
-                      <a:round/>
-                      <a:headEnd type="none" w="med" len="med"/>
-                      <a:tailEnd type="none" w="med" len="med"/>
-                    </a:lnT>
-                    <a:lnB w="9525" cap="flat" cmpd="sng" algn="ctr">
-                      <a:solidFill>
-                        <a:srgbClr val="D9E1E5"/>
-                      </a:solidFill>
-                      <a:prstDash val="solid"/>
-                      <a:round/>
-                      <a:headEnd type="none" w="med" len="med"/>
-                      <a:tailEnd type="none" w="med" len="med"/>
-                    </a:lnB>
-                    <a:solidFill>
-                      <a:srgbClr val="FAFBFC"/>
-                    </a:solidFill>
-                  </a:tcPr>
-                </a:tc>
-                <a:tc>
-                  <a:txBody>
-                    <a:bodyPr/>
-                    <a:lstStyle/>
-                    <a:p>
-                      <a:pPr indent="0" marL="0">
-                        <a:buNone/>
-                      </a:pPr>
-                      <a:r>
-                        <a:rPr lang="en-US" sz="1300" dirty="0">
-                          <a:solidFill>
-                            <a:srgbClr val="15232A"/>
-                          </a:solidFill>
-                          <a:latin typeface="Calibri" pitchFamily="34" charset="0"/>
-                          <a:ea typeface="Calibri" pitchFamily="34" charset="-122"/>
-                          <a:cs typeface="Calibri" pitchFamily="34" charset="-120"/>
-                        </a:rPr>
-                        <a:t>46.1%</a:t>
-                      </a:r>
-                      <a:endParaRPr lang="en-US" sz="1300" dirty="0">
-                        <a:latin typeface="Calibri" charset="0"/>
-                        <a:ea typeface="Calibri" charset="0"/>
-                        <a:cs typeface="Calibri" charset="0"/>
-                      </a:endParaRPr>
-                    </a:p>
-                  </a:txBody>
-                  <a:tcPr marL="76200" marR="76200" marT="38100" marB="38100" anchor="ctr">
-                    <a:lnL w="9525" cap="flat" cmpd="sng" algn="ctr">
-                      <a:solidFill>
-                        <a:srgbClr val="D9E1E5"/>
-                      </a:solidFill>
-                      <a:prstDash val="solid"/>
-                      <a:round/>
-                      <a:headEnd type="none" w="med" len="med"/>
-                      <a:tailEnd type="none" w="med" len="med"/>
-                    </a:lnL>
-                    <a:lnR w="9525" cap="flat" cmpd="sng" algn="ctr">
-                      <a:solidFill>
-                        <a:srgbClr val="D9E1E5"/>
-                      </a:solidFill>
-                      <a:prstDash val="solid"/>
-                      <a:round/>
-                      <a:headEnd type="none" w="med" len="med"/>
-                      <a:tailEnd type="none" w="med" len="med"/>
-                    </a:lnR>
-                    <a:lnT w="9525" cap="flat" cmpd="sng" algn="ctr">
-                      <a:solidFill>
-                        <a:srgbClr val="D9E1E5"/>
-                      </a:solidFill>
-                      <a:prstDash val="solid"/>
-                      <a:round/>
-                      <a:headEnd type="none" w="med" len="med"/>
-                      <a:tailEnd type="none" w="med" len="med"/>
-                    </a:lnT>
-                    <a:lnB w="9525" cap="flat" cmpd="sng" algn="ctr">
-                      <a:solidFill>
-                        <a:srgbClr val="D9E1E5"/>
-                      </a:solidFill>
-                      <a:prstDash val="solid"/>
-                      <a:round/>
-                      <a:headEnd type="none" w="med" len="med"/>
-                      <a:tailEnd type="none" w="med" len="med"/>
-                    </a:lnB>
-                    <a:solidFill>
-                      <a:srgbClr val="FAFBFC"/>
-                    </a:solidFill>
-                  </a:tcPr>
-                </a:tc>
-                <a:tc>
-                  <a:txBody>
-                    <a:bodyPr/>
-                    <a:lstStyle/>
-                    <a:p>
-                      <a:pPr indent="0" marL="0">
-                        <a:buNone/>
-                      </a:pPr>
-                      <a:r>
-                        <a:rPr lang="en-US" sz="1300" dirty="0">
-                          <a:solidFill>
-                            <a:srgbClr val="15232A"/>
-                          </a:solidFill>
-                          <a:latin typeface="Calibri" pitchFamily="34" charset="0"/>
-                          <a:ea typeface="Calibri" pitchFamily="34" charset="-122"/>
-                          <a:cs typeface="Calibri" pitchFamily="34" charset="-120"/>
-                        </a:rPr>
-                        <a:t>9.5%</a:t>
-                      </a:r>
-                      <a:endParaRPr lang="en-US" sz="1300" dirty="0">
-                        <a:latin typeface="Calibri" charset="0"/>
-                        <a:ea typeface="Calibri" charset="0"/>
-                        <a:cs typeface="Calibri" charset="0"/>
-                      </a:endParaRPr>
-                    </a:p>
-                  </a:txBody>
-                  <a:tcPr marL="76200" marR="76200" marT="38100" marB="38100" anchor="ctr">
-                    <a:lnL w="9525" cap="flat" cmpd="sng" algn="ctr">
-                      <a:solidFill>
-                        <a:srgbClr val="D9E1E5"/>
-                      </a:solidFill>
-                      <a:prstDash val="solid"/>
-                      <a:round/>
-                      <a:headEnd type="none" w="med" len="med"/>
-                      <a:tailEnd type="none" w="med" len="med"/>
-                    </a:lnL>
-                    <a:lnR w="9525" cap="flat" cmpd="sng" algn="ctr">
-                      <a:solidFill>
-                        <a:srgbClr val="D9E1E5"/>
-                      </a:solidFill>
-                      <a:prstDash val="solid"/>
-                      <a:round/>
-                      <a:headEnd type="none" w="med" len="med"/>
-                      <a:tailEnd type="none" w="med" len="med"/>
-                    </a:lnR>
-                    <a:lnT w="9525" cap="flat" cmpd="sng" algn="ctr">
-                      <a:solidFill>
-                        <a:srgbClr val="D9E1E5"/>
-                      </a:solidFill>
-                      <a:prstDash val="solid"/>
-                      <a:round/>
-                      <a:headEnd type="none" w="med" len="med"/>
-                      <a:tailEnd type="none" w="med" len="med"/>
-                    </a:lnT>
-                    <a:lnB w="9525" cap="flat" cmpd="sng" algn="ctr">
-                      <a:solidFill>
-                        <a:srgbClr val="D9E1E5"/>
-                      </a:solidFill>
-                      <a:prstDash val="solid"/>
-                      <a:round/>
-                      <a:headEnd type="none" w="med" len="med"/>
-                      <a:tailEnd type="none" w="med" len="med"/>
-                    </a:lnB>
-                    <a:solidFill>
-                      <a:srgbClr val="FAFBFC"/>
-                    </a:solidFill>
-                  </a:tcPr>
-                </a:tc>
-                <a:tc>
-                  <a:txBody>
-                    <a:bodyPr/>
-                    <a:lstStyle/>
-                    <a:p>
-                      <a:pPr indent="0" marL="0">
-                        <a:buNone/>
-                      </a:pPr>
-                      <a:r>
-                        <a:rPr lang="en-US" sz="1300" dirty="0">
-                          <a:solidFill>
-                            <a:srgbClr val="15232A"/>
-                          </a:solidFill>
-                          <a:latin typeface="Calibri" pitchFamily="34" charset="0"/>
-                          <a:ea typeface="Calibri" pitchFamily="34" charset="-122"/>
-                          <a:cs typeface="Calibri" pitchFamily="34" charset="-120"/>
-                        </a:rPr>
-                        <a:t>2.58</a:t>
-                      </a:r>
-                      <a:endParaRPr lang="en-US" sz="1300" dirty="0">
-                        <a:latin typeface="Calibri" charset="0"/>
-                        <a:ea typeface="Calibri" charset="0"/>
-                        <a:cs typeface="Calibri" charset="0"/>
-                      </a:endParaRPr>
-                    </a:p>
-                  </a:txBody>
-                  <a:tcPr marL="76200" marR="76200" marT="38100" marB="38100" anchor="ctr">
-                    <a:lnL w="9525" cap="flat" cmpd="sng" algn="ctr">
-                      <a:solidFill>
-                        <a:srgbClr val="D9E1E5"/>
-                      </a:solidFill>
-                      <a:prstDash val="solid"/>
-                      <a:round/>
-                      <a:headEnd type="none" w="med" len="med"/>
-                      <a:tailEnd type="none" w="med" len="med"/>
-                    </a:lnL>
-                    <a:lnR w="9525" cap="flat" cmpd="sng" algn="ctr">
-                      <a:solidFill>
-                        <a:srgbClr val="D9E1E5"/>
-                      </a:solidFill>
-                      <a:prstDash val="solid"/>
-                      <a:round/>
-                      <a:headEnd type="none" w="med" len="med"/>
-                      <a:tailEnd type="none" w="med" len="med"/>
-                    </a:lnR>
-                    <a:lnT w="9525" cap="flat" cmpd="sng" algn="ctr">
-                      <a:solidFill>
-                        <a:srgbClr val="D9E1E5"/>
-                      </a:solidFill>
-                      <a:prstDash val="solid"/>
-                      <a:round/>
-                      <a:headEnd type="none" w="med" len="med"/>
-                      <a:tailEnd type="none" w="med" len="med"/>
-                    </a:lnT>
-                    <a:lnB w="9525" cap="flat" cmpd="sng" algn="ctr">
-                      <a:solidFill>
-                        <a:srgbClr val="D9E1E5"/>
-                      </a:solidFill>
-                      <a:prstDash val="solid"/>
-                      <a:round/>
-                      <a:headEnd type="none" w="med" len="med"/>
-                      <a:tailEnd type="none" w="med" len="med"/>
-                    </a:lnB>
-                    <a:solidFill>
-                      <a:srgbClr val="FAFBFC"/>
-                    </a:solidFill>
-                  </a:tcPr>
-                </a:tc>
-                <a:tc>
-                  <a:txBody>
-                    <a:bodyPr/>
-                    <a:lstStyle/>
-                    <a:p>
-                      <a:pPr indent="0" marL="0">
-                        <a:buNone/>
-                      </a:pPr>
-                      <a:r>
-                        <a:rPr lang="en-US" sz="1300" dirty="0">
-                          <a:solidFill>
-                            <a:srgbClr val="15232A"/>
-                          </a:solidFill>
-                          <a:latin typeface="Calibri" pitchFamily="34" charset="0"/>
-                          <a:ea typeface="Calibri" pitchFamily="34" charset="-122"/>
-                          <a:cs typeface="Calibri" pitchFamily="34" charset="-120"/>
-                        </a:rPr>
-                        <a:t>0.12 (0.011)</a:t>
-                      </a:r>
-                      <a:endParaRPr lang="en-US" sz="1300" dirty="0">
-                        <a:latin typeface="Calibri" charset="0"/>
-                        <a:ea typeface="Calibri" charset="0"/>
-                        <a:cs typeface="Calibri" charset="0"/>
-                      </a:endParaRPr>
-                    </a:p>
-                  </a:txBody>
-                  <a:tcPr marL="76200" marR="76200" marT="38100" marB="38100" anchor="ctr">
-                    <a:lnL w="9525" cap="flat" cmpd="sng" algn="ctr">
-                      <a:solidFill>
-                        <a:srgbClr val="D9E1E5"/>
-                      </a:solidFill>
-                      <a:prstDash val="solid"/>
-                      <a:round/>
-                      <a:headEnd type="none" w="med" len="med"/>
-                      <a:tailEnd type="none" w="med" len="med"/>
-                    </a:lnL>
-                    <a:lnR w="9525" cap="flat" cmpd="sng" algn="ctr">
-                      <a:solidFill>
-                        <a:srgbClr val="D9E1E5"/>
-                      </a:solidFill>
-                      <a:prstDash val="solid"/>
-                      <a:round/>
-                      <a:headEnd type="none" w="med" len="med"/>
-                      <a:tailEnd type="none" w="med" len="med"/>
-                    </a:lnR>
-                    <a:lnT w="9525" cap="flat" cmpd="sng" algn="ctr">
-                      <a:solidFill>
-                        <a:srgbClr val="D9E1E5"/>
-                      </a:solidFill>
-                      <a:prstDash val="solid"/>
-                      <a:round/>
-                      <a:headEnd type="none" w="med" len="med"/>
-                      <a:tailEnd type="none" w="med" len="med"/>
-                    </a:lnT>
-                    <a:lnB w="9525" cap="flat" cmpd="sng" algn="ctr">
-                      <a:solidFill>
-                        <a:srgbClr val="D9E1E5"/>
-                      </a:solidFill>
-                      <a:prstDash val="solid"/>
-                      <a:round/>
-                      <a:headEnd type="none" w="med" len="med"/>
-                      <a:tailEnd type="none" w="med" len="med"/>
-                    </a:lnB>
-                    <a:solidFill>
-                      <a:srgbClr val="FAFBFC"/>
                     </a:solidFill>
                   </a:tcPr>
                 </a:tc>
@@ -9353,14 +7955,41 @@
       </p:graphicFrame>
       <p:sp>
         <p:nvSpPr>
-          <p:cNvPr id="4" name="Text 1"/>
+          <p:cNvPr id="4" name="Shape 1"/>
+          <p:cNvSpPr/>
+          <p:nvPr/>
+        </p:nvSpPr>
+        <p:spPr>
+          <a:xfrm>
+            <a:off x="548640" y="3520440"/>
+            <a:ext cx="5394960" cy="2606040"/>
+          </a:xfrm>
+          <a:prstGeom prst="roundRect">
+            <a:avLst>
+              <a:gd name="adj" fmla="val 2807"/>
+            </a:avLst>
+          </a:prstGeom>
+          <a:solidFill>
+            <a:srgbClr val="E1EFF2"/>
+          </a:solidFill>
+          <a:ln w="12700">
+            <a:solidFill>
+              <a:srgbClr val="E1EFF2"/>
+            </a:solidFill>
+            <a:prstDash val="solid"/>
+          </a:ln>
+        </p:spPr>
+      </p:sp>
+      <p:sp>
+        <p:nvSpPr>
+          <p:cNvPr id="5" name="Text 2"/>
           <p:cNvSpPr txBox="1"/>
           <p:nvPr/>
         </p:nvSpPr>
         <p:spPr>
           <a:xfrm>
-            <a:off x="548640" y="4572000"/>
-            <a:ext cx="11064240" cy="1280160"/>
+            <a:off x="749808" y="3685032"/>
+            <a:ext cx="4992624" cy="365760"/>
           </a:xfrm>
           <a:prstGeom prst="rect">
             <a:avLst/>
@@ -9376,17 +8005,161 @@
               <a:buNone/>
             </a:pPr>
             <a:r>
-              <a:rPr lang="en-US" sz="1500" dirty="0">
-                <a:solidFill>
-                  <a:srgbClr val="15232A"/>
+              <a:rPr lang="en-US" sz="1500" b="1" dirty="0">
+                <a:solidFill>
+                  <a:srgbClr val="0D5F73"/>
                 </a:solidFill>
                 <a:latin typeface="Calibri" pitchFamily="34" charset="0"/>
                 <a:ea typeface="Calibri" pitchFamily="34" charset="-122"/>
                 <a:cs typeface="Calibri" pitchFamily="34" charset="-120"/>
               </a:rPr>
-              <a:t>Thresholds were set on development patients for ≤ 2 false alerts per patient-day, with a 60-min cooldown. On test patients the low-glucose alert overshot (3.08 per day), and the three alert types together produce 7.9 alerts per patient-day: too many for routine use. Next step: one merged alert stream with a shared cooldown, and budgets set with clinicians.</a:t>
+              <a:t>The policy</a:t>
             </a:r>
             <a:endParaRPr lang="en-US" sz="1500" dirty="0"/>
+          </a:p>
+        </p:txBody>
+      </p:sp>
+      <p:sp>
+        <p:nvSpPr>
+          <p:cNvPr id="6" name="Text 3"/>
+          <p:cNvSpPr txBox="1"/>
+          <p:nvPr/>
+        </p:nvSpPr>
+        <p:spPr>
+          <a:xfrm>
+            <a:off x="749808" y="4087368"/>
+            <a:ext cx="4992624" cy="1920240"/>
+          </a:xfrm>
+          <a:prstGeom prst="rect">
+            <a:avLst/>
+          </a:prstGeom>
+          <a:noFill/>
+          <a:ln/>
+        </p:spPr>
+        <p:txBody>
+          <a:bodyPr wrap="square" lIns="0" tIns="0" rIns="0" bIns="0" rtlCol="0" anchor="t"/>
+          <a:lstStyle/>
+          <a:p>
+            <a:pPr indent="0" marL="0">
+              <a:buNone/>
+            </a:pPr>
+            <a:r>
+              <a:rPr lang="en-US" sz="1300" dirty="0">
+                <a:solidFill>
+                  <a:srgbClr val="15232A"/>
+                </a:solidFill>
+                <a:latin typeface="Calibri" pitchFamily="34" charset="0"/>
+                <a:ea typeface="Calibri" pitchFamily="34" charset="-122"/>
+                <a:cs typeface="Calibri" pitchFamily="34" charset="-120"/>
+              </a:rPr>
+              <a:t>One stream per patient, only for predicted &lt; 70 or &gt; 250 mg/dL within 60 min. At most one alert per hour; a predicted low may override. Rising above 180 is expected in T2D (target is &lt; 25% of the time, not zero), so it ranks the worklist instead of interrupting.</a:t>
+            </a:r>
+            <a:endParaRPr lang="en-US" sz="1300" dirty="0"/>
+          </a:p>
+        </p:txBody>
+      </p:sp>
+      <p:sp>
+        <p:nvSpPr>
+          <p:cNvPr id="7" name="Shape 4"/>
+          <p:cNvSpPr/>
+          <p:nvPr/>
+        </p:nvSpPr>
+        <p:spPr>
+          <a:xfrm>
+            <a:off x="6217920" y="3520440"/>
+            <a:ext cx="5394960" cy="2606040"/>
+          </a:xfrm>
+          <a:prstGeom prst="roundRect">
+            <a:avLst>
+              <a:gd name="adj" fmla="val 2807"/>
+            </a:avLst>
+          </a:prstGeom>
+          <a:solidFill>
+            <a:srgbClr val="F3F6F7"/>
+          </a:solidFill>
+          <a:ln w="12700">
+            <a:solidFill>
+              <a:srgbClr val="F3F6F7"/>
+            </a:solidFill>
+            <a:prstDash val="solid"/>
+          </a:ln>
+        </p:spPr>
+      </p:sp>
+      <p:sp>
+        <p:nvSpPr>
+          <p:cNvPr id="8" name="Text 5"/>
+          <p:cNvSpPr txBox="1"/>
+          <p:nvPr/>
+        </p:nvSpPr>
+        <p:spPr>
+          <a:xfrm>
+            <a:off x="6419088" y="3685032"/>
+            <a:ext cx="4992624" cy="365760"/>
+          </a:xfrm>
+          <a:prstGeom prst="rect">
+            <a:avLst/>
+          </a:prstGeom>
+          <a:noFill/>
+          <a:ln/>
+        </p:spPr>
+        <p:txBody>
+          <a:bodyPr wrap="square" lIns="0" tIns="0" rIns="0" bIns="0" rtlCol="0" anchor="t"/>
+          <a:lstStyle/>
+          <a:p>
+            <a:pPr indent="0" marL="0">
+              <a:buNone/>
+            </a:pPr>
+            <a:r>
+              <a:rPr lang="en-US" sz="1500" b="1" dirty="0">
+                <a:solidFill>
+                  <a:srgbClr val="0D5F73"/>
+                </a:solidFill>
+                <a:latin typeface="Calibri" pitchFamily="34" charset="0"/>
+                <a:ea typeface="Calibri" pitchFamily="34" charset="-122"/>
+                <a:cs typeface="Calibri" pitchFamily="34" charset="-120"/>
+              </a:rPr>
+              <a:t>The honest trade-off</a:t>
+            </a:r>
+            <a:endParaRPr lang="en-US" sz="1500" dirty="0"/>
+          </a:p>
+        </p:txBody>
+      </p:sp>
+      <p:sp>
+        <p:nvSpPr>
+          <p:cNvPr id="9" name="Text 6"/>
+          <p:cNvSpPr txBox="1"/>
+          <p:nvPr/>
+        </p:nvSpPr>
+        <p:spPr>
+          <a:xfrm>
+            <a:off x="6419088" y="4087368"/>
+            <a:ext cx="4992624" cy="1920240"/>
+          </a:xfrm>
+          <a:prstGeom prst="rect">
+            <a:avLst/>
+          </a:prstGeom>
+          <a:noFill/>
+          <a:ln/>
+        </p:spPr>
+        <p:txBody>
+          <a:bodyPr wrap="square" lIns="0" tIns="0" rIns="0" bIns="0" rtlCol="0" anchor="t"/>
+          <a:lstStyle/>
+          <a:p>
+            <a:pPr indent="0" marL="0">
+              <a:buNone/>
+            </a:pPr>
+            <a:r>
+              <a:rPr lang="en-US" sz="1300" dirty="0">
+                <a:solidFill>
+                  <a:srgbClr val="15232A"/>
+                </a:solidFill>
+                <a:latin typeface="Calibri" pitchFamily="34" charset="0"/>
+                <a:ea typeface="Calibri" pitchFamily="34" charset="-122"/>
+                <a:cs typeface="Calibri" pitchFamily="34" charset="-120"/>
+              </a:rPr>
+              <a:t>v1 tuned each event alone: 7.9 alerts per patient-day. v2: 1.89. The price is sensitivity (each classifier alone catches more). Thresholds were set on development data for ≤ 1 false alert per day; test overshot to 1.38. The budget is a dial clinicians should set.</a:t>
+            </a:r>
+            <a:endParaRPr lang="en-US" sz="1300" dirty="0"/>
           </a:p>
         </p:txBody>
       </p:sp>
@@ -9498,7 +8271,7 @@
                 <a:ea typeface="Cambria" pitchFamily="34" charset="-122"/>
                 <a:cs typeface="Cambria" pitchFamily="34" charset="-120"/>
               </a:rPr>
-              <a:t>It transfers: external validation on a US cohort</a:t>
+              <a:t>v2: what we fixed after the first test</a:t>
             </a:r>
             <a:endParaRPr lang="en-US" sz="3000" dirty="0"/>
           </a:p>
@@ -9512,7 +8285,7 @@
         </p:nvGraphicFramePr>
         <p:xfrm>
           <a:off x="548640" y="1234440"/>
-          <a:ext cx="6583680" cy="4937760"/>
+          <a:ext cx="6035040" cy="4846320"/>
         </p:xfrm>
         <a:graphic xmlns:a="http://schemas.openxmlformats.org/drawingml/2006/main">
           <a:graphicData uri="http://schemas.openxmlformats.org/drawingml/2006/chart">
@@ -9520,43 +8293,1066 @@
           </a:graphicData>
         </a:graphic>
       </p:graphicFrame>
-      <p:sp>
-        <p:nvSpPr>
-          <p:cNvPr id="4" name="Shape 1"/>
-          <p:cNvSpPr/>
-          <p:nvPr/>
-        </p:nvSpPr>
-        <p:spPr>
-          <a:xfrm>
-            <a:off x="7452360" y="1325880"/>
-            <a:ext cx="4160520" cy="2286000"/>
-          </a:xfrm>
-          <a:prstGeom prst="roundRect">
-            <a:avLst>
-              <a:gd name="adj" fmla="val 3200"/>
-            </a:avLst>
-          </a:prstGeom>
-          <a:solidFill>
-            <a:srgbClr val="E1EFF2"/>
-          </a:solidFill>
-          <a:ln w="12700">
-            <a:solidFill>
-              <a:srgbClr val="E1EFF2"/>
-            </a:solidFill>
-            <a:prstDash val="solid"/>
-          </a:ln>
-        </p:spPr>
-      </p:sp>
-      <p:sp>
-        <p:nvSpPr>
-          <p:cNvPr id="5" name="Text 2"/>
+      <p:graphicFrame>
+        <p:nvGraphicFramePr>
+          <p:cNvPr id="15" name="Table 0"/>
+          <p:cNvGraphicFramePr>
+            <a:graphicFrameLocks noGrp="1"/>
+          </p:cNvGraphicFramePr>
+          <p:nvPr>
+            <p:extLst>
+              <p:ext uri="{D42A27DB-BD31-4B8C-83A1-F6EECF244321}">
+                <p14:modId xmlns:p14="http://schemas.microsoft.com/office/powerpoint/2010/main" val="1579011935"/>
+              </p:ext>
+            </p:extLst>
+          </p:nvPr>
+        </p:nvGraphicFramePr>
+        <p:xfrm>
+          <a:off x="6858000" y="1325880"/>
+          <a:ext cx="4754880" cy="914400"/>
+        </p:xfrm>
+        <a:graphic>
+          <a:graphicData uri="http://schemas.openxmlformats.org/drawingml/2006/table">
+            <a:tbl>
+              <a:tblPr/>
+              <a:tblGrid>
+                <a:gridCol w="2560320"/>
+                <a:gridCol w="1097280"/>
+                <a:gridCol w="1097280"/>
+              </a:tblGrid>
+              <a:tr h="438912">
+                <a:tc>
+                  <a:txBody>
+                    <a:bodyPr/>
+                    <a:lstStyle/>
+                    <a:p>
+                      <a:pPr indent="0" marL="0">
+                        <a:buNone/>
+                      </a:pPr>
+                      <a:endParaRPr lang="en-US" sz="1400" dirty="0">
+                        <a:latin typeface="Calibri" charset="0"/>
+                        <a:ea typeface="Calibri" charset="0"/>
+                        <a:cs typeface="Calibri" charset="0"/>
+                      </a:endParaRPr>
+                    </a:p>
+                  </a:txBody>
+                  <a:tcPr marL="101600" marR="101600" marT="50800" marB="50800">
+                    <a:lnL w="9525" cap="flat" cmpd="sng" algn="ctr">
+                      <a:solidFill>
+                        <a:srgbClr val="D9E1E5"/>
+                      </a:solidFill>
+                      <a:prstDash val="solid"/>
+                      <a:round/>
+                      <a:headEnd type="none" w="med" len="med"/>
+                      <a:tailEnd type="none" w="med" len="med"/>
+                    </a:lnL>
+                    <a:lnR w="9525" cap="flat" cmpd="sng" algn="ctr">
+                      <a:solidFill>
+                        <a:srgbClr val="D9E1E5"/>
+                      </a:solidFill>
+                      <a:prstDash val="solid"/>
+                      <a:round/>
+                      <a:headEnd type="none" w="med" len="med"/>
+                      <a:tailEnd type="none" w="med" len="med"/>
+                    </a:lnR>
+                    <a:lnT w="9525" cap="flat" cmpd="sng" algn="ctr">
+                      <a:solidFill>
+                        <a:srgbClr val="D9E1E5"/>
+                      </a:solidFill>
+                      <a:prstDash val="solid"/>
+                      <a:round/>
+                      <a:headEnd type="none" w="med" len="med"/>
+                      <a:tailEnd type="none" w="med" len="med"/>
+                    </a:lnT>
+                    <a:lnB w="9525" cap="flat" cmpd="sng" algn="ctr">
+                      <a:solidFill>
+                        <a:srgbClr val="D9E1E5"/>
+                      </a:solidFill>
+                      <a:prstDash val="solid"/>
+                      <a:round/>
+                      <a:headEnd type="none" w="med" len="med"/>
+                      <a:tailEnd type="none" w="med" len="med"/>
+                    </a:lnB>
+                    <a:solidFill>
+                      <a:srgbClr val="F3F6F7"/>
+                    </a:solidFill>
+                  </a:tcPr>
+                </a:tc>
+                <a:tc>
+                  <a:txBody>
+                    <a:bodyPr/>
+                    <a:lstStyle/>
+                    <a:p>
+                      <a:pPr indent="0" marL="0">
+                        <a:buNone/>
+                      </a:pPr>
+                      <a:r>
+                        <a:rPr lang="en-US" sz="1400" b="1" dirty="0">
+                          <a:solidFill>
+                            <a:srgbClr val="15232A"/>
+                          </a:solidFill>
+                          <a:latin typeface="Calibri" pitchFamily="34" charset="0"/>
+                          <a:ea typeface="Calibri" pitchFamily="34" charset="-122"/>
+                          <a:cs typeface="Calibri" pitchFamily="34" charset="-120"/>
+                        </a:rPr>
+                        <a:t>v1</a:t>
+                      </a:r>
+                      <a:endParaRPr lang="en-US" sz="1400" dirty="0">
+                        <a:latin typeface="Calibri" charset="0"/>
+                        <a:ea typeface="Calibri" charset="0"/>
+                        <a:cs typeface="Calibri" charset="0"/>
+                      </a:endParaRPr>
+                    </a:p>
+                  </a:txBody>
+                  <a:tcPr marL="101600" marR="101600" marT="50800" marB="50800">
+                    <a:lnL w="9525" cap="flat" cmpd="sng" algn="ctr">
+                      <a:solidFill>
+                        <a:srgbClr val="D9E1E5"/>
+                      </a:solidFill>
+                      <a:prstDash val="solid"/>
+                      <a:round/>
+                      <a:headEnd type="none" w="med" len="med"/>
+                      <a:tailEnd type="none" w="med" len="med"/>
+                    </a:lnL>
+                    <a:lnR w="9525" cap="flat" cmpd="sng" algn="ctr">
+                      <a:solidFill>
+                        <a:srgbClr val="D9E1E5"/>
+                      </a:solidFill>
+                      <a:prstDash val="solid"/>
+                      <a:round/>
+                      <a:headEnd type="none" w="med" len="med"/>
+                      <a:tailEnd type="none" w="med" len="med"/>
+                    </a:lnR>
+                    <a:lnT w="9525" cap="flat" cmpd="sng" algn="ctr">
+                      <a:solidFill>
+                        <a:srgbClr val="D9E1E5"/>
+                      </a:solidFill>
+                      <a:prstDash val="solid"/>
+                      <a:round/>
+                      <a:headEnd type="none" w="med" len="med"/>
+                      <a:tailEnd type="none" w="med" len="med"/>
+                    </a:lnT>
+                    <a:lnB w="9525" cap="flat" cmpd="sng" algn="ctr">
+                      <a:solidFill>
+                        <a:srgbClr val="D9E1E5"/>
+                      </a:solidFill>
+                      <a:prstDash val="solid"/>
+                      <a:round/>
+                      <a:headEnd type="none" w="med" len="med"/>
+                      <a:tailEnd type="none" w="med" len="med"/>
+                    </a:lnB>
+                    <a:solidFill>
+                      <a:srgbClr val="F3F6F7"/>
+                    </a:solidFill>
+                  </a:tcPr>
+                </a:tc>
+                <a:tc>
+                  <a:txBody>
+                    <a:bodyPr/>
+                    <a:lstStyle/>
+                    <a:p>
+                      <a:pPr indent="0" marL="0">
+                        <a:buNone/>
+                      </a:pPr>
+                      <a:r>
+                        <a:rPr lang="en-US" sz="1400" b="1" dirty="0">
+                          <a:solidFill>
+                            <a:srgbClr val="15232A"/>
+                          </a:solidFill>
+                          <a:latin typeface="Calibri" pitchFamily="34" charset="0"/>
+                          <a:ea typeface="Calibri" pitchFamily="34" charset="-122"/>
+                          <a:cs typeface="Calibri" pitchFamily="34" charset="-120"/>
+                        </a:rPr>
+                        <a:t>v2</a:t>
+                      </a:r>
+                      <a:endParaRPr lang="en-US" sz="1400" dirty="0">
+                        <a:latin typeface="Calibri" charset="0"/>
+                        <a:ea typeface="Calibri" charset="0"/>
+                        <a:cs typeface="Calibri" charset="0"/>
+                      </a:endParaRPr>
+                    </a:p>
+                  </a:txBody>
+                  <a:tcPr marL="101600" marR="101600" marT="50800" marB="50800">
+                    <a:lnL w="9525" cap="flat" cmpd="sng" algn="ctr">
+                      <a:solidFill>
+                        <a:srgbClr val="D9E1E5"/>
+                      </a:solidFill>
+                      <a:prstDash val="solid"/>
+                      <a:round/>
+                      <a:headEnd type="none" w="med" len="med"/>
+                      <a:tailEnd type="none" w="med" len="med"/>
+                    </a:lnL>
+                    <a:lnR w="9525" cap="flat" cmpd="sng" algn="ctr">
+                      <a:solidFill>
+                        <a:srgbClr val="D9E1E5"/>
+                      </a:solidFill>
+                      <a:prstDash val="solid"/>
+                      <a:round/>
+                      <a:headEnd type="none" w="med" len="med"/>
+                      <a:tailEnd type="none" w="med" len="med"/>
+                    </a:lnR>
+                    <a:lnT w="9525" cap="flat" cmpd="sng" algn="ctr">
+                      <a:solidFill>
+                        <a:srgbClr val="D9E1E5"/>
+                      </a:solidFill>
+                      <a:prstDash val="solid"/>
+                      <a:round/>
+                      <a:headEnd type="none" w="med" len="med"/>
+                      <a:tailEnd type="none" w="med" len="med"/>
+                    </a:lnT>
+                    <a:lnB w="9525" cap="flat" cmpd="sng" algn="ctr">
+                      <a:solidFill>
+                        <a:srgbClr val="D9E1E5"/>
+                      </a:solidFill>
+                      <a:prstDash val="solid"/>
+                      <a:round/>
+                      <a:headEnd type="none" w="med" len="med"/>
+                      <a:tailEnd type="none" w="med" len="med"/>
+                    </a:lnB>
+                    <a:solidFill>
+                      <a:srgbClr val="F3F6F7"/>
+                    </a:solidFill>
+                  </a:tcPr>
+                </a:tc>
+              </a:tr>
+              <a:tr h="438912">
+                <a:tc>
+                  <a:txBody>
+                    <a:bodyPr/>
+                    <a:lstStyle/>
+                    <a:p>
+                      <a:pPr indent="0" marL="0">
+                        <a:buNone/>
+                      </a:pPr>
+                      <a:r>
+                        <a:rPr lang="en-US" sz="1400" dirty="0">
+                          <a:solidFill>
+                            <a:srgbClr val="15232A"/>
+                          </a:solidFill>
+                          <a:latin typeface="Calibri" pitchFamily="34" charset="0"/>
+                          <a:ea typeface="Calibri" pitchFamily="34" charset="-122"/>
+                          <a:cs typeface="Calibri" pitchFamily="34" charset="-120"/>
+                        </a:rPr>
+                        <a:t>MAE 60 min (clean)</a:t>
+                      </a:r>
+                      <a:endParaRPr lang="en-US" sz="1400" dirty="0">
+                        <a:latin typeface="Calibri" charset="0"/>
+                        <a:ea typeface="Calibri" charset="0"/>
+                        <a:cs typeface="Calibri" charset="0"/>
+                      </a:endParaRPr>
+                    </a:p>
+                  </a:txBody>
+                  <a:tcPr marL="101600" marR="101600" marT="50800" marB="50800">
+                    <a:lnL w="9525" cap="flat" cmpd="sng" algn="ctr">
+                      <a:solidFill>
+                        <a:srgbClr val="D9E1E5"/>
+                      </a:solidFill>
+                      <a:prstDash val="solid"/>
+                      <a:round/>
+                      <a:headEnd type="none" w="med" len="med"/>
+                      <a:tailEnd type="none" w="med" len="med"/>
+                    </a:lnL>
+                    <a:lnR w="9525" cap="flat" cmpd="sng" algn="ctr">
+                      <a:solidFill>
+                        <a:srgbClr val="D9E1E5"/>
+                      </a:solidFill>
+                      <a:prstDash val="solid"/>
+                      <a:round/>
+                      <a:headEnd type="none" w="med" len="med"/>
+                      <a:tailEnd type="none" w="med" len="med"/>
+                    </a:lnR>
+                    <a:lnT w="9525" cap="flat" cmpd="sng" algn="ctr">
+                      <a:solidFill>
+                        <a:srgbClr val="D9E1E5"/>
+                      </a:solidFill>
+                      <a:prstDash val="solid"/>
+                      <a:round/>
+                      <a:headEnd type="none" w="med" len="med"/>
+                      <a:tailEnd type="none" w="med" len="med"/>
+                    </a:lnT>
+                    <a:lnB w="9525" cap="flat" cmpd="sng" algn="ctr">
+                      <a:solidFill>
+                        <a:srgbClr val="D9E1E5"/>
+                      </a:solidFill>
+                      <a:prstDash val="solid"/>
+                      <a:round/>
+                      <a:headEnd type="none" w="med" len="med"/>
+                      <a:tailEnd type="none" w="med" len="med"/>
+                    </a:lnB>
+                    <a:solidFill>
+                      <a:srgbClr val="FFFFFF"/>
+                    </a:solidFill>
+                  </a:tcPr>
+                </a:tc>
+                <a:tc>
+                  <a:txBody>
+                    <a:bodyPr/>
+                    <a:lstStyle/>
+                    <a:p>
+                      <a:pPr indent="0" marL="0">
+                        <a:buNone/>
+                      </a:pPr>
+                      <a:r>
+                        <a:rPr lang="en-US" sz="1400" dirty="0">
+                          <a:solidFill>
+                            <a:srgbClr val="15232A"/>
+                          </a:solidFill>
+                          <a:latin typeface="Calibri" pitchFamily="34" charset="0"/>
+                          <a:ea typeface="Calibri" pitchFamily="34" charset="-122"/>
+                          <a:cs typeface="Calibri" pitchFamily="34" charset="-120"/>
+                        </a:rPr>
+                        <a:t>14.76</a:t>
+                      </a:r>
+                      <a:endParaRPr lang="en-US" sz="1400" dirty="0">
+                        <a:latin typeface="Calibri" charset="0"/>
+                        <a:ea typeface="Calibri" charset="0"/>
+                        <a:cs typeface="Calibri" charset="0"/>
+                      </a:endParaRPr>
+                    </a:p>
+                  </a:txBody>
+                  <a:tcPr marL="101600" marR="101600" marT="50800" marB="50800">
+                    <a:lnL w="9525" cap="flat" cmpd="sng" algn="ctr">
+                      <a:solidFill>
+                        <a:srgbClr val="D9E1E5"/>
+                      </a:solidFill>
+                      <a:prstDash val="solid"/>
+                      <a:round/>
+                      <a:headEnd type="none" w="med" len="med"/>
+                      <a:tailEnd type="none" w="med" len="med"/>
+                    </a:lnL>
+                    <a:lnR w="9525" cap="flat" cmpd="sng" algn="ctr">
+                      <a:solidFill>
+                        <a:srgbClr val="D9E1E5"/>
+                      </a:solidFill>
+                      <a:prstDash val="solid"/>
+                      <a:round/>
+                      <a:headEnd type="none" w="med" len="med"/>
+                      <a:tailEnd type="none" w="med" len="med"/>
+                    </a:lnR>
+                    <a:lnT w="9525" cap="flat" cmpd="sng" algn="ctr">
+                      <a:solidFill>
+                        <a:srgbClr val="D9E1E5"/>
+                      </a:solidFill>
+                      <a:prstDash val="solid"/>
+                      <a:round/>
+                      <a:headEnd type="none" w="med" len="med"/>
+                      <a:tailEnd type="none" w="med" len="med"/>
+                    </a:lnT>
+                    <a:lnB w="9525" cap="flat" cmpd="sng" algn="ctr">
+                      <a:solidFill>
+                        <a:srgbClr val="D9E1E5"/>
+                      </a:solidFill>
+                      <a:prstDash val="solid"/>
+                      <a:round/>
+                      <a:headEnd type="none" w="med" len="med"/>
+                      <a:tailEnd type="none" w="med" len="med"/>
+                    </a:lnB>
+                    <a:solidFill>
+                      <a:srgbClr val="FFFFFF"/>
+                    </a:solidFill>
+                  </a:tcPr>
+                </a:tc>
+                <a:tc>
+                  <a:txBody>
+                    <a:bodyPr/>
+                    <a:lstStyle/>
+                    <a:p>
+                      <a:pPr indent="0" marL="0">
+                        <a:buNone/>
+                      </a:pPr>
+                      <a:r>
+                        <a:rPr lang="en-US" sz="1400" b="1" dirty="0">
+                          <a:solidFill>
+                            <a:srgbClr val="0D5F73"/>
+                          </a:solidFill>
+                          <a:latin typeface="Calibri" pitchFamily="34" charset="0"/>
+                          <a:ea typeface="Calibri" pitchFamily="34" charset="-122"/>
+                          <a:cs typeface="Calibri" pitchFamily="34" charset="-120"/>
+                        </a:rPr>
+                        <a:t>14.90</a:t>
+                      </a:r>
+                      <a:endParaRPr lang="en-US" sz="1400" dirty="0">
+                        <a:latin typeface="Calibri" charset="0"/>
+                        <a:ea typeface="Calibri" charset="0"/>
+                        <a:cs typeface="Calibri" charset="0"/>
+                      </a:endParaRPr>
+                    </a:p>
+                  </a:txBody>
+                  <a:tcPr marL="101600" marR="101600" marT="50800" marB="50800">
+                    <a:lnL w="9525" cap="flat" cmpd="sng" algn="ctr">
+                      <a:solidFill>
+                        <a:srgbClr val="D9E1E5"/>
+                      </a:solidFill>
+                      <a:prstDash val="solid"/>
+                      <a:round/>
+                      <a:headEnd type="none" w="med" len="med"/>
+                      <a:tailEnd type="none" w="med" len="med"/>
+                    </a:lnL>
+                    <a:lnR w="9525" cap="flat" cmpd="sng" algn="ctr">
+                      <a:solidFill>
+                        <a:srgbClr val="D9E1E5"/>
+                      </a:solidFill>
+                      <a:prstDash val="solid"/>
+                      <a:round/>
+                      <a:headEnd type="none" w="med" len="med"/>
+                      <a:tailEnd type="none" w="med" len="med"/>
+                    </a:lnR>
+                    <a:lnT w="9525" cap="flat" cmpd="sng" algn="ctr">
+                      <a:solidFill>
+                        <a:srgbClr val="D9E1E5"/>
+                      </a:solidFill>
+                      <a:prstDash val="solid"/>
+                      <a:round/>
+                      <a:headEnd type="none" w="med" len="med"/>
+                      <a:tailEnd type="none" w="med" len="med"/>
+                    </a:lnT>
+                    <a:lnB w="9525" cap="flat" cmpd="sng" algn="ctr">
+                      <a:solidFill>
+                        <a:srgbClr val="D9E1E5"/>
+                      </a:solidFill>
+                      <a:prstDash val="solid"/>
+                      <a:round/>
+                      <a:headEnd type="none" w="med" len="med"/>
+                      <a:tailEnd type="none" w="med" len="med"/>
+                    </a:lnB>
+                    <a:solidFill>
+                      <a:srgbClr val="FFFFFF"/>
+                    </a:solidFill>
+                  </a:tcPr>
+                </a:tc>
+              </a:tr>
+              <a:tr h="438912">
+                <a:tc>
+                  <a:txBody>
+                    <a:bodyPr/>
+                    <a:lstStyle/>
+                    <a:p>
+                      <a:pPr indent="0" marL="0">
+                        <a:buNone/>
+                      </a:pPr>
+                      <a:r>
+                        <a:rPr lang="en-US" sz="1400" dirty="0">
+                          <a:solidFill>
+                            <a:srgbClr val="15232A"/>
+                          </a:solidFill>
+                          <a:latin typeface="Calibri" pitchFamily="34" charset="0"/>
+                          <a:ea typeface="Calibri" pitchFamily="34" charset="-122"/>
+                          <a:cs typeface="Calibri" pitchFamily="34" charset="-120"/>
+                        </a:rPr>
+                        <a:t>MAE 30 min, SD-10 noise</a:t>
+                      </a:r>
+                      <a:endParaRPr lang="en-US" sz="1400" dirty="0">
+                        <a:latin typeface="Calibri" charset="0"/>
+                        <a:ea typeface="Calibri" charset="0"/>
+                        <a:cs typeface="Calibri" charset="0"/>
+                      </a:endParaRPr>
+                    </a:p>
+                  </a:txBody>
+                  <a:tcPr marL="101600" marR="101600" marT="50800" marB="50800">
+                    <a:lnL w="9525" cap="flat" cmpd="sng" algn="ctr">
+                      <a:solidFill>
+                        <a:srgbClr val="D9E1E5"/>
+                      </a:solidFill>
+                      <a:prstDash val="solid"/>
+                      <a:round/>
+                      <a:headEnd type="none" w="med" len="med"/>
+                      <a:tailEnd type="none" w="med" len="med"/>
+                    </a:lnL>
+                    <a:lnR w="9525" cap="flat" cmpd="sng" algn="ctr">
+                      <a:solidFill>
+                        <a:srgbClr val="D9E1E5"/>
+                      </a:solidFill>
+                      <a:prstDash val="solid"/>
+                      <a:round/>
+                      <a:headEnd type="none" w="med" len="med"/>
+                      <a:tailEnd type="none" w="med" len="med"/>
+                    </a:lnR>
+                    <a:lnT w="9525" cap="flat" cmpd="sng" algn="ctr">
+                      <a:solidFill>
+                        <a:srgbClr val="D9E1E5"/>
+                      </a:solidFill>
+                      <a:prstDash val="solid"/>
+                      <a:round/>
+                      <a:headEnd type="none" w="med" len="med"/>
+                      <a:tailEnd type="none" w="med" len="med"/>
+                    </a:lnT>
+                    <a:lnB w="9525" cap="flat" cmpd="sng" algn="ctr">
+                      <a:solidFill>
+                        <a:srgbClr val="D9E1E5"/>
+                      </a:solidFill>
+                      <a:prstDash val="solid"/>
+                      <a:round/>
+                      <a:headEnd type="none" w="med" len="med"/>
+                      <a:tailEnd type="none" w="med" len="med"/>
+                    </a:lnB>
+                    <a:solidFill>
+                      <a:srgbClr val="FFFFFF"/>
+                    </a:solidFill>
+                  </a:tcPr>
+                </a:tc>
+                <a:tc>
+                  <a:txBody>
+                    <a:bodyPr/>
+                    <a:lstStyle/>
+                    <a:p>
+                      <a:pPr indent="0" marL="0">
+                        <a:buNone/>
+                      </a:pPr>
+                      <a:r>
+                        <a:rPr lang="en-US" sz="1400" dirty="0">
+                          <a:solidFill>
+                            <a:srgbClr val="15232A"/>
+                          </a:solidFill>
+                          <a:latin typeface="Calibri" pitchFamily="34" charset="0"/>
+                          <a:ea typeface="Calibri" pitchFamily="34" charset="-122"/>
+                          <a:cs typeface="Calibri" pitchFamily="34" charset="-120"/>
+                        </a:rPr>
+                        <a:t>19.6</a:t>
+                      </a:r>
+                      <a:endParaRPr lang="en-US" sz="1400" dirty="0">
+                        <a:latin typeface="Calibri" charset="0"/>
+                        <a:ea typeface="Calibri" charset="0"/>
+                        <a:cs typeface="Calibri" charset="0"/>
+                      </a:endParaRPr>
+                    </a:p>
+                  </a:txBody>
+                  <a:tcPr marL="101600" marR="101600" marT="50800" marB="50800">
+                    <a:lnL w="9525" cap="flat" cmpd="sng" algn="ctr">
+                      <a:solidFill>
+                        <a:srgbClr val="D9E1E5"/>
+                      </a:solidFill>
+                      <a:prstDash val="solid"/>
+                      <a:round/>
+                      <a:headEnd type="none" w="med" len="med"/>
+                      <a:tailEnd type="none" w="med" len="med"/>
+                    </a:lnL>
+                    <a:lnR w="9525" cap="flat" cmpd="sng" algn="ctr">
+                      <a:solidFill>
+                        <a:srgbClr val="D9E1E5"/>
+                      </a:solidFill>
+                      <a:prstDash val="solid"/>
+                      <a:round/>
+                      <a:headEnd type="none" w="med" len="med"/>
+                      <a:tailEnd type="none" w="med" len="med"/>
+                    </a:lnR>
+                    <a:lnT w="9525" cap="flat" cmpd="sng" algn="ctr">
+                      <a:solidFill>
+                        <a:srgbClr val="D9E1E5"/>
+                      </a:solidFill>
+                      <a:prstDash val="solid"/>
+                      <a:round/>
+                      <a:headEnd type="none" w="med" len="med"/>
+                      <a:tailEnd type="none" w="med" len="med"/>
+                    </a:lnT>
+                    <a:lnB w="9525" cap="flat" cmpd="sng" algn="ctr">
+                      <a:solidFill>
+                        <a:srgbClr val="D9E1E5"/>
+                      </a:solidFill>
+                      <a:prstDash val="solid"/>
+                      <a:round/>
+                      <a:headEnd type="none" w="med" len="med"/>
+                      <a:tailEnd type="none" w="med" len="med"/>
+                    </a:lnB>
+                    <a:solidFill>
+                      <a:srgbClr val="FFFFFF"/>
+                    </a:solidFill>
+                  </a:tcPr>
+                </a:tc>
+                <a:tc>
+                  <a:txBody>
+                    <a:bodyPr/>
+                    <a:lstStyle/>
+                    <a:p>
+                      <a:pPr indent="0" marL="0">
+                        <a:buNone/>
+                      </a:pPr>
+                      <a:r>
+                        <a:rPr lang="en-US" sz="1400" b="1" dirty="0">
+                          <a:solidFill>
+                            <a:srgbClr val="0D5F73"/>
+                          </a:solidFill>
+                          <a:latin typeface="Calibri" pitchFamily="34" charset="0"/>
+                          <a:ea typeface="Calibri" pitchFamily="34" charset="-122"/>
+                          <a:cs typeface="Calibri" pitchFamily="34" charset="-120"/>
+                        </a:rPr>
+                        <a:t>13.5</a:t>
+                      </a:r>
+                      <a:endParaRPr lang="en-US" sz="1400" dirty="0">
+                        <a:latin typeface="Calibri" charset="0"/>
+                        <a:ea typeface="Calibri" charset="0"/>
+                        <a:cs typeface="Calibri" charset="0"/>
+                      </a:endParaRPr>
+                    </a:p>
+                  </a:txBody>
+                  <a:tcPr marL="101600" marR="101600" marT="50800" marB="50800">
+                    <a:lnL w="9525" cap="flat" cmpd="sng" algn="ctr">
+                      <a:solidFill>
+                        <a:srgbClr val="D9E1E5"/>
+                      </a:solidFill>
+                      <a:prstDash val="solid"/>
+                      <a:round/>
+                      <a:headEnd type="none" w="med" len="med"/>
+                      <a:tailEnd type="none" w="med" len="med"/>
+                    </a:lnL>
+                    <a:lnR w="9525" cap="flat" cmpd="sng" algn="ctr">
+                      <a:solidFill>
+                        <a:srgbClr val="D9E1E5"/>
+                      </a:solidFill>
+                      <a:prstDash val="solid"/>
+                      <a:round/>
+                      <a:headEnd type="none" w="med" len="med"/>
+                      <a:tailEnd type="none" w="med" len="med"/>
+                    </a:lnR>
+                    <a:lnT w="9525" cap="flat" cmpd="sng" algn="ctr">
+                      <a:solidFill>
+                        <a:srgbClr val="D9E1E5"/>
+                      </a:solidFill>
+                      <a:prstDash val="solid"/>
+                      <a:round/>
+                      <a:headEnd type="none" w="med" len="med"/>
+                      <a:tailEnd type="none" w="med" len="med"/>
+                    </a:lnT>
+                    <a:lnB w="9525" cap="flat" cmpd="sng" algn="ctr">
+                      <a:solidFill>
+                        <a:srgbClr val="D9E1E5"/>
+                      </a:solidFill>
+                      <a:prstDash val="solid"/>
+                      <a:round/>
+                      <a:headEnd type="none" w="med" len="med"/>
+                      <a:tailEnd type="none" w="med" len="med"/>
+                    </a:lnB>
+                    <a:solidFill>
+                      <a:srgbClr val="FFFFFF"/>
+                    </a:solidFill>
+                  </a:tcPr>
+                </a:tc>
+              </a:tr>
+              <a:tr h="438912">
+                <a:tc>
+                  <a:txBody>
+                    <a:bodyPr/>
+                    <a:lstStyle/>
+                    <a:p>
+                      <a:pPr indent="0" marL="0">
+                        <a:buNone/>
+                      </a:pPr>
+                      <a:r>
+                        <a:rPr lang="en-US" sz="1400" dirty="0">
+                          <a:solidFill>
+                            <a:srgbClr val="15232A"/>
+                          </a:solidFill>
+                          <a:latin typeface="Calibri" pitchFamily="34" charset="0"/>
+                          <a:ea typeface="Calibri" pitchFamily="34" charset="-122"/>
+                          <a:cs typeface="Calibri" pitchFamily="34" charset="-120"/>
+                        </a:rPr>
+                        <a:t>Last value, SD-10 noise</a:t>
+                      </a:r>
+                      <a:endParaRPr lang="en-US" sz="1400" dirty="0">
+                        <a:latin typeface="Calibri" charset="0"/>
+                        <a:ea typeface="Calibri" charset="0"/>
+                        <a:cs typeface="Calibri" charset="0"/>
+                      </a:endParaRPr>
+                    </a:p>
+                  </a:txBody>
+                  <a:tcPr marL="101600" marR="101600" marT="50800" marB="50800">
+                    <a:lnL w="9525" cap="flat" cmpd="sng" algn="ctr">
+                      <a:solidFill>
+                        <a:srgbClr val="D9E1E5"/>
+                      </a:solidFill>
+                      <a:prstDash val="solid"/>
+                      <a:round/>
+                      <a:headEnd type="none" w="med" len="med"/>
+                      <a:tailEnd type="none" w="med" len="med"/>
+                    </a:lnL>
+                    <a:lnR w="9525" cap="flat" cmpd="sng" algn="ctr">
+                      <a:solidFill>
+                        <a:srgbClr val="D9E1E5"/>
+                      </a:solidFill>
+                      <a:prstDash val="solid"/>
+                      <a:round/>
+                      <a:headEnd type="none" w="med" len="med"/>
+                      <a:tailEnd type="none" w="med" len="med"/>
+                    </a:lnR>
+                    <a:lnT w="9525" cap="flat" cmpd="sng" algn="ctr">
+                      <a:solidFill>
+                        <a:srgbClr val="D9E1E5"/>
+                      </a:solidFill>
+                      <a:prstDash val="solid"/>
+                      <a:round/>
+                      <a:headEnd type="none" w="med" len="med"/>
+                      <a:tailEnd type="none" w="med" len="med"/>
+                    </a:lnT>
+                    <a:lnB w="9525" cap="flat" cmpd="sng" algn="ctr">
+                      <a:solidFill>
+                        <a:srgbClr val="D9E1E5"/>
+                      </a:solidFill>
+                      <a:prstDash val="solid"/>
+                      <a:round/>
+                      <a:headEnd type="none" w="med" len="med"/>
+                      <a:tailEnd type="none" w="med" len="med"/>
+                    </a:lnB>
+                    <a:solidFill>
+                      <a:srgbClr val="FFFFFF"/>
+                    </a:solidFill>
+                  </a:tcPr>
+                </a:tc>
+                <a:tc>
+                  <a:txBody>
+                    <a:bodyPr/>
+                    <a:lstStyle/>
+                    <a:p>
+                      <a:pPr indent="0" marL="0">
+                        <a:buNone/>
+                      </a:pPr>
+                      <a:r>
+                        <a:rPr lang="en-US" sz="1400" dirty="0">
+                          <a:solidFill>
+                            <a:srgbClr val="15232A"/>
+                          </a:solidFill>
+                          <a:latin typeface="Calibri" pitchFamily="34" charset="0"/>
+                          <a:ea typeface="Calibri" pitchFamily="34" charset="-122"/>
+                          <a:cs typeface="Calibri" pitchFamily="34" charset="-120"/>
+                        </a:rPr>
+                        <a:t>15.1</a:t>
+                      </a:r>
+                      <a:endParaRPr lang="en-US" sz="1400" dirty="0">
+                        <a:latin typeface="Calibri" charset="0"/>
+                        <a:ea typeface="Calibri" charset="0"/>
+                        <a:cs typeface="Calibri" charset="0"/>
+                      </a:endParaRPr>
+                    </a:p>
+                  </a:txBody>
+                  <a:tcPr marL="101600" marR="101600" marT="50800" marB="50800">
+                    <a:lnL w="9525" cap="flat" cmpd="sng" algn="ctr">
+                      <a:solidFill>
+                        <a:srgbClr val="D9E1E5"/>
+                      </a:solidFill>
+                      <a:prstDash val="solid"/>
+                      <a:round/>
+                      <a:headEnd type="none" w="med" len="med"/>
+                      <a:tailEnd type="none" w="med" len="med"/>
+                    </a:lnL>
+                    <a:lnR w="9525" cap="flat" cmpd="sng" algn="ctr">
+                      <a:solidFill>
+                        <a:srgbClr val="D9E1E5"/>
+                      </a:solidFill>
+                      <a:prstDash val="solid"/>
+                      <a:round/>
+                      <a:headEnd type="none" w="med" len="med"/>
+                      <a:tailEnd type="none" w="med" len="med"/>
+                    </a:lnR>
+                    <a:lnT w="9525" cap="flat" cmpd="sng" algn="ctr">
+                      <a:solidFill>
+                        <a:srgbClr val="D9E1E5"/>
+                      </a:solidFill>
+                      <a:prstDash val="solid"/>
+                      <a:round/>
+                      <a:headEnd type="none" w="med" len="med"/>
+                      <a:tailEnd type="none" w="med" len="med"/>
+                    </a:lnT>
+                    <a:lnB w="9525" cap="flat" cmpd="sng" algn="ctr">
+                      <a:solidFill>
+                        <a:srgbClr val="D9E1E5"/>
+                      </a:solidFill>
+                      <a:prstDash val="solid"/>
+                      <a:round/>
+                      <a:headEnd type="none" w="med" len="med"/>
+                      <a:tailEnd type="none" w="med" len="med"/>
+                    </a:lnB>
+                    <a:solidFill>
+                      <a:srgbClr val="FFFFFF"/>
+                    </a:solidFill>
+                  </a:tcPr>
+                </a:tc>
+                <a:tc>
+                  <a:txBody>
+                    <a:bodyPr/>
+                    <a:lstStyle/>
+                    <a:p>
+                      <a:pPr indent="0" marL="0">
+                        <a:buNone/>
+                      </a:pPr>
+                      <a:r>
+                        <a:rPr lang="en-US" sz="1400" b="1" dirty="0">
+                          <a:solidFill>
+                            <a:srgbClr val="0D5F73"/>
+                          </a:solidFill>
+                          <a:latin typeface="Calibri" pitchFamily="34" charset="0"/>
+                          <a:ea typeface="Calibri" pitchFamily="34" charset="-122"/>
+                          <a:cs typeface="Calibri" pitchFamily="34" charset="-120"/>
+                        </a:rPr>
+                        <a:t>15.1</a:t>
+                      </a:r>
+                      <a:endParaRPr lang="en-US" sz="1400" dirty="0">
+                        <a:latin typeface="Calibri" charset="0"/>
+                        <a:ea typeface="Calibri" charset="0"/>
+                        <a:cs typeface="Calibri" charset="0"/>
+                      </a:endParaRPr>
+                    </a:p>
+                  </a:txBody>
+                  <a:tcPr marL="101600" marR="101600" marT="50800" marB="50800">
+                    <a:lnL w="9525" cap="flat" cmpd="sng" algn="ctr">
+                      <a:solidFill>
+                        <a:srgbClr val="D9E1E5"/>
+                      </a:solidFill>
+                      <a:prstDash val="solid"/>
+                      <a:round/>
+                      <a:headEnd type="none" w="med" len="med"/>
+                      <a:tailEnd type="none" w="med" len="med"/>
+                    </a:lnL>
+                    <a:lnR w="9525" cap="flat" cmpd="sng" algn="ctr">
+                      <a:solidFill>
+                        <a:srgbClr val="D9E1E5"/>
+                      </a:solidFill>
+                      <a:prstDash val="solid"/>
+                      <a:round/>
+                      <a:headEnd type="none" w="med" len="med"/>
+                      <a:tailEnd type="none" w="med" len="med"/>
+                    </a:lnR>
+                    <a:lnT w="9525" cap="flat" cmpd="sng" algn="ctr">
+                      <a:solidFill>
+                        <a:srgbClr val="D9E1E5"/>
+                      </a:solidFill>
+                      <a:prstDash val="solid"/>
+                      <a:round/>
+                      <a:headEnd type="none" w="med" len="med"/>
+                      <a:tailEnd type="none" w="med" len="med"/>
+                    </a:lnT>
+                    <a:lnB w="9525" cap="flat" cmpd="sng" algn="ctr">
+                      <a:solidFill>
+                        <a:srgbClr val="D9E1E5"/>
+                      </a:solidFill>
+                      <a:prstDash val="solid"/>
+                      <a:round/>
+                      <a:headEnd type="none" w="med" len="med"/>
+                      <a:tailEnd type="none" w="med" len="med"/>
+                    </a:lnB>
+                    <a:solidFill>
+                      <a:srgbClr val="FFFFFF"/>
+                    </a:solidFill>
+                  </a:tcPr>
+                </a:tc>
+              </a:tr>
+              <a:tr h="438912">
+                <a:tc>
+                  <a:txBody>
+                    <a:bodyPr/>
+                    <a:lstStyle/>
+                    <a:p>
+                      <a:pPr indent="0" marL="0">
+                        <a:buNone/>
+                      </a:pPr>
+                      <a:r>
+                        <a:rPr lang="en-US" sz="1400" dirty="0">
+                          <a:solidFill>
+                            <a:srgbClr val="15232A"/>
+                          </a:solidFill>
+                          <a:latin typeface="Calibri" pitchFamily="34" charset="0"/>
+                          <a:ea typeface="Calibri" pitchFamily="34" charset="-122"/>
+                          <a:cs typeface="Calibri" pitchFamily="34" charset="-120"/>
+                        </a:rPr>
+                        <a:t>Alerts per patient-day</a:t>
+                      </a:r>
+                      <a:endParaRPr lang="en-US" sz="1400" dirty="0">
+                        <a:latin typeface="Calibri" charset="0"/>
+                        <a:ea typeface="Calibri" charset="0"/>
+                        <a:cs typeface="Calibri" charset="0"/>
+                      </a:endParaRPr>
+                    </a:p>
+                  </a:txBody>
+                  <a:tcPr marL="101600" marR="101600" marT="50800" marB="50800">
+                    <a:lnL w="9525" cap="flat" cmpd="sng" algn="ctr">
+                      <a:solidFill>
+                        <a:srgbClr val="D9E1E5"/>
+                      </a:solidFill>
+                      <a:prstDash val="solid"/>
+                      <a:round/>
+                      <a:headEnd type="none" w="med" len="med"/>
+                      <a:tailEnd type="none" w="med" len="med"/>
+                    </a:lnL>
+                    <a:lnR w="9525" cap="flat" cmpd="sng" algn="ctr">
+                      <a:solidFill>
+                        <a:srgbClr val="D9E1E5"/>
+                      </a:solidFill>
+                      <a:prstDash val="solid"/>
+                      <a:round/>
+                      <a:headEnd type="none" w="med" len="med"/>
+                      <a:tailEnd type="none" w="med" len="med"/>
+                    </a:lnR>
+                    <a:lnT w="9525" cap="flat" cmpd="sng" algn="ctr">
+                      <a:solidFill>
+                        <a:srgbClr val="D9E1E5"/>
+                      </a:solidFill>
+                      <a:prstDash val="solid"/>
+                      <a:round/>
+                      <a:headEnd type="none" w="med" len="med"/>
+                      <a:tailEnd type="none" w="med" len="med"/>
+                    </a:lnT>
+                    <a:lnB w="9525" cap="flat" cmpd="sng" algn="ctr">
+                      <a:solidFill>
+                        <a:srgbClr val="D9E1E5"/>
+                      </a:solidFill>
+                      <a:prstDash val="solid"/>
+                      <a:round/>
+                      <a:headEnd type="none" w="med" len="med"/>
+                      <a:tailEnd type="none" w="med" len="med"/>
+                    </a:lnB>
+                    <a:solidFill>
+                      <a:srgbClr val="FFFFFF"/>
+                    </a:solidFill>
+                  </a:tcPr>
+                </a:tc>
+                <a:tc>
+                  <a:txBody>
+                    <a:bodyPr/>
+                    <a:lstStyle/>
+                    <a:p>
+                      <a:pPr indent="0" marL="0">
+                        <a:buNone/>
+                      </a:pPr>
+                      <a:r>
+                        <a:rPr lang="en-US" sz="1400" dirty="0">
+                          <a:solidFill>
+                            <a:srgbClr val="15232A"/>
+                          </a:solidFill>
+                          <a:latin typeface="Calibri" pitchFamily="34" charset="0"/>
+                          <a:ea typeface="Calibri" pitchFamily="34" charset="-122"/>
+                          <a:cs typeface="Calibri" pitchFamily="34" charset="-120"/>
+                        </a:rPr>
+                        <a:t>7.9</a:t>
+                      </a:r>
+                      <a:endParaRPr lang="en-US" sz="1400" dirty="0">
+                        <a:latin typeface="Calibri" charset="0"/>
+                        <a:ea typeface="Calibri" charset="0"/>
+                        <a:cs typeface="Calibri" charset="0"/>
+                      </a:endParaRPr>
+                    </a:p>
+                  </a:txBody>
+                  <a:tcPr marL="101600" marR="101600" marT="50800" marB="50800">
+                    <a:lnL w="9525" cap="flat" cmpd="sng" algn="ctr">
+                      <a:solidFill>
+                        <a:srgbClr val="D9E1E5"/>
+                      </a:solidFill>
+                      <a:prstDash val="solid"/>
+                      <a:round/>
+                      <a:headEnd type="none" w="med" len="med"/>
+                      <a:tailEnd type="none" w="med" len="med"/>
+                    </a:lnL>
+                    <a:lnR w="9525" cap="flat" cmpd="sng" algn="ctr">
+                      <a:solidFill>
+                        <a:srgbClr val="D9E1E5"/>
+                      </a:solidFill>
+                      <a:prstDash val="solid"/>
+                      <a:round/>
+                      <a:headEnd type="none" w="med" len="med"/>
+                      <a:tailEnd type="none" w="med" len="med"/>
+                    </a:lnR>
+                    <a:lnT w="9525" cap="flat" cmpd="sng" algn="ctr">
+                      <a:solidFill>
+                        <a:srgbClr val="D9E1E5"/>
+                      </a:solidFill>
+                      <a:prstDash val="solid"/>
+                      <a:round/>
+                      <a:headEnd type="none" w="med" len="med"/>
+                      <a:tailEnd type="none" w="med" len="med"/>
+                    </a:lnT>
+                    <a:lnB w="9525" cap="flat" cmpd="sng" algn="ctr">
+                      <a:solidFill>
+                        <a:srgbClr val="D9E1E5"/>
+                      </a:solidFill>
+                      <a:prstDash val="solid"/>
+                      <a:round/>
+                      <a:headEnd type="none" w="med" len="med"/>
+                      <a:tailEnd type="none" w="med" len="med"/>
+                    </a:lnB>
+                    <a:solidFill>
+                      <a:srgbClr val="FFFFFF"/>
+                    </a:solidFill>
+                  </a:tcPr>
+                </a:tc>
+                <a:tc>
+                  <a:txBody>
+                    <a:bodyPr/>
+                    <a:lstStyle/>
+                    <a:p>
+                      <a:pPr indent="0" marL="0">
+                        <a:buNone/>
+                      </a:pPr>
+                      <a:r>
+                        <a:rPr lang="en-US" sz="1400" b="1" dirty="0">
+                          <a:solidFill>
+                            <a:srgbClr val="0D5F73"/>
+                          </a:solidFill>
+                          <a:latin typeface="Calibri" pitchFamily="34" charset="0"/>
+                          <a:ea typeface="Calibri" pitchFamily="34" charset="-122"/>
+                          <a:cs typeface="Calibri" pitchFamily="34" charset="-120"/>
+                        </a:rPr>
+                        <a:t>1.89</a:t>
+                      </a:r>
+                      <a:endParaRPr lang="en-US" sz="1400" dirty="0">
+                        <a:latin typeface="Calibri" charset="0"/>
+                        <a:ea typeface="Calibri" charset="0"/>
+                        <a:cs typeface="Calibri" charset="0"/>
+                      </a:endParaRPr>
+                    </a:p>
+                  </a:txBody>
+                  <a:tcPr marL="101600" marR="101600" marT="50800" marB="50800">
+                    <a:lnL w="9525" cap="flat" cmpd="sng" algn="ctr">
+                      <a:solidFill>
+                        <a:srgbClr val="D9E1E5"/>
+                      </a:solidFill>
+                      <a:prstDash val="solid"/>
+                      <a:round/>
+                      <a:headEnd type="none" w="med" len="med"/>
+                      <a:tailEnd type="none" w="med" len="med"/>
+                    </a:lnL>
+                    <a:lnR w="9525" cap="flat" cmpd="sng" algn="ctr">
+                      <a:solidFill>
+                        <a:srgbClr val="D9E1E5"/>
+                      </a:solidFill>
+                      <a:prstDash val="solid"/>
+                      <a:round/>
+                      <a:headEnd type="none" w="med" len="med"/>
+                      <a:tailEnd type="none" w="med" len="med"/>
+                    </a:lnR>
+                    <a:lnT w="9525" cap="flat" cmpd="sng" algn="ctr">
+                      <a:solidFill>
+                        <a:srgbClr val="D9E1E5"/>
+                      </a:solidFill>
+                      <a:prstDash val="solid"/>
+                      <a:round/>
+                      <a:headEnd type="none" w="med" len="med"/>
+                      <a:tailEnd type="none" w="med" len="med"/>
+                    </a:lnT>
+                    <a:lnB w="9525" cap="flat" cmpd="sng" algn="ctr">
+                      <a:solidFill>
+                        <a:srgbClr val="D9E1E5"/>
+                      </a:solidFill>
+                      <a:prstDash val="solid"/>
+                      <a:round/>
+                      <a:headEnd type="none" w="med" len="med"/>
+                      <a:tailEnd type="none" w="med" len="med"/>
+                    </a:lnB>
+                    <a:solidFill>
+                      <a:srgbClr val="FFFFFF"/>
+                    </a:solidFill>
+                  </a:tcPr>
+                </a:tc>
+              </a:tr>
+            </a:tbl>
+          </a:graphicData>
+        </a:graphic>
+      </p:graphicFrame>
+      <p:sp>
+        <p:nvSpPr>
+          <p:cNvPr id="5" name="Text 1"/>
           <p:cNvSpPr txBox="1"/>
           <p:nvPr/>
         </p:nvSpPr>
         <p:spPr>
           <a:xfrm>
-            <a:off x="7653528" y="1490472"/>
-            <a:ext cx="3758184" cy="365760"/>
+            <a:off x="6858000" y="3931920"/>
+            <a:ext cx="4754880" cy="2011680"/>
           </a:xfrm>
           <a:prstGeom prst="rect">
             <a:avLst/>
@@ -9572,161 +9368,17 @@
               <a:buNone/>
             </a:pPr>
             <a:r>
-              <a:rPr lang="en-US" sz="1500" b="1" dirty="0">
-                <a:solidFill>
-                  <a:srgbClr val="0D5F73"/>
+              <a:rPr lang="en-US" sz="1400" dirty="0">
+                <a:solidFill>
+                  <a:srgbClr val="15232A"/>
                 </a:solidFill>
                 <a:latin typeface="Calibri" pitchFamily="34" charset="0"/>
                 <a:ea typeface="Calibri" pitchFamily="34" charset="-122"/>
                 <a:cs typeface="Calibri" pitchFamily="34" charset="-120"/>
               </a:rPr>
-              <a:t>Different country, sensor and setting</a:t>
-            </a:r>
-            <a:endParaRPr lang="en-US" sz="1500" dirty="0"/>
-          </a:p>
-        </p:txBody>
-      </p:sp>
-      <p:sp>
-        <p:nvSpPr>
-          <p:cNvPr id="6" name="Text 3"/>
-          <p:cNvSpPr txBox="1"/>
-          <p:nvPr/>
-        </p:nvSpPr>
-        <p:spPr>
-          <a:xfrm>
-            <a:off x="7653528" y="1892808"/>
-            <a:ext cx="3758184" cy="1600200"/>
-          </a:xfrm>
-          <a:prstGeom prst="rect">
-            <a:avLst/>
-          </a:prstGeom>
-          <a:noFill/>
-          <a:ln/>
-        </p:spPr>
-        <p:txBody>
-          <a:bodyPr wrap="square" lIns="0" tIns="0" rIns="0" bIns="0" rtlCol="0" anchor="t"/>
-          <a:lstStyle/>
-          <a:p>
-            <a:pPr indent="0" marL="0">
-              <a:buNone/>
-            </a:pPr>
-            <a:r>
-              <a:rPr lang="en-US" sz="1300" dirty="0">
-                <a:solidFill>
-                  <a:srgbClr val="15232A"/>
-                </a:solidFill>
-                <a:latin typeface="Calibri" pitchFamily="34" charset="0"/>
-                <a:ea typeface="Calibri" pitchFamily="34" charset="-122"/>
-                <a:cs typeface="Calibri" pitchFamily="34" charset="-120"/>
-              </a:rPr>
-              <a:t>Free-living US adults, Libre Pro, no refitting. Interval coverage stays at 78% in T2D. Rise-above-180 alerts in T2D: 96.7% sensitivity, 53% PPV, 1.38 false alerts per day.</a:t>
-            </a:r>
-            <a:endParaRPr lang="en-US" sz="1300" dirty="0"/>
-          </a:p>
-        </p:txBody>
-      </p:sp>
-      <p:sp>
-        <p:nvSpPr>
-          <p:cNvPr id="7" name="Shape 4"/>
-          <p:cNvSpPr/>
-          <p:nvPr/>
-        </p:nvSpPr>
-        <p:spPr>
-          <a:xfrm>
-            <a:off x="7452360" y="3794760"/>
-            <a:ext cx="4160520" cy="2377440"/>
-          </a:xfrm>
-          <a:prstGeom prst="roundRect">
-            <a:avLst>
-              <a:gd name="adj" fmla="val 3077"/>
-            </a:avLst>
-          </a:prstGeom>
-          <a:solidFill>
-            <a:srgbClr val="F3F6F7"/>
-          </a:solidFill>
-          <a:ln w="12700">
-            <a:solidFill>
-              <a:srgbClr val="F3F6F7"/>
-            </a:solidFill>
-            <a:prstDash val="solid"/>
-          </a:ln>
-        </p:spPr>
-      </p:sp>
-      <p:sp>
-        <p:nvSpPr>
-          <p:cNvPr id="8" name="Text 5"/>
-          <p:cNvSpPr txBox="1"/>
-          <p:nvPr/>
-        </p:nvSpPr>
-        <p:spPr>
-          <a:xfrm>
-            <a:off x="7653528" y="3959352"/>
-            <a:ext cx="3758184" cy="365760"/>
-          </a:xfrm>
-          <a:prstGeom prst="rect">
-            <a:avLst/>
-          </a:prstGeom>
-          <a:noFill/>
-          <a:ln/>
-        </p:spPr>
-        <p:txBody>
-          <a:bodyPr wrap="square" lIns="0" tIns="0" rIns="0" bIns="0" rtlCol="0" anchor="t"/>
-          <a:lstStyle/>
-          <a:p>
-            <a:pPr indent="0" marL="0">
-              <a:buNone/>
-            </a:pPr>
-            <a:r>
-              <a:rPr lang="en-US" sz="1500" b="1" dirty="0">
-                <a:solidFill>
-                  <a:srgbClr val="0D5F73"/>
-                </a:solidFill>
-                <a:latin typeface="Calibri" pitchFamily="34" charset="0"/>
-                <a:ea typeface="Calibri" pitchFamily="34" charset="-122"/>
-                <a:cs typeface="Calibri" pitchFamily="34" charset="-120"/>
-              </a:rPr>
-              <a:t>Where it does not help</a:t>
-            </a:r>
-            <a:endParaRPr lang="en-US" sz="1500" dirty="0"/>
-          </a:p>
-        </p:txBody>
-      </p:sp>
-      <p:sp>
-        <p:nvSpPr>
-          <p:cNvPr id="9" name="Text 6"/>
-          <p:cNvSpPr txBox="1"/>
-          <p:nvPr/>
-        </p:nvSpPr>
-        <p:spPr>
-          <a:xfrm>
-            <a:off x="7653528" y="4361688"/>
-            <a:ext cx="3758184" cy="1691640"/>
-          </a:xfrm>
-          <a:prstGeom prst="rect">
-            <a:avLst/>
-          </a:prstGeom>
-          <a:noFill/>
-          <a:ln/>
-        </p:spPr>
-        <p:txBody>
-          <a:bodyPr wrap="square" lIns="0" tIns="0" rIns="0" bIns="0" rtlCol="0" anchor="t"/>
-          <a:lstStyle/>
-          <a:p>
-            <a:pPr indent="0" marL="0">
-              <a:buNone/>
-            </a:pPr>
-            <a:r>
-              <a:rPr lang="en-US" sz="1300" dirty="0">
-                <a:solidFill>
-                  <a:srgbClr val="15232A"/>
-                </a:solidFill>
-                <a:latin typeface="Calibri" pitchFamily="34" charset="0"/>
-                <a:ea typeface="Calibri" pitchFamily="34" charset="-122"/>
-                <a:cs typeface="Calibri" pitchFamily="34" charset="-120"/>
-              </a:rPr>
-              <a:t>In healthy participants the gain over last value is close to zero: expected for a model trained on T2D. Medications and most labs are missing in CGMacros and were passed as missing, never as zero.</a:t>
-            </a:r>
-            <a:endParaRPr lang="en-US" sz="1300" dirty="0"/>
+              <a:t>How we did it without cheating: both changes were chosen on development patients with a rule written before the experiment. The test set was re-scored once, the reason is logged, and v1 results are kept unchanged.</a:t>
+            </a:r>
+            <a:endParaRPr lang="en-US" sz="1400" dirty="0"/>
           </a:p>
         </p:txBody>
       </p:sp>
@@ -9838,36 +9490,28 @@
                 <a:ea typeface="Cambria" pitchFamily="34" charset="-122"/>
                 <a:cs typeface="Cambria" pitchFamily="34" charset="-120"/>
               </a:rPr>
-              <a:t>The product: what a care team sees</a:t>
+              <a:t>It transfers: external validation on a US cohort</a:t>
             </a:r>
             <a:endParaRPr lang="en-US" sz="3000" dirty="0"/>
           </a:p>
         </p:txBody>
       </p:sp>
-      <p:pic>
-        <p:nvPicPr>
-          <p:cNvPr id="3" name="Image 0" descr="C:\Codeing\Github\Aflatoon_Scaler-School-of-Technology\docs\screenshots\worklist.png">    </p:cNvPr>
-          <p:cNvPicPr>
-            <a:picLocks noChangeAspect="1"/>
-          </p:cNvPicPr>
-          <p:nvPr/>
-        </p:nvPicPr>
-        <p:blipFill>
-          <a:blip r:embed="rId1"/>
-          <a:stretch>
-            <a:fillRect/>
-          </a:stretch>
-        </p:blipFill>
-        <p:spPr>
-          <a:xfrm>
-            <a:off x="548640" y="1280160"/>
-            <a:ext cx="5440680" cy="3401568"/>
-          </a:xfrm>
-          <a:prstGeom prst="rect">
-            <a:avLst/>
-          </a:prstGeom>
-        </p:spPr>
-      </p:pic>
+      <p:graphicFrame>
+        <p:nvGraphicFramePr>
+          <p:cNvPr id="3" name="Chart 0" descr=""/>
+          <p:cNvGraphicFramePr/>
+          <p:nvPr/>
+        </p:nvGraphicFramePr>
+        <p:xfrm>
+          <a:off x="548640" y="1234440"/>
+          <a:ext cx="6583680" cy="4937760"/>
+        </p:xfrm>
+        <a:graphic xmlns:a="http://schemas.openxmlformats.org/drawingml/2006/main">
+          <a:graphicData uri="http://schemas.openxmlformats.org/drawingml/2006/chart">
+            <c:chart xmlns:c="http://schemas.openxmlformats.org/drawingml/2006/chart" r:id="rId1"/>
+          </a:graphicData>
+        </a:graphic>
+      </p:graphicFrame>
       <p:sp>
         <p:nvSpPr>
           <p:cNvPr id="4" name="Shape 1"/>
@@ -9876,15 +9520,20 @@
         </p:nvSpPr>
         <p:spPr>
           <a:xfrm>
-            <a:off x="548640" y="1280160"/>
-            <a:ext cx="5440680" cy="3401568"/>
-          </a:xfrm>
-          <a:prstGeom prst="rect">
-            <a:avLst/>
-          </a:prstGeom>
-          <a:ln w="9525">
+            <a:off x="7452360" y="1325880"/>
+            <a:ext cx="4160520" cy="2286000"/>
+          </a:xfrm>
+          <a:prstGeom prst="roundRect">
+            <a:avLst>
+              <a:gd name="adj" fmla="val 3200"/>
+            </a:avLst>
+          </a:prstGeom>
+          <a:solidFill>
+            <a:srgbClr val="E1EFF2"/>
+          </a:solidFill>
+          <a:ln w="12700">
             <a:solidFill>
-              <a:srgbClr val="D9E1E5"/>
+              <a:srgbClr val="E1EFF2"/>
             </a:solidFill>
             <a:prstDash val="solid"/>
           </a:ln>
@@ -9898,8 +9547,8 @@
         </p:nvSpPr>
         <p:spPr>
           <a:xfrm>
-            <a:off x="548640" y="4754880"/>
-            <a:ext cx="5440680" cy="457200"/>
+            <a:off x="7653528" y="1490472"/>
+            <a:ext cx="3758184" cy="365760"/>
           </a:xfrm>
           <a:prstGeom prst="rect">
             <a:avLst/>
@@ -9915,61 +9564,81 @@
               <a:buNone/>
             </a:pPr>
             <a:r>
-              <a:rPr lang="en-US" sz="1300" dirty="0">
-                <a:solidFill>
-                  <a:srgbClr val="56676F"/>
+              <a:rPr lang="en-US" sz="1500" b="1" dirty="0">
+                <a:solidFill>
+                  <a:srgbClr val="0D5F73"/>
                 </a:solidFill>
                 <a:latin typeface="Calibri" pitchFamily="34" charset="0"/>
                 <a:ea typeface="Calibri" pitchFamily="34" charset="-122"/>
                 <a:cs typeface="Calibri" pitchFamily="34" charset="-120"/>
               </a:rPr>
-              <a:t>Worklist: panel ranked by consensus targets and predicted risk</a:t>
+              <a:t>Different country, sensor and setting</a:t>
+            </a:r>
+            <a:endParaRPr lang="en-US" sz="1500" dirty="0"/>
+          </a:p>
+        </p:txBody>
+      </p:sp>
+      <p:sp>
+        <p:nvSpPr>
+          <p:cNvPr id="6" name="Text 3"/>
+          <p:cNvSpPr txBox="1"/>
+          <p:nvPr/>
+        </p:nvSpPr>
+        <p:spPr>
+          <a:xfrm>
+            <a:off x="7653528" y="1892808"/>
+            <a:ext cx="3758184" cy="1600200"/>
+          </a:xfrm>
+          <a:prstGeom prst="rect">
+            <a:avLst/>
+          </a:prstGeom>
+          <a:noFill/>
+          <a:ln/>
+        </p:spPr>
+        <p:txBody>
+          <a:bodyPr wrap="square" lIns="0" tIns="0" rIns="0" bIns="0" rtlCol="0" anchor="t"/>
+          <a:lstStyle/>
+          <a:p>
+            <a:pPr indent="0" marL="0">
+              <a:buNone/>
+            </a:pPr>
+            <a:r>
+              <a:rPr lang="en-US" sz="1300" dirty="0">
+                <a:solidFill>
+                  <a:srgbClr val="15232A"/>
+                </a:solidFill>
+                <a:latin typeface="Calibri" pitchFamily="34" charset="0"/>
+                <a:ea typeface="Calibri" pitchFamily="34" charset="-122"/>
+                <a:cs typeface="Calibri" pitchFamily="34" charset="-120"/>
+              </a:rPr>
+              <a:t>Free-living US adults, Libre Pro, no refitting. Interval coverage stays at 78% in T2D. Rise-above-180 alerts in T2D: 91.4% sensitivity, 58% PPV, 1.07 false alerts per day.</a:t>
             </a:r>
             <a:endParaRPr lang="en-US" sz="1300" dirty="0"/>
           </a:p>
         </p:txBody>
       </p:sp>
-      <p:pic>
-        <p:nvPicPr>
-          <p:cNvPr id="6" name="Image 1" descr="C:\Codeing\Github\Aflatoon_Scaler-School-of-Technology\docs\screenshots\twin.png">    </p:cNvPr>
-          <p:cNvPicPr>
-            <a:picLocks noChangeAspect="1"/>
-          </p:cNvPicPr>
-          <p:nvPr/>
-        </p:nvPicPr>
-        <p:blipFill>
-          <a:blip r:embed="rId2"/>
-          <a:stretch>
-            <a:fillRect/>
-          </a:stretch>
-        </p:blipFill>
-        <p:spPr>
-          <a:xfrm>
-            <a:off x="6172200" y="1280160"/>
-            <a:ext cx="5440680" cy="3401568"/>
-          </a:xfrm>
-          <a:prstGeom prst="rect">
-            <a:avLst/>
-          </a:prstGeom>
-        </p:spPr>
-      </p:pic>
-      <p:sp>
-        <p:nvSpPr>
-          <p:cNvPr id="7" name="Shape 3"/>
+      <p:sp>
+        <p:nvSpPr>
+          <p:cNvPr id="7" name="Shape 4"/>
           <p:cNvSpPr/>
           <p:nvPr/>
         </p:nvSpPr>
         <p:spPr>
           <a:xfrm>
-            <a:off x="6172200" y="1280160"/>
-            <a:ext cx="5440680" cy="3401568"/>
-          </a:xfrm>
-          <a:prstGeom prst="rect">
-            <a:avLst/>
-          </a:prstGeom>
-          <a:ln w="9525">
+            <a:off x="7452360" y="3794760"/>
+            <a:ext cx="4160520" cy="2377440"/>
+          </a:xfrm>
+          <a:prstGeom prst="roundRect">
+            <a:avLst>
+              <a:gd name="adj" fmla="val 3077"/>
+            </a:avLst>
+          </a:prstGeom>
+          <a:solidFill>
+            <a:srgbClr val="F3F6F7"/>
+          </a:solidFill>
+          <a:ln w="12700">
             <a:solidFill>
-              <a:srgbClr val="D9E1E5"/>
+              <a:srgbClr val="F3F6F7"/>
             </a:solidFill>
             <a:prstDash val="solid"/>
           </a:ln>
@@ -9977,14 +9646,14 @@
       </p:sp>
       <p:sp>
         <p:nvSpPr>
-          <p:cNvPr id="8" name="Text 4"/>
+          <p:cNvPr id="8" name="Text 5"/>
           <p:cNvSpPr txBox="1"/>
           <p:nvPr/>
         </p:nvSpPr>
         <p:spPr>
           <a:xfrm>
-            <a:off x="6172200" y="4754880"/>
-            <a:ext cx="5440680" cy="457200"/>
+            <a:off x="7653528" y="3959352"/>
+            <a:ext cx="3758184" cy="365760"/>
           </a:xfrm>
           <a:prstGeom prst="rect">
             <a:avLst/>
@@ -10000,57 +9669,30 @@
               <a:buNone/>
             </a:pPr>
             <a:r>
-              <a:rPr lang="en-US" sz="1300" dirty="0">
-                <a:solidFill>
-                  <a:srgbClr val="56676F"/>
+              <a:rPr lang="en-US" sz="1500" b="1" dirty="0">
+                <a:solidFill>
+                  <a:srgbClr val="0D5F73"/>
                 </a:solidFill>
                 <a:latin typeface="Calibri" pitchFamily="34" charset="0"/>
                 <a:ea typeface="Calibri" pitchFamily="34" charset="-122"/>
                 <a:cs typeface="Calibri" pitchFamily="34" charset="-120"/>
               </a:rPr>
-              <a:t>Patient twin: forecast band, past forecasts vs reality, drivers</a:t>
-            </a:r>
-            <a:endParaRPr lang="en-US" sz="1300" dirty="0"/>
-          </a:p>
-        </p:txBody>
-      </p:sp>
-      <p:sp>
-        <p:nvSpPr>
-          <p:cNvPr id="9" name="Shape 5"/>
-          <p:cNvSpPr/>
-          <p:nvPr/>
-        </p:nvSpPr>
-        <p:spPr>
-          <a:xfrm>
-            <a:off x="548640" y="5532120"/>
-            <a:ext cx="1531620" cy="292608"/>
-          </a:xfrm>
-          <a:prstGeom prst="roundRect">
-            <a:avLst>
-              <a:gd name="adj" fmla="val 50000"/>
-            </a:avLst>
-          </a:prstGeom>
-          <a:solidFill>
-            <a:srgbClr val="FFFFFF"/>
-          </a:solidFill>
-          <a:ln w="12700">
-            <a:solidFill>
-              <a:srgbClr val="2E8B57"/>
-            </a:solidFill>
-            <a:prstDash val="solid"/>
-          </a:ln>
-        </p:spPr>
-      </p:sp>
-      <p:sp>
-        <p:nvSpPr>
-          <p:cNvPr id="10" name="Text 6"/>
+              <a:t>Where it does not help</a:t>
+            </a:r>
+            <a:endParaRPr lang="en-US" sz="1500" dirty="0"/>
+          </a:p>
+        </p:txBody>
+      </p:sp>
+      <p:sp>
+        <p:nvSpPr>
+          <p:cNvPr id="9" name="Text 6"/>
           <p:cNvSpPr txBox="1"/>
           <p:nvPr/>
         </p:nvSpPr>
         <p:spPr>
           <a:xfrm>
-            <a:off x="548640" y="5541264"/>
-            <a:ext cx="1531620" cy="274320"/>
+            <a:off x="7653528" y="4361688"/>
+            <a:ext cx="3758184" cy="1691640"/>
           </a:xfrm>
           <a:prstGeom prst="rect">
             <a:avLst/>
@@ -10059,327 +9701,24 @@
           <a:ln/>
         </p:spPr>
         <p:txBody>
-          <a:bodyPr wrap="square" lIns="0" tIns="0" rIns="0" bIns="0" rtlCol="0" anchor="ctr"/>
-          <a:lstStyle/>
-          <a:p>
-            <a:pPr algn="ctr" indent="0" marL="0">
+          <a:bodyPr wrap="square" lIns="0" tIns="0" rIns="0" bIns="0" rtlCol="0" anchor="t"/>
+          <a:lstStyle/>
+          <a:p>
+            <a:pPr indent="0" marL="0">
               <a:buNone/>
             </a:pPr>
             <a:r>
-              <a:rPr lang="en-US" sz="1050" dirty="0">
-                <a:solidFill>
-                  <a:srgbClr val="2E8B57"/>
+              <a:rPr lang="en-US" sz="1300" dirty="0">
+                <a:solidFill>
+                  <a:srgbClr val="15232A"/>
                 </a:solidFill>
                 <a:latin typeface="Calibri" pitchFamily="34" charset="0"/>
                 <a:ea typeface="Calibri" pitchFamily="34" charset="-122"/>
                 <a:cs typeface="Calibri" pitchFamily="34" charset="-120"/>
               </a:rPr>
-              <a:t>Research record</a:t>
-            </a:r>
-            <a:endParaRPr lang="en-US" sz="1050" dirty="0"/>
-          </a:p>
-        </p:txBody>
-      </p:sp>
-      <p:sp>
-        <p:nvSpPr>
-          <p:cNvPr id="11" name="Shape 7"/>
-          <p:cNvSpPr/>
-          <p:nvPr/>
-        </p:nvSpPr>
-        <p:spPr>
-          <a:xfrm>
-            <a:off x="2263140" y="5532120"/>
-            <a:ext cx="1298448" cy="292608"/>
-          </a:xfrm>
-          <a:prstGeom prst="roundRect">
-            <a:avLst>
-              <a:gd name="adj" fmla="val 50000"/>
-            </a:avLst>
-          </a:prstGeom>
-          <a:solidFill>
-            <a:srgbClr val="FFFFFF"/>
-          </a:solidFill>
-          <a:ln w="12700">
-            <a:solidFill>
-              <a:srgbClr val="2E8B57"/>
-            </a:solidFill>
-            <a:prstDash val="solid"/>
-          </a:ln>
-        </p:spPr>
-      </p:sp>
-      <p:sp>
-        <p:nvSpPr>
-          <p:cNvPr id="12" name="Text 8"/>
-          <p:cNvSpPr txBox="1"/>
-          <p:nvPr/>
-        </p:nvSpPr>
-        <p:spPr>
-          <a:xfrm>
-            <a:off x="2263140" y="5541264"/>
-            <a:ext cx="1298448" cy="274320"/>
-          </a:xfrm>
-          <a:prstGeom prst="rect">
-            <a:avLst/>
-          </a:prstGeom>
-          <a:noFill/>
-          <a:ln/>
-        </p:spPr>
-        <p:txBody>
-          <a:bodyPr wrap="square" lIns="0" tIns="0" rIns="0" bIns="0" rtlCol="0" anchor="ctr"/>
-          <a:lstStyle/>
-          <a:p>
-            <a:pPr algn="ctr" indent="0" marL="0">
-              <a:buNone/>
-            </a:pPr>
-            <a:r>
-              <a:rPr lang="en-US" sz="1050" dirty="0">
-                <a:solidFill>
-                  <a:srgbClr val="2E8B57"/>
-                </a:solidFill>
-                <a:latin typeface="Calibri" pitchFamily="34" charset="0"/>
-                <a:ea typeface="Calibri" pitchFamily="34" charset="-122"/>
-                <a:cs typeface="Calibri" pitchFamily="34" charset="-120"/>
-              </a:rPr>
-              <a:t>Replayed CGM</a:t>
-            </a:r>
-            <a:endParaRPr lang="en-US" sz="1050" dirty="0"/>
-          </a:p>
-        </p:txBody>
-      </p:sp>
-      <p:sp>
-        <p:nvSpPr>
-          <p:cNvPr id="13" name="Shape 9"/>
-          <p:cNvSpPr/>
-          <p:nvPr/>
-        </p:nvSpPr>
-        <p:spPr>
-          <a:xfrm>
-            <a:off x="3744468" y="5532120"/>
-            <a:ext cx="1453896" cy="292608"/>
-          </a:xfrm>
-          <a:prstGeom prst="roundRect">
-            <a:avLst>
-              <a:gd name="adj" fmla="val 50000"/>
-            </a:avLst>
-          </a:prstGeom>
-          <a:solidFill>
-            <a:srgbClr val="FFFFFF"/>
-          </a:solidFill>
-          <a:ln w="12700">
-            <a:solidFill>
-              <a:srgbClr val="0D5F73"/>
-            </a:solidFill>
-            <a:prstDash val="solid"/>
-          </a:ln>
-        </p:spPr>
-      </p:sp>
-      <p:sp>
-        <p:nvSpPr>
-          <p:cNvPr id="14" name="Text 10"/>
-          <p:cNvSpPr txBox="1"/>
-          <p:nvPr/>
-        </p:nvSpPr>
-        <p:spPr>
-          <a:xfrm>
-            <a:off x="3744468" y="5541264"/>
-            <a:ext cx="1453896" cy="274320"/>
-          </a:xfrm>
-          <a:prstGeom prst="rect">
-            <a:avLst/>
-          </a:prstGeom>
-          <a:noFill/>
-          <a:ln/>
-        </p:spPr>
-        <p:txBody>
-          <a:bodyPr wrap="square" lIns="0" tIns="0" rIns="0" bIns="0" rtlCol="0" anchor="ctr"/>
-          <a:lstStyle/>
-          <a:p>
-            <a:pPr algn="ctr" indent="0" marL="0">
-              <a:buNone/>
-            </a:pPr>
-            <a:r>
-              <a:rPr lang="en-US" sz="1050" dirty="0">
-                <a:solidFill>
-                  <a:srgbClr val="0D5F73"/>
-                </a:solidFill>
-                <a:latin typeface="Calibri" pitchFamily="34" charset="0"/>
-                <a:ea typeface="Calibri" pitchFamily="34" charset="-122"/>
-                <a:cs typeface="Calibri" pitchFamily="34" charset="-120"/>
-              </a:rPr>
-              <a:t>Model forecast</a:t>
-            </a:r>
-            <a:endParaRPr lang="en-US" sz="1050" dirty="0"/>
-          </a:p>
-        </p:txBody>
-      </p:sp>
-      <p:sp>
-        <p:nvSpPr>
-          <p:cNvPr id="15" name="Shape 11"/>
-          <p:cNvSpPr/>
-          <p:nvPr/>
-        </p:nvSpPr>
-        <p:spPr>
-          <a:xfrm>
-            <a:off x="5381244" y="5532120"/>
-            <a:ext cx="2231136" cy="292608"/>
-          </a:xfrm>
-          <a:prstGeom prst="roundRect">
-            <a:avLst>
-              <a:gd name="adj" fmla="val 50000"/>
-            </a:avLst>
-          </a:prstGeom>
-          <a:solidFill>
-            <a:srgbClr val="FFFFFF"/>
-          </a:solidFill>
-          <a:ln w="12700">
-            <a:solidFill>
-              <a:srgbClr val="C98A00"/>
-            </a:solidFill>
-            <a:prstDash val="solid"/>
-          </a:ln>
-        </p:spPr>
-      </p:sp>
-      <p:sp>
-        <p:nvSpPr>
-          <p:cNvPr id="16" name="Text 12"/>
-          <p:cNvSpPr txBox="1"/>
-          <p:nvPr/>
-        </p:nvSpPr>
-        <p:spPr>
-          <a:xfrm>
-            <a:off x="5381244" y="5541264"/>
-            <a:ext cx="2231136" cy="274320"/>
-          </a:xfrm>
-          <a:prstGeom prst="rect">
-            <a:avLst/>
-          </a:prstGeom>
-          <a:noFill/>
-          <a:ln/>
-        </p:spPr>
-        <p:txBody>
-          <a:bodyPr wrap="square" lIns="0" tIns="0" rIns="0" bIns="0" rtlCol="0" anchor="ctr"/>
-          <a:lstStyle/>
-          <a:p>
-            <a:pPr algn="ctr" indent="0" marL="0">
-              <a:buNone/>
-            </a:pPr>
-            <a:r>
-              <a:rPr lang="en-US" sz="1050" dirty="0">
-                <a:solidFill>
-                  <a:srgbClr val="C98A00"/>
-                </a:solidFill>
-                <a:latin typeface="Calibri" pitchFamily="34" charset="0"/>
-                <a:ea typeface="Calibri" pitchFamily="34" charset="-122"/>
-                <a:cs typeface="Calibri" pitchFamily="34" charset="-120"/>
-              </a:rPr>
-              <a:t>Sensitivity · not causal</a:t>
-            </a:r>
-            <a:endParaRPr lang="en-US" sz="1050" dirty="0"/>
-          </a:p>
-        </p:txBody>
-      </p:sp>
-      <p:sp>
-        <p:nvSpPr>
-          <p:cNvPr id="17" name="Shape 13"/>
-          <p:cNvSpPr/>
-          <p:nvPr/>
-        </p:nvSpPr>
-        <p:spPr>
-          <a:xfrm>
-            <a:off x="7795260" y="5532120"/>
-            <a:ext cx="1220724" cy="292608"/>
-          </a:xfrm>
-          <a:prstGeom prst="roundRect">
-            <a:avLst>
-              <a:gd name="adj" fmla="val 50000"/>
-            </a:avLst>
-          </a:prstGeom>
-          <a:solidFill>
-            <a:srgbClr val="FFFFFF"/>
-          </a:solidFill>
-          <a:ln w="12700">
-            <a:solidFill>
-              <a:srgbClr val="0D5F73"/>
-            </a:solidFill>
-            <a:prstDash val="solid"/>
-          </a:ln>
-        </p:spPr>
-      </p:sp>
-      <p:sp>
-        <p:nvSpPr>
-          <p:cNvPr id="18" name="Text 14"/>
-          <p:cNvSpPr txBox="1"/>
-          <p:nvPr/>
-        </p:nvSpPr>
-        <p:spPr>
-          <a:xfrm>
-            <a:off x="7795260" y="5541264"/>
-            <a:ext cx="1220724" cy="274320"/>
-          </a:xfrm>
-          <a:prstGeom prst="rect">
-            <a:avLst/>
-          </a:prstGeom>
-          <a:noFill/>
-          <a:ln/>
-        </p:spPr>
-        <p:txBody>
-          <a:bodyPr wrap="square" lIns="0" tIns="0" rIns="0" bIns="0" rtlCol="0" anchor="ctr"/>
-          <a:lstStyle/>
-          <a:p>
-            <a:pPr algn="ctr" indent="0" marL="0">
-              <a:buNone/>
-            </a:pPr>
-            <a:r>
-              <a:rPr lang="en-US" sz="1050" dirty="0">
-                <a:solidFill>
-                  <a:srgbClr val="0D5F73"/>
-                </a:solidFill>
-                <a:latin typeface="Calibri" pitchFamily="34" charset="0"/>
-                <a:ea typeface="Calibri" pitchFamily="34" charset="-122"/>
-                <a:cs typeface="Calibri" pitchFamily="34" charset="-120"/>
-              </a:rPr>
-              <a:t>LIVE stream</a:t>
-            </a:r>
-            <a:endParaRPr lang="en-US" sz="1050" dirty="0"/>
-          </a:p>
-        </p:txBody>
-      </p:sp>
-      <p:sp>
-        <p:nvSpPr>
-          <p:cNvPr id="19" name="Text 15"/>
-          <p:cNvSpPr txBox="1"/>
-          <p:nvPr/>
-        </p:nvSpPr>
-        <p:spPr>
-          <a:xfrm>
-            <a:off x="548640" y="5943600"/>
-            <a:ext cx="11064240" cy="320040"/>
-          </a:xfrm>
-          <a:prstGeom prst="rect">
-            <a:avLst/>
-          </a:prstGeom>
-          <a:noFill/>
-          <a:ln/>
-        </p:spPr>
-        <p:txBody>
-          <a:bodyPr wrap="square" lIns="0" tIns="0" rIns="0" bIns="0" rtlCol="0" anchor="t"/>
-          <a:lstStyle/>
-          <a:p>
-            <a:pPr indent="0" marL="0">
-              <a:buNone/>
-            </a:pPr>
-            <a:r>
-              <a:rPr lang="en-US" sz="1250" dirty="0">
-                <a:solidFill>
-                  <a:srgbClr val="56676F"/>
-                </a:solidFill>
-                <a:latin typeface="Calibri" pitchFamily="34" charset="0"/>
-                <a:ea typeface="Calibri" pitchFamily="34" charset="-122"/>
-                <a:cs typeface="Calibri" pitchFamily="34" charset="-120"/>
-              </a:rPr>
-              <a:t>Also: forecast ledger · what-if · FHIR R4 record · live streaming · evidence page</a:t>
-            </a:r>
-            <a:endParaRPr lang="en-US" sz="1250" dirty="0"/>
+              <a:t>In healthy participants the gain over last value is close to zero: expected for a model trained on T2D. Medications and most labs are missing in CGMacros and were passed as missing, never as zero.</a:t>
+            </a:r>
+            <a:endParaRPr lang="en-US" sz="1300" dirty="0"/>
           </a:p>
         </p:txBody>
       </p:sp>
@@ -10491,34 +9830,204 @@
                 <a:ea typeface="Cambria" pitchFamily="34" charset="-122"/>
                 <a:cs typeface="Cambria" pitchFamily="34" charset="-120"/>
               </a:rPr>
-              <a:t>Limitations we want the jury to know</a:t>
+              <a:t>The product: what a care team sees</a:t>
             </a:r>
             <a:endParaRPr lang="en-US" sz="3000" dirty="0"/>
           </a:p>
         </p:txBody>
       </p:sp>
-      <p:sp>
-        <p:nvSpPr>
-          <p:cNvPr id="3" name="Shape 1"/>
+      <p:pic>
+        <p:nvPicPr>
+          <p:cNvPr id="3" name="Image 0" descr="C:\Codeing\Github\Aflatoon_Scaler-School-of-Technology\docs\screenshots\worklist.png">    </p:cNvPr>
+          <p:cNvPicPr>
+            <a:picLocks noChangeAspect="1"/>
+          </p:cNvPicPr>
+          <p:nvPr/>
+        </p:nvPicPr>
+        <p:blipFill>
+          <a:blip r:embed="rId1"/>
+          <a:stretch>
+            <a:fillRect/>
+          </a:stretch>
+        </p:blipFill>
+        <p:spPr>
+          <a:xfrm>
+            <a:off x="548640" y="1280160"/>
+            <a:ext cx="5440680" cy="3401568"/>
+          </a:xfrm>
+          <a:prstGeom prst="rect">
+            <a:avLst/>
+          </a:prstGeom>
+        </p:spPr>
+      </p:pic>
+      <p:sp>
+        <p:nvSpPr>
+          <p:cNvPr id="4" name="Shape 1"/>
           <p:cNvSpPr/>
           <p:nvPr/>
         </p:nvSpPr>
         <p:spPr>
           <a:xfrm>
-            <a:off x="548640" y="1325880"/>
-            <a:ext cx="5440680" cy="1481328"/>
+            <a:off x="548640" y="1280160"/>
+            <a:ext cx="5440680" cy="3401568"/>
+          </a:xfrm>
+          <a:prstGeom prst="rect">
+            <a:avLst/>
+          </a:prstGeom>
+          <a:ln w="9525">
+            <a:solidFill>
+              <a:srgbClr val="D9E1E5"/>
+            </a:solidFill>
+            <a:prstDash val="solid"/>
+          </a:ln>
+        </p:spPr>
+      </p:sp>
+      <p:sp>
+        <p:nvSpPr>
+          <p:cNvPr id="5" name="Text 2"/>
+          <p:cNvSpPr txBox="1"/>
+          <p:nvPr/>
+        </p:nvSpPr>
+        <p:spPr>
+          <a:xfrm>
+            <a:off x="548640" y="4754880"/>
+            <a:ext cx="5440680" cy="457200"/>
+          </a:xfrm>
+          <a:prstGeom prst="rect">
+            <a:avLst/>
+          </a:prstGeom>
+          <a:noFill/>
+          <a:ln/>
+        </p:spPr>
+        <p:txBody>
+          <a:bodyPr wrap="square" lIns="0" tIns="0" rIns="0" bIns="0" rtlCol="0" anchor="t"/>
+          <a:lstStyle/>
+          <a:p>
+            <a:pPr indent="0" marL="0">
+              <a:buNone/>
+            </a:pPr>
+            <a:r>
+              <a:rPr lang="en-US" sz="1300" dirty="0">
+                <a:solidFill>
+                  <a:srgbClr val="56676F"/>
+                </a:solidFill>
+                <a:latin typeface="Calibri" pitchFamily="34" charset="0"/>
+                <a:ea typeface="Calibri" pitchFamily="34" charset="-122"/>
+                <a:cs typeface="Calibri" pitchFamily="34" charset="-120"/>
+              </a:rPr>
+              <a:t>Worklist: panel ranked by consensus targets and predicted risk</a:t>
+            </a:r>
+            <a:endParaRPr lang="en-US" sz="1300" dirty="0"/>
+          </a:p>
+        </p:txBody>
+      </p:sp>
+      <p:pic>
+        <p:nvPicPr>
+          <p:cNvPr id="6" name="Image 1" descr="C:\Codeing\Github\Aflatoon_Scaler-School-of-Technology\docs\screenshots\twin.png">    </p:cNvPr>
+          <p:cNvPicPr>
+            <a:picLocks noChangeAspect="1"/>
+          </p:cNvPicPr>
+          <p:nvPr/>
+        </p:nvPicPr>
+        <p:blipFill>
+          <a:blip r:embed="rId2"/>
+          <a:stretch>
+            <a:fillRect/>
+          </a:stretch>
+        </p:blipFill>
+        <p:spPr>
+          <a:xfrm>
+            <a:off x="6172200" y="1280160"/>
+            <a:ext cx="5440680" cy="3401568"/>
+          </a:xfrm>
+          <a:prstGeom prst="rect">
+            <a:avLst/>
+          </a:prstGeom>
+        </p:spPr>
+      </p:pic>
+      <p:sp>
+        <p:nvSpPr>
+          <p:cNvPr id="7" name="Shape 3"/>
+          <p:cNvSpPr/>
+          <p:nvPr/>
+        </p:nvSpPr>
+        <p:spPr>
+          <a:xfrm>
+            <a:off x="6172200" y="1280160"/>
+            <a:ext cx="5440680" cy="3401568"/>
+          </a:xfrm>
+          <a:prstGeom prst="rect">
+            <a:avLst/>
+          </a:prstGeom>
+          <a:ln w="9525">
+            <a:solidFill>
+              <a:srgbClr val="D9E1E5"/>
+            </a:solidFill>
+            <a:prstDash val="solid"/>
+          </a:ln>
+        </p:spPr>
+      </p:sp>
+      <p:sp>
+        <p:nvSpPr>
+          <p:cNvPr id="8" name="Text 4"/>
+          <p:cNvSpPr txBox="1"/>
+          <p:nvPr/>
+        </p:nvSpPr>
+        <p:spPr>
+          <a:xfrm>
+            <a:off x="6172200" y="4754880"/>
+            <a:ext cx="5440680" cy="457200"/>
+          </a:xfrm>
+          <a:prstGeom prst="rect">
+            <a:avLst/>
+          </a:prstGeom>
+          <a:noFill/>
+          <a:ln/>
+        </p:spPr>
+        <p:txBody>
+          <a:bodyPr wrap="square" lIns="0" tIns="0" rIns="0" bIns="0" rtlCol="0" anchor="t"/>
+          <a:lstStyle/>
+          <a:p>
+            <a:pPr indent="0" marL="0">
+              <a:buNone/>
+            </a:pPr>
+            <a:r>
+              <a:rPr lang="en-US" sz="1300" dirty="0">
+                <a:solidFill>
+                  <a:srgbClr val="56676F"/>
+                </a:solidFill>
+                <a:latin typeface="Calibri" pitchFamily="34" charset="0"/>
+                <a:ea typeface="Calibri" pitchFamily="34" charset="-122"/>
+                <a:cs typeface="Calibri" pitchFamily="34" charset="-120"/>
+              </a:rPr>
+              <a:t>Patient twin: forecast band, past forecasts vs reality, drivers</a:t>
+            </a:r>
+            <a:endParaRPr lang="en-US" sz="1300" dirty="0"/>
+          </a:p>
+        </p:txBody>
+      </p:sp>
+      <p:sp>
+        <p:nvSpPr>
+          <p:cNvPr id="9" name="Shape 5"/>
+          <p:cNvSpPr/>
+          <p:nvPr/>
+        </p:nvSpPr>
+        <p:spPr>
+          <a:xfrm>
+            <a:off x="548640" y="5532120"/>
+            <a:ext cx="1531620" cy="292608"/>
           </a:xfrm>
           <a:prstGeom prst="roundRect">
             <a:avLst>
-              <a:gd name="adj" fmla="val 4938"/>
+              <a:gd name="adj" fmla="val 50000"/>
             </a:avLst>
           </a:prstGeom>
           <a:solidFill>
-            <a:srgbClr val="F3F6F7"/>
+            <a:srgbClr val="FFFFFF"/>
           </a:solidFill>
           <a:ln w="12700">
             <a:solidFill>
-              <a:srgbClr val="F3F6F7"/>
+              <a:srgbClr val="2E8B57"/>
             </a:solidFill>
             <a:prstDash val="solid"/>
           </a:ln>
@@ -10526,14 +10035,14 @@
       </p:sp>
       <p:sp>
         <p:nvSpPr>
-          <p:cNvPr id="4" name="Text 2"/>
+          <p:cNvPr id="10" name="Text 6"/>
           <p:cNvSpPr txBox="1"/>
           <p:nvPr/>
         </p:nvSpPr>
         <p:spPr>
           <a:xfrm>
-            <a:off x="749808" y="1490472"/>
-            <a:ext cx="5038344" cy="365760"/>
+            <a:off x="548640" y="5541264"/>
+            <a:ext cx="1531620" cy="274320"/>
           </a:xfrm>
           <a:prstGeom prst="rect">
             <a:avLst/>
@@ -10542,37 +10051,64 @@
           <a:ln/>
         </p:spPr>
         <p:txBody>
-          <a:bodyPr wrap="square" lIns="0" tIns="0" rIns="0" bIns="0" rtlCol="0" anchor="t"/>
-          <a:lstStyle/>
-          <a:p>
-            <a:pPr indent="0" marL="0">
+          <a:bodyPr wrap="square" lIns="0" tIns="0" rIns="0" bIns="0" rtlCol="0" anchor="ctr"/>
+          <a:lstStyle/>
+          <a:p>
+            <a:pPr algn="ctr" indent="0" marL="0">
               <a:buNone/>
             </a:pPr>
             <a:r>
-              <a:rPr lang="en-US" sz="1500" b="1" dirty="0">
-                <a:solidFill>
-                  <a:srgbClr val="0D5F73"/>
+              <a:rPr lang="en-US" sz="1050" dirty="0">
+                <a:solidFill>
+                  <a:srgbClr val="2E8B57"/>
                 </a:solidFill>
                 <a:latin typeface="Calibri" pitchFamily="34" charset="0"/>
                 <a:ea typeface="Calibri" pitchFamily="34" charset="-122"/>
                 <a:cs typeface="Calibri" pitchFamily="34" charset="-120"/>
               </a:rPr>
-              <a:t>Population</a:t>
-            </a:r>
-            <a:endParaRPr lang="en-US" sz="1500" dirty="0"/>
-          </a:p>
-        </p:txBody>
-      </p:sp>
-      <p:sp>
-        <p:nvSpPr>
-          <p:cNvPr id="5" name="Text 3"/>
+              <a:t>Research record</a:t>
+            </a:r>
+            <a:endParaRPr lang="en-US" sz="1050" dirty="0"/>
+          </a:p>
+        </p:txBody>
+      </p:sp>
+      <p:sp>
+        <p:nvSpPr>
+          <p:cNvPr id="11" name="Shape 7"/>
+          <p:cNvSpPr/>
+          <p:nvPr/>
+        </p:nvSpPr>
+        <p:spPr>
+          <a:xfrm>
+            <a:off x="2263140" y="5532120"/>
+            <a:ext cx="1298448" cy="292608"/>
+          </a:xfrm>
+          <a:prstGeom prst="roundRect">
+            <a:avLst>
+              <a:gd name="adj" fmla="val 50000"/>
+            </a:avLst>
+          </a:prstGeom>
+          <a:solidFill>
+            <a:srgbClr val="FFFFFF"/>
+          </a:solidFill>
+          <a:ln w="12700">
+            <a:solidFill>
+              <a:srgbClr val="2E8B57"/>
+            </a:solidFill>
+            <a:prstDash val="solid"/>
+          </a:ln>
+        </p:spPr>
+      </p:sp>
+      <p:sp>
+        <p:nvSpPr>
+          <p:cNvPr id="12" name="Text 8"/>
           <p:cNvSpPr txBox="1"/>
           <p:nvPr/>
         </p:nvSpPr>
         <p:spPr>
           <a:xfrm>
-            <a:off x="749808" y="1892808"/>
-            <a:ext cx="5038344" cy="795528"/>
+            <a:off x="2263140" y="5541264"/>
+            <a:ext cx="1298448" cy="274320"/>
           </a:xfrm>
           <a:prstGeom prst="rect">
             <a:avLst/>
@@ -10581,49 +10117,49 @@
           <a:ln/>
         </p:spPr>
         <p:txBody>
-          <a:bodyPr wrap="square" lIns="0" tIns="0" rIns="0" bIns="0" rtlCol="0" anchor="t"/>
-          <a:lstStyle/>
-          <a:p>
-            <a:pPr indent="0" marL="0">
+          <a:bodyPr wrap="square" lIns="0" tIns="0" rIns="0" bIns="0" rtlCol="0" anchor="ctr"/>
+          <a:lstStyle/>
+          <a:p>
+            <a:pPr algn="ctr" indent="0" marL="0">
               <a:buNone/>
             </a:pPr>
             <a:r>
-              <a:rPr lang="en-US" sz="1300" dirty="0">
-                <a:solidFill>
-                  <a:srgbClr val="15232A"/>
+              <a:rPr lang="en-US" sz="1050" dirty="0">
+                <a:solidFill>
+                  <a:srgbClr val="2E8B57"/>
                 </a:solidFill>
                 <a:latin typeface="Calibri" pitchFamily="34" charset="0"/>
                 <a:ea typeface="Calibri" pitchFamily="34" charset="-122"/>
                 <a:cs typeface="Calibri" pitchFamily="34" charset="-120"/>
               </a:rPr>
-              <a:t>Chinese hospital cohort, 2019–2021, partly in-hospital with regular meal times. Not Indian. External check covers the US, not India.</a:t>
-            </a:r>
-            <a:endParaRPr lang="en-US" sz="1300" dirty="0"/>
-          </a:p>
-        </p:txBody>
-      </p:sp>
-      <p:sp>
-        <p:nvSpPr>
-          <p:cNvPr id="6" name="Shape 4"/>
+              <a:t>Replayed CGM</a:t>
+            </a:r>
+            <a:endParaRPr lang="en-US" sz="1050" dirty="0"/>
+          </a:p>
+        </p:txBody>
+      </p:sp>
+      <p:sp>
+        <p:nvSpPr>
+          <p:cNvPr id="13" name="Shape 9"/>
           <p:cNvSpPr/>
           <p:nvPr/>
         </p:nvSpPr>
         <p:spPr>
           <a:xfrm>
-            <a:off x="6172200" y="1325880"/>
-            <a:ext cx="5440680" cy="1481328"/>
+            <a:off x="3744468" y="5532120"/>
+            <a:ext cx="1453896" cy="292608"/>
           </a:xfrm>
           <a:prstGeom prst="roundRect">
             <a:avLst>
-              <a:gd name="adj" fmla="val 4938"/>
+              <a:gd name="adj" fmla="val 50000"/>
             </a:avLst>
           </a:prstGeom>
           <a:solidFill>
-            <a:srgbClr val="F3F6F7"/>
+            <a:srgbClr val="FFFFFF"/>
           </a:solidFill>
           <a:ln w="12700">
             <a:solidFill>
-              <a:srgbClr val="F3F6F7"/>
+              <a:srgbClr val="0D5F73"/>
             </a:solidFill>
             <a:prstDash val="solid"/>
           </a:ln>
@@ -10631,14 +10167,14 @@
       </p:sp>
       <p:sp>
         <p:nvSpPr>
-          <p:cNvPr id="7" name="Text 5"/>
+          <p:cNvPr id="14" name="Text 10"/>
           <p:cNvSpPr txBox="1"/>
           <p:nvPr/>
         </p:nvSpPr>
         <p:spPr>
           <a:xfrm>
-            <a:off x="6373368" y="1490472"/>
-            <a:ext cx="5038344" cy="365760"/>
+            <a:off x="3744468" y="5541264"/>
+            <a:ext cx="1453896" cy="274320"/>
           </a:xfrm>
           <a:prstGeom prst="rect">
             <a:avLst/>
@@ -10647,14 +10183,14 @@
           <a:ln/>
         </p:spPr>
         <p:txBody>
-          <a:bodyPr wrap="square" lIns="0" tIns="0" rIns="0" bIns="0" rtlCol="0" anchor="t"/>
-          <a:lstStyle/>
-          <a:p>
-            <a:pPr indent="0" marL="0">
+          <a:bodyPr wrap="square" lIns="0" tIns="0" rIns="0" bIns="0" rtlCol="0" anchor="ctr"/>
+          <a:lstStyle/>
+          <a:p>
+            <a:pPr algn="ctr" indent="0" marL="0">
               <a:buNone/>
             </a:pPr>
             <a:r>
-              <a:rPr lang="en-US" sz="1500" b="1" dirty="0">
+              <a:rPr lang="en-US" sz="1050" dirty="0">
                 <a:solidFill>
                   <a:srgbClr val="0D5F73"/>
                 </a:solidFill>
@@ -10662,22 +10198,49 @@
                 <a:ea typeface="Calibri" pitchFamily="34" charset="-122"/>
                 <a:cs typeface="Calibri" pitchFamily="34" charset="-120"/>
               </a:rPr>
-              <a:t>Size</a:t>
-            </a:r>
-            <a:endParaRPr lang="en-US" sz="1500" dirty="0"/>
-          </a:p>
-        </p:txBody>
-      </p:sp>
-      <p:sp>
-        <p:nvSpPr>
-          <p:cNvPr id="8" name="Text 6"/>
+              <a:t>Model forecast</a:t>
+            </a:r>
+            <a:endParaRPr lang="en-US" sz="1050" dirty="0"/>
+          </a:p>
+        </p:txBody>
+      </p:sp>
+      <p:sp>
+        <p:nvSpPr>
+          <p:cNvPr id="15" name="Shape 11"/>
+          <p:cNvSpPr/>
+          <p:nvPr/>
+        </p:nvSpPr>
+        <p:spPr>
+          <a:xfrm>
+            <a:off x="5381244" y="5532120"/>
+            <a:ext cx="2231136" cy="292608"/>
+          </a:xfrm>
+          <a:prstGeom prst="roundRect">
+            <a:avLst>
+              <a:gd name="adj" fmla="val 50000"/>
+            </a:avLst>
+          </a:prstGeom>
+          <a:solidFill>
+            <a:srgbClr val="FFFFFF"/>
+          </a:solidFill>
+          <a:ln w="12700">
+            <a:solidFill>
+              <a:srgbClr val="C98A00"/>
+            </a:solidFill>
+            <a:prstDash val="solid"/>
+          </a:ln>
+        </p:spPr>
+      </p:sp>
+      <p:sp>
+        <p:nvSpPr>
+          <p:cNvPr id="16" name="Text 12"/>
           <p:cNvSpPr txBox="1"/>
           <p:nvPr/>
         </p:nvSpPr>
         <p:spPr>
           <a:xfrm>
-            <a:off x="6373368" y="1892808"/>
-            <a:ext cx="5038344" cy="795528"/>
+            <a:off x="5381244" y="5541264"/>
+            <a:ext cx="2231136" cy="274320"/>
           </a:xfrm>
           <a:prstGeom prst="rect">
             <a:avLst/>
@@ -10686,49 +10249,49 @@
           <a:ln/>
         </p:spPr>
         <p:txBody>
-          <a:bodyPr wrap="square" lIns="0" tIns="0" rIns="0" bIns="0" rtlCol="0" anchor="t"/>
-          <a:lstStyle/>
-          <a:p>
-            <a:pPr indent="0" marL="0">
+          <a:bodyPr wrap="square" lIns="0" tIns="0" rIns="0" bIns="0" rtlCol="0" anchor="ctr"/>
+          <a:lstStyle/>
+          <a:p>
+            <a:pPr algn="ctr" indent="0" marL="0">
               <a:buNone/>
             </a:pPr>
             <a:r>
-              <a:rPr lang="en-US" sz="1300" dirty="0">
-                <a:solidFill>
-                  <a:srgbClr val="15232A"/>
+              <a:rPr lang="en-US" sz="1050" dirty="0">
+                <a:solidFill>
+                  <a:srgbClr val="C98A00"/>
                 </a:solidFill>
                 <a:latin typeface="Calibri" pitchFamily="34" charset="0"/>
                 <a:ea typeface="Calibri" pitchFamily="34" charset="-122"/>
                 <a:cs typeface="Calibri" pitchFamily="34" charset="-120"/>
               </a:rPr>
-              <a:t>100 patients, 3–14 days each; 20 test patients. Hence bootstrap CIs on every claim.</a:t>
-            </a:r>
-            <a:endParaRPr lang="en-US" sz="1300" dirty="0"/>
-          </a:p>
-        </p:txBody>
-      </p:sp>
-      <p:sp>
-        <p:nvSpPr>
-          <p:cNvPr id="9" name="Shape 7"/>
+              <a:t>Sensitivity · not causal</a:t>
+            </a:r>
+            <a:endParaRPr lang="en-US" sz="1050" dirty="0"/>
+          </a:p>
+        </p:txBody>
+      </p:sp>
+      <p:sp>
+        <p:nvSpPr>
+          <p:cNvPr id="17" name="Shape 13"/>
           <p:cNvSpPr/>
           <p:nvPr/>
         </p:nvSpPr>
         <p:spPr>
           <a:xfrm>
-            <a:off x="548640" y="2971800"/>
-            <a:ext cx="5440680" cy="1481328"/>
+            <a:off x="7795260" y="5532120"/>
+            <a:ext cx="1220724" cy="292608"/>
           </a:xfrm>
           <a:prstGeom prst="roundRect">
             <a:avLst>
-              <a:gd name="adj" fmla="val 4938"/>
+              <a:gd name="adj" fmla="val 50000"/>
             </a:avLst>
           </a:prstGeom>
           <a:solidFill>
-            <a:srgbClr val="F3F6F7"/>
+            <a:srgbClr val="FFFFFF"/>
           </a:solidFill>
           <a:ln w="12700">
             <a:solidFill>
-              <a:srgbClr val="F3F6F7"/>
+              <a:srgbClr val="0D5F73"/>
             </a:solidFill>
             <a:prstDash val="solid"/>
           </a:ln>
@@ -10736,14 +10299,14 @@
       </p:sp>
       <p:sp>
         <p:nvSpPr>
-          <p:cNvPr id="10" name="Text 8"/>
+          <p:cNvPr id="18" name="Text 14"/>
           <p:cNvSpPr txBox="1"/>
           <p:nvPr/>
         </p:nvSpPr>
         <p:spPr>
           <a:xfrm>
-            <a:off x="749808" y="3136392"/>
-            <a:ext cx="5038344" cy="365760"/>
+            <a:off x="7795260" y="5541264"/>
+            <a:ext cx="1220724" cy="274320"/>
           </a:xfrm>
           <a:prstGeom prst="rect">
             <a:avLst/>
@@ -10752,14 +10315,14 @@
           <a:ln/>
         </p:spPr>
         <p:txBody>
-          <a:bodyPr wrap="square" lIns="0" tIns="0" rIns="0" bIns="0" rtlCol="0" anchor="t"/>
-          <a:lstStyle/>
-          <a:p>
-            <a:pPr indent="0" marL="0">
+          <a:bodyPr wrap="square" lIns="0" tIns="0" rIns="0" bIns="0" rtlCol="0" anchor="ctr"/>
+          <a:lstStyle/>
+          <a:p>
+            <a:pPr algn="ctr" indent="0" marL="0">
               <a:buNone/>
             </a:pPr>
             <a:r>
-              <a:rPr lang="en-US" sz="1500" b="1" dirty="0">
+              <a:rPr lang="en-US" sz="1050" dirty="0">
                 <a:solidFill>
                   <a:srgbClr val="0D5F73"/>
                 </a:solidFill>
@@ -10767,22 +10330,22 @@
                 <a:ea typeface="Calibri" pitchFamily="34" charset="-122"/>
                 <a:cs typeface="Calibri" pitchFamily="34" charset="-120"/>
               </a:rPr>
-              <a:t>Alert load</a:t>
-            </a:r>
-            <a:endParaRPr lang="en-US" sz="1500" dirty="0"/>
-          </a:p>
-        </p:txBody>
-      </p:sp>
-      <p:sp>
-        <p:nvSpPr>
-          <p:cNvPr id="11" name="Text 9"/>
+              <a:t>LIVE stream</a:t>
+            </a:r>
+            <a:endParaRPr lang="en-US" sz="1050" dirty="0"/>
+          </a:p>
+        </p:txBody>
+      </p:sp>
+      <p:sp>
+        <p:nvSpPr>
+          <p:cNvPr id="19" name="Text 15"/>
           <p:cNvSpPr txBox="1"/>
           <p:nvPr/>
         </p:nvSpPr>
         <p:spPr>
           <a:xfrm>
-            <a:off x="749808" y="3538728"/>
-            <a:ext cx="5038344" cy="795528"/>
+            <a:off x="548640" y="5943600"/>
+            <a:ext cx="11064240" cy="320040"/>
           </a:xfrm>
           <a:prstGeom prst="rect">
             <a:avLst/>
@@ -10798,332 +10361,17 @@
               <a:buNone/>
             </a:pPr>
             <a:r>
-              <a:rPr lang="en-US" sz="1300" dirty="0">
-                <a:solidFill>
-                  <a:srgbClr val="15232A"/>
+              <a:rPr lang="en-US" sz="1250" dirty="0">
+                <a:solidFill>
+                  <a:srgbClr val="56676F"/>
                 </a:solidFill>
                 <a:latin typeface="Calibri" pitchFamily="34" charset="0"/>
                 <a:ea typeface="Calibri" pitchFamily="34" charset="-122"/>
                 <a:cs typeface="Calibri" pitchFamily="34" charset="-120"/>
               </a:rPr>
-              <a:t>7.9 alerts per patient-day across three types; low-glucose alert above its false-alert budget.</a:t>
-            </a:r>
-            <a:endParaRPr lang="en-US" sz="1300" dirty="0"/>
-          </a:p>
-        </p:txBody>
-      </p:sp>
-      <p:sp>
-        <p:nvSpPr>
-          <p:cNvPr id="12" name="Shape 10"/>
-          <p:cNvSpPr/>
-          <p:nvPr/>
-        </p:nvSpPr>
-        <p:spPr>
-          <a:xfrm>
-            <a:off x="6172200" y="2971800"/>
-            <a:ext cx="5440680" cy="1481328"/>
-          </a:xfrm>
-          <a:prstGeom prst="roundRect">
-            <a:avLst>
-              <a:gd name="adj" fmla="val 4938"/>
-            </a:avLst>
-          </a:prstGeom>
-          <a:solidFill>
-            <a:srgbClr val="F3F6F7"/>
-          </a:solidFill>
-          <a:ln w="12700">
-            <a:solidFill>
-              <a:srgbClr val="F3F6F7"/>
-            </a:solidFill>
-            <a:prstDash val="solid"/>
-          </a:ln>
-        </p:spPr>
-      </p:sp>
-      <p:sp>
-        <p:nvSpPr>
-          <p:cNvPr id="13" name="Text 11"/>
-          <p:cNvSpPr txBox="1"/>
-          <p:nvPr/>
-        </p:nvSpPr>
-        <p:spPr>
-          <a:xfrm>
-            <a:off x="6373368" y="3136392"/>
-            <a:ext cx="5038344" cy="365760"/>
-          </a:xfrm>
-          <a:prstGeom prst="rect">
-            <a:avLst/>
-          </a:prstGeom>
-          <a:noFill/>
-          <a:ln/>
-        </p:spPr>
-        <p:txBody>
-          <a:bodyPr wrap="square" lIns="0" tIns="0" rIns="0" bIns="0" rtlCol="0" anchor="t"/>
-          <a:lstStyle/>
-          <a:p>
-            <a:pPr indent="0" marL="0">
-              <a:buNone/>
-            </a:pPr>
-            <a:r>
-              <a:rPr lang="en-US" sz="1500" b="1" dirty="0">
-                <a:solidFill>
-                  <a:srgbClr val="0D5F73"/>
-                </a:solidFill>
-                <a:latin typeface="Calibri" pitchFamily="34" charset="0"/>
-                <a:ea typeface="Calibri" pitchFamily="34" charset="-122"/>
-                <a:cs typeface="Calibri" pitchFamily="34" charset="-120"/>
-              </a:rPr>
-              <a:t>Sensor noise</a:t>
-            </a:r>
-            <a:endParaRPr lang="en-US" sz="1500" dirty="0"/>
-          </a:p>
-        </p:txBody>
-      </p:sp>
-      <p:sp>
-        <p:nvSpPr>
-          <p:cNvPr id="14" name="Text 12"/>
-          <p:cNvSpPr txBox="1"/>
-          <p:nvPr/>
-        </p:nvSpPr>
-        <p:spPr>
-          <a:xfrm>
-            <a:off x="6373368" y="3538728"/>
-            <a:ext cx="5038344" cy="795528"/>
-          </a:xfrm>
-          <a:prstGeom prst="rect">
-            <a:avLst/>
-          </a:prstGeom>
-          <a:noFill/>
-          <a:ln/>
-        </p:spPr>
-        <p:txBody>
-          <a:bodyPr wrap="square" lIns="0" tIns="0" rIns="0" bIns="0" rtlCol="0" anchor="t"/>
-          <a:lstStyle/>
-          <a:p>
-            <a:pPr indent="0" marL="0">
-              <a:buNone/>
-            </a:pPr>
-            <a:r>
-              <a:rPr lang="en-US" sz="1300" dirty="0">
-                <a:solidFill>
-                  <a:srgbClr val="15232A"/>
-                </a:solidFill>
-                <a:latin typeface="Calibri" pitchFamily="34" charset="0"/>
-                <a:ea typeface="Calibri" pitchFamily="34" charset="-122"/>
-                <a:cs typeface="Calibri" pitchFamily="34" charset="-120"/>
-              </a:rPr>
-              <a:t>With ±10 mg/dL random noise added, the 30-min forecast is worse than last value (19.6 vs 15.2). Libre output is pre-smoothed; noisier devices need noise-augmented training.</a:t>
-            </a:r>
-            <a:endParaRPr lang="en-US" sz="1300" dirty="0"/>
-          </a:p>
-        </p:txBody>
-      </p:sp>
-      <p:sp>
-        <p:nvSpPr>
-          <p:cNvPr id="15" name="Shape 13"/>
-          <p:cNvSpPr/>
-          <p:nvPr/>
-        </p:nvSpPr>
-        <p:spPr>
-          <a:xfrm>
-            <a:off x="548640" y="4617720"/>
-            <a:ext cx="5440680" cy="1481328"/>
-          </a:xfrm>
-          <a:prstGeom prst="roundRect">
-            <a:avLst>
-              <a:gd name="adj" fmla="val 4938"/>
-            </a:avLst>
-          </a:prstGeom>
-          <a:solidFill>
-            <a:srgbClr val="F3F6F7"/>
-          </a:solidFill>
-          <a:ln w="12700">
-            <a:solidFill>
-              <a:srgbClr val="F3F6F7"/>
-            </a:solidFill>
-            <a:prstDash val="solid"/>
-          </a:ln>
-        </p:spPr>
-      </p:sp>
-      <p:sp>
-        <p:nvSpPr>
-          <p:cNvPr id="16" name="Text 14"/>
-          <p:cNvSpPr txBox="1"/>
-          <p:nvPr/>
-        </p:nvSpPr>
-        <p:spPr>
-          <a:xfrm>
-            <a:off x="749808" y="4782312"/>
-            <a:ext cx="5038344" cy="365760"/>
-          </a:xfrm>
-          <a:prstGeom prst="rect">
-            <a:avLst/>
-          </a:prstGeom>
-          <a:noFill/>
-          <a:ln/>
-        </p:spPr>
-        <p:txBody>
-          <a:bodyPr wrap="square" lIns="0" tIns="0" rIns="0" bIns="0" rtlCol="0" anchor="t"/>
-          <a:lstStyle/>
-          <a:p>
-            <a:pPr indent="0" marL="0">
-              <a:buNone/>
-            </a:pPr>
-            <a:r>
-              <a:rPr lang="en-US" sz="1500" b="1" dirty="0">
-                <a:solidFill>
-                  <a:srgbClr val="0D5F73"/>
-                </a:solidFill>
-                <a:latin typeface="Calibri" pitchFamily="34" charset="0"/>
-                <a:ea typeface="Calibri" pitchFamily="34" charset="-122"/>
-                <a:cs typeface="Calibri" pitchFamily="34" charset="-120"/>
-              </a:rPr>
-              <a:t>Causality</a:t>
-            </a:r>
-            <a:endParaRPr lang="en-US" sz="1500" dirty="0"/>
-          </a:p>
-        </p:txBody>
-      </p:sp>
-      <p:sp>
-        <p:nvSpPr>
-          <p:cNvPr id="17" name="Text 15"/>
-          <p:cNvSpPr txBox="1"/>
-          <p:nvPr/>
-        </p:nvSpPr>
-        <p:spPr>
-          <a:xfrm>
-            <a:off x="749808" y="5184648"/>
-            <a:ext cx="5038344" cy="795528"/>
-          </a:xfrm>
-          <a:prstGeom prst="rect">
-            <a:avLst/>
-          </a:prstGeom>
-          <a:noFill/>
-          <a:ln/>
-        </p:spPr>
-        <p:txBody>
-          <a:bodyPr wrap="square" lIns="0" tIns="0" rIns="0" bIns="0" rtlCol="0" anchor="t"/>
-          <a:lstStyle/>
-          <a:p>
-            <a:pPr indent="0" marL="0">
-              <a:buNone/>
-            </a:pPr>
-            <a:r>
-              <a:rPr lang="en-US" sz="1300" dirty="0">
-                <a:solidFill>
-                  <a:srgbClr val="15232A"/>
-                </a:solidFill>
-                <a:latin typeface="Calibri" pitchFamily="34" charset="0"/>
-                <a:ea typeface="Calibri" pitchFamily="34" charset="-122"/>
-                <a:cs typeface="Calibri" pitchFamily="34" charset="-120"/>
-              </a:rPr>
-              <a:t>The what-if shows model sensitivity, not the effect of eating or dosing.</a:t>
-            </a:r>
-            <a:endParaRPr lang="en-US" sz="1300" dirty="0"/>
-          </a:p>
-        </p:txBody>
-      </p:sp>
-      <p:sp>
-        <p:nvSpPr>
-          <p:cNvPr id="18" name="Shape 16"/>
-          <p:cNvSpPr/>
-          <p:nvPr/>
-        </p:nvSpPr>
-        <p:spPr>
-          <a:xfrm>
-            <a:off x="6172200" y="4617720"/>
-            <a:ext cx="5440680" cy="1481328"/>
-          </a:xfrm>
-          <a:prstGeom prst="roundRect">
-            <a:avLst>
-              <a:gd name="adj" fmla="val 4938"/>
-            </a:avLst>
-          </a:prstGeom>
-          <a:solidFill>
-            <a:srgbClr val="F3F6F7"/>
-          </a:solidFill>
-          <a:ln w="12700">
-            <a:solidFill>
-              <a:srgbClr val="F3F6F7"/>
-            </a:solidFill>
-            <a:prstDash val="solid"/>
-          </a:ln>
-        </p:spPr>
-      </p:sp>
-      <p:sp>
-        <p:nvSpPr>
-          <p:cNvPr id="19" name="Text 17"/>
-          <p:cNvSpPr txBox="1"/>
-          <p:nvPr/>
-        </p:nvSpPr>
-        <p:spPr>
-          <a:xfrm>
-            <a:off x="6373368" y="4782312"/>
-            <a:ext cx="5038344" cy="365760"/>
-          </a:xfrm>
-          <a:prstGeom prst="rect">
-            <a:avLst/>
-          </a:prstGeom>
-          <a:noFill/>
-          <a:ln/>
-        </p:spPr>
-        <p:txBody>
-          <a:bodyPr wrap="square" lIns="0" tIns="0" rIns="0" bIns="0" rtlCol="0" anchor="t"/>
-          <a:lstStyle/>
-          <a:p>
-            <a:pPr indent="0" marL="0">
-              <a:buNone/>
-            </a:pPr>
-            <a:r>
-              <a:rPr lang="en-US" sz="1500" b="1" dirty="0">
-                <a:solidFill>
-                  <a:srgbClr val="0D5F73"/>
-                </a:solidFill>
-                <a:latin typeface="Calibri" pitchFamily="34" charset="0"/>
-                <a:ea typeface="Calibri" pitchFamily="34" charset="-122"/>
-                <a:cs typeface="Calibri" pitchFamily="34" charset="-120"/>
-              </a:rPr>
-              <a:t>Evidence level</a:t>
-            </a:r>
-            <a:endParaRPr lang="en-US" sz="1500" dirty="0"/>
-          </a:p>
-        </p:txBody>
-      </p:sp>
-      <p:sp>
-        <p:nvSpPr>
-          <p:cNvPr id="20" name="Text 18"/>
-          <p:cNvSpPr txBox="1"/>
-          <p:nvPr/>
-        </p:nvSpPr>
-        <p:spPr>
-          <a:xfrm>
-            <a:off x="6373368" y="5184648"/>
-            <a:ext cx="5038344" cy="795528"/>
-          </a:xfrm>
-          <a:prstGeom prst="rect">
-            <a:avLst/>
-          </a:prstGeom>
-          <a:noFill/>
-          <a:ln/>
-        </p:spPr>
-        <p:txBody>
-          <a:bodyPr wrap="square" lIns="0" tIns="0" rIns="0" bIns="0" rtlCol="0" anchor="t"/>
-          <a:lstStyle/>
-          <a:p>
-            <a:pPr indent="0" marL="0">
-              <a:buNone/>
-            </a:pPr>
-            <a:r>
-              <a:rPr lang="en-US" sz="1300" dirty="0">
-                <a:solidFill>
-                  <a:srgbClr val="15232A"/>
-                </a:solidFill>
-                <a:latin typeface="Calibri" pitchFamily="34" charset="0"/>
-                <a:ea typeface="Calibri" pitchFamily="34" charset="-122"/>
-                <a:cs typeface="Calibri" pitchFamily="34" charset="-120"/>
-              </a:rPr>
-              <a:t>Retrospective only. No prospective, real-time or outcome study.</a:t>
-            </a:r>
-            <a:endParaRPr lang="en-US" sz="1300" dirty="0"/>
+              <a:t>Also: forecast ledger · what-if · FHIR R4 record · live streaming · evidence page</a:t>
+            </a:r>
+            <a:endParaRPr lang="en-US" sz="1250" dirty="0"/>
           </a:p>
         </p:txBody>
       </p:sp>
@@ -11235,7 +10483,7 @@
                 <a:ea typeface="Cambria" pitchFamily="34" charset="-122"/>
                 <a:cs typeface="Cambria" pitchFamily="34" charset="-120"/>
               </a:rPr>
-              <a:t>Path to a real product</a:t>
+              <a:t>Limitations we want the jury to know</a:t>
             </a:r>
             <a:endParaRPr lang="en-US" sz="3000" dirty="0"/>
           </a:p>
@@ -11250,11 +10498,11 @@
         <p:spPr>
           <a:xfrm>
             <a:off x="548640" y="1325880"/>
-            <a:ext cx="3566160" cy="2377440"/>
+            <a:ext cx="5440680" cy="1481328"/>
           </a:xfrm>
           <a:prstGeom prst="roundRect">
             <a:avLst>
-              <a:gd name="adj" fmla="val 3077"/>
+              <a:gd name="adj" fmla="val 4938"/>
             </a:avLst>
           </a:prstGeom>
           <a:solidFill>
@@ -11277,7 +10525,7 @@
         <p:spPr>
           <a:xfrm>
             <a:off x="749808" y="1490472"/>
-            <a:ext cx="3163824" cy="365760"/>
+            <a:ext cx="5038344" cy="365760"/>
           </a:xfrm>
           <a:prstGeom prst="rect">
             <a:avLst/>
@@ -11301,7 +10549,7 @@
                 <a:ea typeface="Calibri" pitchFamily="34" charset="-122"/>
                 <a:cs typeface="Calibri" pitchFamily="34" charset="-120"/>
               </a:rPr>
-              <a:t>Who would use and buy it (to validate)</a:t>
+              <a:t>Population</a:t>
             </a:r>
             <a:endParaRPr lang="en-US" sz="1500" dirty="0"/>
           </a:p>
@@ -11316,7 +10564,7 @@
         <p:spPr>
           <a:xfrm>
             <a:off x="749808" y="1892808"/>
-            <a:ext cx="3163824" cy="1691640"/>
+            <a:ext cx="5038344" cy="795528"/>
           </a:xfrm>
           <a:prstGeom prst="rect">
             <a:avLst/>
@@ -11340,7 +10588,7 @@
                 <a:ea typeface="Calibri" pitchFamily="34" charset="-122"/>
                 <a:cs typeface="Calibri" pitchFamily="34" charset="-120"/>
               </a:rPr>
-              <a:t>Diabetes clinic chains and digital-therapeutics programmes already running connected-CGM coaching. Value: triage of coach and educator time. Willingness to pay is untested.</a:t>
+              <a:t>Chinese hospital cohort, 2019–2021, partly in-hospital with regular meal times. Not Indian. External check covers the US, not India.</a:t>
             </a:r>
             <a:endParaRPr lang="en-US" sz="1300" dirty="0"/>
           </a:p>
@@ -11354,12 +10602,12 @@
         </p:nvSpPr>
         <p:spPr>
           <a:xfrm>
-            <a:off x="4315968" y="1325880"/>
-            <a:ext cx="3566160" cy="2377440"/>
+            <a:off x="6172200" y="1325880"/>
+            <a:ext cx="5440680" cy="1481328"/>
           </a:xfrm>
           <a:prstGeom prst="roundRect">
             <a:avLst>
-              <a:gd name="adj" fmla="val 3077"/>
+              <a:gd name="adj" fmla="val 4938"/>
             </a:avLst>
           </a:prstGeom>
           <a:solidFill>
@@ -11381,8 +10629,8 @@
         </p:nvSpPr>
         <p:spPr>
           <a:xfrm>
-            <a:off x="4517136" y="1490472"/>
-            <a:ext cx="3163824" cy="365760"/>
+            <a:off x="6373368" y="1490472"/>
+            <a:ext cx="5038344" cy="365760"/>
           </a:xfrm>
           <a:prstGeom prst="rect">
             <a:avLst/>
@@ -11406,7 +10654,7 @@
                 <a:ea typeface="Calibri" pitchFamily="34" charset="-122"/>
                 <a:cs typeface="Calibri" pitchFamily="34" charset="-120"/>
               </a:rPr>
-              <a:t>What a buyer would require</a:t>
+              <a:t>Size</a:t>
             </a:r>
             <a:endParaRPr lang="en-US" sz="1500" dirty="0"/>
           </a:p>
@@ -11420,8 +10668,8 @@
         </p:nvSpPr>
         <p:spPr>
           <a:xfrm>
-            <a:off x="4517136" y="1892808"/>
-            <a:ext cx="3163824" cy="1691640"/>
+            <a:off x="6373368" y="1892808"/>
+            <a:ext cx="5038344" cy="795528"/>
           </a:xfrm>
           <a:prstGeom prst="rect">
             <a:avLst/>
@@ -11445,7 +10693,7 @@
                 <a:ea typeface="Calibri" pitchFamily="34" charset="-122"/>
                 <a:cs typeface="Calibri" pitchFamily="34" charset="-120"/>
               </a:rPr>
-              <a:t>Validation on Indian patients and diets, a prospective pilot with outcome measures, integration with sensor clouds and the clinic EHR (ABDM FHIR).</a:t>
+              <a:t>100 patients, 3–14 days each; 20 test patients. Hence bootstrap CIs on every claim.</a:t>
             </a:r>
             <a:endParaRPr lang="en-US" sz="1300" dirty="0"/>
           </a:p>
@@ -11459,12 +10707,12 @@
         </p:nvSpPr>
         <p:spPr>
           <a:xfrm>
-            <a:off x="8083296" y="1325880"/>
-            <a:ext cx="3529584" cy="2377440"/>
+            <a:off x="548640" y="2971800"/>
+            <a:ext cx="5440680" cy="1481328"/>
           </a:xfrm>
           <a:prstGeom prst="roundRect">
             <a:avLst>
-              <a:gd name="adj" fmla="val 3077"/>
+              <a:gd name="adj" fmla="val 4938"/>
             </a:avLst>
           </a:prstGeom>
           <a:solidFill>
@@ -11486,8 +10734,8 @@
         </p:nvSpPr>
         <p:spPr>
           <a:xfrm>
-            <a:off x="8284464" y="1490472"/>
-            <a:ext cx="3127248" cy="365760"/>
+            <a:off x="749808" y="3136392"/>
+            <a:ext cx="5038344" cy="365760"/>
           </a:xfrm>
           <a:prstGeom prst="rect">
             <a:avLst/>
@@ -11511,7 +10759,7 @@
                 <a:ea typeface="Calibri" pitchFamily="34" charset="-122"/>
                 <a:cs typeface="Calibri" pitchFamily="34" charset="-120"/>
               </a:rPr>
-              <a:t>Regulation and privacy</a:t>
+              <a:t>Alert budget</a:t>
             </a:r>
             <a:endParaRPr lang="en-US" sz="1500" dirty="0"/>
           </a:p>
@@ -11525,8 +10773,8 @@
         </p:nvSpPr>
         <p:spPr>
           <a:xfrm>
-            <a:off x="8284464" y="1892808"/>
-            <a:ext cx="3127248" cy="1691640"/>
+            <a:off x="749808" y="3538728"/>
+            <a:ext cx="5038344" cy="795528"/>
           </a:xfrm>
           <a:prstGeom prst="rect">
             <a:avLst/>
@@ -11550,7 +10798,7 @@
                 <a:ea typeface="Calibri" pitchFamily="34" charset="-122"/>
                 <a:cs typeface="Calibri" pitchFamily="34" charset="-120"/>
               </a:rPr>
-              <a:t>Likely software as a medical device under India's Medical Devices Rules 2017 (CDSCO draft guidance, Oct 2025). Real data falls under the DPDP Act 2023 and Rules 2025.</a:t>
+              <a:t>1.38 false alerts per patient-day on test vs a development budget of 1.0; fewer alerts means some episodes are missed.</a:t>
             </a:r>
             <a:endParaRPr lang="en-US" sz="1300" dirty="0"/>
           </a:p>
@@ -11558,14 +10806,41 @@
       </p:sp>
       <p:sp>
         <p:nvSpPr>
-          <p:cNvPr id="12" name="Text 10"/>
+          <p:cNvPr id="12" name="Shape 10"/>
+          <p:cNvSpPr/>
+          <p:nvPr/>
+        </p:nvSpPr>
+        <p:spPr>
+          <a:xfrm>
+            <a:off x="6172200" y="2971800"/>
+            <a:ext cx="5440680" cy="1481328"/>
+          </a:xfrm>
+          <a:prstGeom prst="roundRect">
+            <a:avLst>
+              <a:gd name="adj" fmla="val 4938"/>
+            </a:avLst>
+          </a:prstGeom>
+          <a:solidFill>
+            <a:srgbClr val="F3F6F7"/>
+          </a:solidFill>
+          <a:ln w="12700">
+            <a:solidFill>
+              <a:srgbClr val="F3F6F7"/>
+            </a:solidFill>
+            <a:prstDash val="solid"/>
+          </a:ln>
+        </p:spPr>
+      </p:sp>
+      <p:sp>
+        <p:nvSpPr>
+          <p:cNvPr id="13" name="Text 11"/>
           <p:cNvSpPr txBox="1"/>
           <p:nvPr/>
         </p:nvSpPr>
         <p:spPr>
           <a:xfrm>
-            <a:off x="548640" y="3977640"/>
-            <a:ext cx="5486400" cy="365760"/>
+            <a:off x="6373368" y="3136392"/>
+            <a:ext cx="5038344" cy="365760"/>
           </a:xfrm>
           <a:prstGeom prst="rect">
             <a:avLst/>
@@ -11581,7 +10856,7 @@
               <a:buNone/>
             </a:pPr>
             <a:r>
-              <a:rPr lang="en-US" sz="1700" b="1" dirty="0">
+              <a:rPr lang="en-US" sz="1500" b="1" dirty="0">
                 <a:solidFill>
                   <a:srgbClr val="0D5F73"/>
                 </a:solidFill>
@@ -11589,22 +10864,22 @@
                 <a:ea typeface="Calibri" pitchFamily="34" charset="-122"/>
                 <a:cs typeface="Calibri" pitchFamily="34" charset="-120"/>
               </a:rPr>
-              <a:t>Next steps</a:t>
-            </a:r>
-            <a:endParaRPr lang="en-US" sz="1700" dirty="0"/>
-          </a:p>
-        </p:txBody>
-      </p:sp>
-      <p:sp>
-        <p:nvSpPr>
-          <p:cNvPr id="13" name="Text 11"/>
+              <a:t>Test reuse</a:t>
+            </a:r>
+            <a:endParaRPr lang="en-US" sz="1500" dirty="0"/>
+          </a:p>
+        </p:txBody>
+      </p:sp>
+      <p:sp>
+        <p:nvSpPr>
+          <p:cNvPr id="14" name="Text 12"/>
           <p:cNvSpPr txBox="1"/>
           <p:nvPr/>
         </p:nvSpPr>
         <p:spPr>
           <a:xfrm>
-            <a:off x="548640" y="4389120"/>
-            <a:ext cx="11064240" cy="1828800"/>
+            <a:off x="6373368" y="3538728"/>
+            <a:ext cx="5038344" cy="795528"/>
           </a:xfrm>
           <a:prstGeom prst="rect">
             <a:avLst/>
@@ -11616,15 +10891,11 @@
           <a:bodyPr wrap="square" lIns="0" tIns="0" rIns="0" bIns="0" rtlCol="0" anchor="t"/>
           <a:lstStyle/>
           <a:p>
-            <a:pPr marL="203200" indent="-203200">
-              <a:spcAft>
-                <a:spcPts val="600"/>
-              </a:spcAft>
-              <a:buSzPct val="100000"/>
-              <a:buChar char="•"/>
-            </a:pPr>
-            <a:r>
-              <a:rPr lang="en-US" sz="1400" dirty="0">
+            <a:pPr indent="0" marL="0">
+              <a:buNone/>
+            </a:pPr>
+            <a:r>
+              <a:rPr lang="en-US" sz="1300" dirty="0">
                 <a:solidFill>
                   <a:srgbClr val="15232A"/>
                 </a:solidFill>
@@ -11632,41 +10903,104 @@
                 <a:ea typeface="Calibri" pitchFamily="34" charset="-122"/>
                 <a:cs typeface="Calibri" pitchFamily="34" charset="-120"/>
               </a:rPr>
-              <a:t>Merge the three alert types into one stream with a shared cooldown; set budgets with clinicians</a:t>
-            </a:r>
-            <a:endParaRPr lang="en-US" sz="1500" dirty="0"/>
-          </a:p>
-          <a:p>
-            <a:pPr marL="203200" indent="-203200">
-              <a:spcAft>
-                <a:spcPts val="600"/>
-              </a:spcAft>
-              <a:buSzPct val="100000"/>
-              <a:buChar char="•"/>
-            </a:pPr>
-            <a:r>
-              <a:rPr lang="en-US" sz="1400" dirty="0">
-                <a:solidFill>
-                  <a:srgbClr val="15232A"/>
+              <a:t>The test set was scored twice (v1, v2). v2 choices used development data only, but were motivated by what the v1 test revealed; both results are reported.</a:t>
+            </a:r>
+            <a:endParaRPr lang="en-US" sz="1300" dirty="0"/>
+          </a:p>
+        </p:txBody>
+      </p:sp>
+      <p:sp>
+        <p:nvSpPr>
+          <p:cNvPr id="15" name="Shape 13"/>
+          <p:cNvSpPr/>
+          <p:nvPr/>
+        </p:nvSpPr>
+        <p:spPr>
+          <a:xfrm>
+            <a:off x="548640" y="4617720"/>
+            <a:ext cx="5440680" cy="1481328"/>
+          </a:xfrm>
+          <a:prstGeom prst="roundRect">
+            <a:avLst>
+              <a:gd name="adj" fmla="val 4938"/>
+            </a:avLst>
+          </a:prstGeom>
+          <a:solidFill>
+            <a:srgbClr val="F3F6F7"/>
+          </a:solidFill>
+          <a:ln w="12700">
+            <a:solidFill>
+              <a:srgbClr val="F3F6F7"/>
+            </a:solidFill>
+            <a:prstDash val="solid"/>
+          </a:ln>
+        </p:spPr>
+      </p:sp>
+      <p:sp>
+        <p:nvSpPr>
+          <p:cNvPr id="16" name="Text 14"/>
+          <p:cNvSpPr txBox="1"/>
+          <p:nvPr/>
+        </p:nvSpPr>
+        <p:spPr>
+          <a:xfrm>
+            <a:off x="749808" y="4782312"/>
+            <a:ext cx="5038344" cy="365760"/>
+          </a:xfrm>
+          <a:prstGeom prst="rect">
+            <a:avLst/>
+          </a:prstGeom>
+          <a:noFill/>
+          <a:ln/>
+        </p:spPr>
+        <p:txBody>
+          <a:bodyPr wrap="square" lIns="0" tIns="0" rIns="0" bIns="0" rtlCol="0" anchor="t"/>
+          <a:lstStyle/>
+          <a:p>
+            <a:pPr indent="0" marL="0">
+              <a:buNone/>
+            </a:pPr>
+            <a:r>
+              <a:rPr lang="en-US" sz="1500" b="1" dirty="0">
+                <a:solidFill>
+                  <a:srgbClr val="0D5F73"/>
                 </a:solidFill>
                 <a:latin typeface="Calibri" pitchFamily="34" charset="0"/>
                 <a:ea typeface="Calibri" pitchFamily="34" charset="-122"/>
                 <a:cs typeface="Calibri" pitchFamily="34" charset="-120"/>
               </a:rPr>
-              <a:t>Noise-augmented training and a noise detector that widens intervals or abstains</a:t>
+              <a:t>Causality</a:t>
             </a:r>
             <a:endParaRPr lang="en-US" sz="1500" dirty="0"/>
           </a:p>
-          <a:p>
-            <a:pPr marL="203200" indent="-203200">
-              <a:spcAft>
-                <a:spcPts val="600"/>
-              </a:spcAft>
-              <a:buSzPct val="100000"/>
-              <a:buChar char="•"/>
-            </a:pPr>
-            <a:r>
-              <a:rPr lang="en-US" sz="1400" dirty="0">
+        </p:txBody>
+      </p:sp>
+      <p:sp>
+        <p:nvSpPr>
+          <p:cNvPr id="17" name="Text 15"/>
+          <p:cNvSpPr txBox="1"/>
+          <p:nvPr/>
+        </p:nvSpPr>
+        <p:spPr>
+          <a:xfrm>
+            <a:off x="749808" y="5184648"/>
+            <a:ext cx="5038344" cy="795528"/>
+          </a:xfrm>
+          <a:prstGeom prst="rect">
+            <a:avLst/>
+          </a:prstGeom>
+          <a:noFill/>
+          <a:ln/>
+        </p:spPr>
+        <p:txBody>
+          <a:bodyPr wrap="square" lIns="0" tIns="0" rIns="0" bIns="0" rtlCol="0" anchor="t"/>
+          <a:lstStyle/>
+          <a:p>
+            <a:pPr indent="0" marL="0">
+              <a:buNone/>
+            </a:pPr>
+            <a:r>
+              <a:rPr lang="en-US" sz="1300" dirty="0">
                 <a:solidFill>
                   <a:srgbClr val="15232A"/>
                 </a:solidFill>
@@ -11674,30 +11008,114 @@
                 <a:ea typeface="Calibri" pitchFamily="34" charset="-122"/>
                 <a:cs typeface="Calibri" pitchFamily="34" charset="-120"/>
               </a:rPr>
-              <a:t>A prospective, observation-only pilot with an Indian diabetes clinic (forecasts hidden from care until validated)</a:t>
-            </a:r>
-            <a:endParaRPr lang="en-US" sz="1500" dirty="0"/>
-          </a:p>
-          <a:p>
-            <a:pPr marL="203200" indent="-203200">
-              <a:spcAft>
-                <a:spcPts val="600"/>
-              </a:spcAft>
-              <a:buSzPct val="100000"/>
-              <a:buChar char="•"/>
-            </a:pPr>
-            <a:r>
-              <a:rPr lang="en-US" sz="1400" dirty="0">
-                <a:solidFill>
-                  <a:srgbClr val="15232A"/>
+              <a:t>The what-if shows model sensitivity, not the effect of eating or dosing.</a:t>
+            </a:r>
+            <a:endParaRPr lang="en-US" sz="1300" dirty="0"/>
+          </a:p>
+        </p:txBody>
+      </p:sp>
+      <p:sp>
+        <p:nvSpPr>
+          <p:cNvPr id="18" name="Shape 16"/>
+          <p:cNvSpPr/>
+          <p:nvPr/>
+        </p:nvSpPr>
+        <p:spPr>
+          <a:xfrm>
+            <a:off x="6172200" y="4617720"/>
+            <a:ext cx="5440680" cy="1481328"/>
+          </a:xfrm>
+          <a:prstGeom prst="roundRect">
+            <a:avLst>
+              <a:gd name="adj" fmla="val 4938"/>
+            </a:avLst>
+          </a:prstGeom>
+          <a:solidFill>
+            <a:srgbClr val="F3F6F7"/>
+          </a:solidFill>
+          <a:ln w="12700">
+            <a:solidFill>
+              <a:srgbClr val="F3F6F7"/>
+            </a:solidFill>
+            <a:prstDash val="solid"/>
+          </a:ln>
+        </p:spPr>
+      </p:sp>
+      <p:sp>
+        <p:nvSpPr>
+          <p:cNvPr id="19" name="Text 17"/>
+          <p:cNvSpPr txBox="1"/>
+          <p:nvPr/>
+        </p:nvSpPr>
+        <p:spPr>
+          <a:xfrm>
+            <a:off x="6373368" y="4782312"/>
+            <a:ext cx="5038344" cy="365760"/>
+          </a:xfrm>
+          <a:prstGeom prst="rect">
+            <a:avLst/>
+          </a:prstGeom>
+          <a:noFill/>
+          <a:ln/>
+        </p:spPr>
+        <p:txBody>
+          <a:bodyPr wrap="square" lIns="0" tIns="0" rIns="0" bIns="0" rtlCol="0" anchor="t"/>
+          <a:lstStyle/>
+          <a:p>
+            <a:pPr indent="0" marL="0">
+              <a:buNone/>
+            </a:pPr>
+            <a:r>
+              <a:rPr lang="en-US" sz="1500" b="1" dirty="0">
+                <a:solidFill>
+                  <a:srgbClr val="0D5F73"/>
                 </a:solidFill>
                 <a:latin typeface="Calibri" pitchFamily="34" charset="0"/>
                 <a:ea typeface="Calibri" pitchFamily="34" charset="-122"/>
                 <a:cs typeface="Calibri" pitchFamily="34" charset="-120"/>
               </a:rPr>
-              <a:t>Interoperability: CGM vendor APIs and ABDM-compliant FHIR exchange</a:t>
+              <a:t>Evidence level</a:t>
             </a:r>
             <a:endParaRPr lang="en-US" sz="1500" dirty="0"/>
+          </a:p>
+        </p:txBody>
+      </p:sp>
+      <p:sp>
+        <p:nvSpPr>
+          <p:cNvPr id="20" name="Text 18"/>
+          <p:cNvSpPr txBox="1"/>
+          <p:nvPr/>
+        </p:nvSpPr>
+        <p:spPr>
+          <a:xfrm>
+            <a:off x="6373368" y="5184648"/>
+            <a:ext cx="5038344" cy="795528"/>
+          </a:xfrm>
+          <a:prstGeom prst="rect">
+            <a:avLst/>
+          </a:prstGeom>
+          <a:noFill/>
+          <a:ln/>
+        </p:spPr>
+        <p:txBody>
+          <a:bodyPr wrap="square" lIns="0" tIns="0" rIns="0" bIns="0" rtlCol="0" anchor="t"/>
+          <a:lstStyle/>
+          <a:p>
+            <a:pPr indent="0" marL="0">
+              <a:buNone/>
+            </a:pPr>
+            <a:r>
+              <a:rPr lang="en-US" sz="1300" dirty="0">
+                <a:solidFill>
+                  <a:srgbClr val="15232A"/>
+                </a:solidFill>
+                <a:latin typeface="Calibri" pitchFamily="34" charset="0"/>
+                <a:ea typeface="Calibri" pitchFamily="34" charset="-122"/>
+                <a:cs typeface="Calibri" pitchFamily="34" charset="-120"/>
+              </a:rPr>
+              <a:t>Retrospective only. No prospective, real-time or outcome study.</a:t>
+            </a:r>
+            <a:endParaRPr lang="en-US" sz="1300" dirty="0"/>
           </a:p>
         </p:txBody>
       </p:sp>
@@ -11784,6 +11202,580 @@
         </p:nvSpPr>
         <p:spPr>
           <a:xfrm>
+            <a:off x="548640" y="320040"/>
+            <a:ext cx="11064240" cy="777240"/>
+          </a:xfrm>
+          <a:prstGeom prst="rect">
+            <a:avLst/>
+          </a:prstGeom>
+          <a:noFill/>
+          <a:ln/>
+        </p:spPr>
+        <p:txBody>
+          <a:bodyPr wrap="square" lIns="0" tIns="0" rIns="0" bIns="0" rtlCol="0" anchor="ctr"/>
+          <a:lstStyle/>
+          <a:p>
+            <a:pPr algn="l" indent="0" marL="0">
+              <a:buNone/>
+            </a:pPr>
+            <a:r>
+              <a:rPr lang="en-US" sz="3000" b="1" dirty="0">
+                <a:solidFill>
+                  <a:srgbClr val="15232A"/>
+                </a:solidFill>
+                <a:latin typeface="Cambria" pitchFamily="34" charset="0"/>
+                <a:ea typeface="Cambria" pitchFamily="34" charset="-122"/>
+                <a:cs typeface="Cambria" pitchFamily="34" charset="-120"/>
+              </a:rPr>
+              <a:t>Path to a real product</a:t>
+            </a:r>
+            <a:endParaRPr lang="en-US" sz="3000" dirty="0"/>
+          </a:p>
+        </p:txBody>
+      </p:sp>
+      <p:sp>
+        <p:nvSpPr>
+          <p:cNvPr id="3" name="Shape 1"/>
+          <p:cNvSpPr/>
+          <p:nvPr/>
+        </p:nvSpPr>
+        <p:spPr>
+          <a:xfrm>
+            <a:off x="548640" y="1325880"/>
+            <a:ext cx="3566160" cy="2377440"/>
+          </a:xfrm>
+          <a:prstGeom prst="roundRect">
+            <a:avLst>
+              <a:gd name="adj" fmla="val 3077"/>
+            </a:avLst>
+          </a:prstGeom>
+          <a:solidFill>
+            <a:srgbClr val="F3F6F7"/>
+          </a:solidFill>
+          <a:ln w="12700">
+            <a:solidFill>
+              <a:srgbClr val="F3F6F7"/>
+            </a:solidFill>
+            <a:prstDash val="solid"/>
+          </a:ln>
+        </p:spPr>
+      </p:sp>
+      <p:sp>
+        <p:nvSpPr>
+          <p:cNvPr id="4" name="Text 2"/>
+          <p:cNvSpPr txBox="1"/>
+          <p:nvPr/>
+        </p:nvSpPr>
+        <p:spPr>
+          <a:xfrm>
+            <a:off x="749808" y="1490472"/>
+            <a:ext cx="3163824" cy="365760"/>
+          </a:xfrm>
+          <a:prstGeom prst="rect">
+            <a:avLst/>
+          </a:prstGeom>
+          <a:noFill/>
+          <a:ln/>
+        </p:spPr>
+        <p:txBody>
+          <a:bodyPr wrap="square" lIns="0" tIns="0" rIns="0" bIns="0" rtlCol="0" anchor="t"/>
+          <a:lstStyle/>
+          <a:p>
+            <a:pPr indent="0" marL="0">
+              <a:buNone/>
+            </a:pPr>
+            <a:r>
+              <a:rPr lang="en-US" sz="1500" b="1" dirty="0">
+                <a:solidFill>
+                  <a:srgbClr val="0D5F73"/>
+                </a:solidFill>
+                <a:latin typeface="Calibri" pitchFamily="34" charset="0"/>
+                <a:ea typeface="Calibri" pitchFamily="34" charset="-122"/>
+                <a:cs typeface="Calibri" pitchFamily="34" charset="-120"/>
+              </a:rPr>
+              <a:t>Who would use and buy it (to validate)</a:t>
+            </a:r>
+            <a:endParaRPr lang="en-US" sz="1500" dirty="0"/>
+          </a:p>
+        </p:txBody>
+      </p:sp>
+      <p:sp>
+        <p:nvSpPr>
+          <p:cNvPr id="5" name="Text 3"/>
+          <p:cNvSpPr txBox="1"/>
+          <p:nvPr/>
+        </p:nvSpPr>
+        <p:spPr>
+          <a:xfrm>
+            <a:off x="749808" y="1892808"/>
+            <a:ext cx="3163824" cy="1691640"/>
+          </a:xfrm>
+          <a:prstGeom prst="rect">
+            <a:avLst/>
+          </a:prstGeom>
+          <a:noFill/>
+          <a:ln/>
+        </p:spPr>
+        <p:txBody>
+          <a:bodyPr wrap="square" lIns="0" tIns="0" rIns="0" bIns="0" rtlCol="0" anchor="t"/>
+          <a:lstStyle/>
+          <a:p>
+            <a:pPr indent="0" marL="0">
+              <a:buNone/>
+            </a:pPr>
+            <a:r>
+              <a:rPr lang="en-US" sz="1300" dirty="0">
+                <a:solidFill>
+                  <a:srgbClr val="15232A"/>
+                </a:solidFill>
+                <a:latin typeface="Calibri" pitchFamily="34" charset="0"/>
+                <a:ea typeface="Calibri" pitchFamily="34" charset="-122"/>
+                <a:cs typeface="Calibri" pitchFamily="34" charset="-120"/>
+              </a:rPr>
+              <a:t>Diabetes clinic chains and digital-therapeutics programmes already running connected-CGM coaching. Value: triage of coach and educator time. Willingness to pay is untested.</a:t>
+            </a:r>
+            <a:endParaRPr lang="en-US" sz="1300" dirty="0"/>
+          </a:p>
+        </p:txBody>
+      </p:sp>
+      <p:sp>
+        <p:nvSpPr>
+          <p:cNvPr id="6" name="Shape 4"/>
+          <p:cNvSpPr/>
+          <p:nvPr/>
+        </p:nvSpPr>
+        <p:spPr>
+          <a:xfrm>
+            <a:off x="4315968" y="1325880"/>
+            <a:ext cx="3566160" cy="2377440"/>
+          </a:xfrm>
+          <a:prstGeom prst="roundRect">
+            <a:avLst>
+              <a:gd name="adj" fmla="val 3077"/>
+            </a:avLst>
+          </a:prstGeom>
+          <a:solidFill>
+            <a:srgbClr val="F3F6F7"/>
+          </a:solidFill>
+          <a:ln w="12700">
+            <a:solidFill>
+              <a:srgbClr val="F3F6F7"/>
+            </a:solidFill>
+            <a:prstDash val="solid"/>
+          </a:ln>
+        </p:spPr>
+      </p:sp>
+      <p:sp>
+        <p:nvSpPr>
+          <p:cNvPr id="7" name="Text 5"/>
+          <p:cNvSpPr txBox="1"/>
+          <p:nvPr/>
+        </p:nvSpPr>
+        <p:spPr>
+          <a:xfrm>
+            <a:off x="4517136" y="1490472"/>
+            <a:ext cx="3163824" cy="365760"/>
+          </a:xfrm>
+          <a:prstGeom prst="rect">
+            <a:avLst/>
+          </a:prstGeom>
+          <a:noFill/>
+          <a:ln/>
+        </p:spPr>
+        <p:txBody>
+          <a:bodyPr wrap="square" lIns="0" tIns="0" rIns="0" bIns="0" rtlCol="0" anchor="t"/>
+          <a:lstStyle/>
+          <a:p>
+            <a:pPr indent="0" marL="0">
+              <a:buNone/>
+            </a:pPr>
+            <a:r>
+              <a:rPr lang="en-US" sz="1500" b="1" dirty="0">
+                <a:solidFill>
+                  <a:srgbClr val="0D5F73"/>
+                </a:solidFill>
+                <a:latin typeface="Calibri" pitchFamily="34" charset="0"/>
+                <a:ea typeface="Calibri" pitchFamily="34" charset="-122"/>
+                <a:cs typeface="Calibri" pitchFamily="34" charset="-120"/>
+              </a:rPr>
+              <a:t>What a buyer would require</a:t>
+            </a:r>
+            <a:endParaRPr lang="en-US" sz="1500" dirty="0"/>
+          </a:p>
+        </p:txBody>
+      </p:sp>
+      <p:sp>
+        <p:nvSpPr>
+          <p:cNvPr id="8" name="Text 6"/>
+          <p:cNvSpPr txBox="1"/>
+          <p:nvPr/>
+        </p:nvSpPr>
+        <p:spPr>
+          <a:xfrm>
+            <a:off x="4517136" y="1892808"/>
+            <a:ext cx="3163824" cy="1691640"/>
+          </a:xfrm>
+          <a:prstGeom prst="rect">
+            <a:avLst/>
+          </a:prstGeom>
+          <a:noFill/>
+          <a:ln/>
+        </p:spPr>
+        <p:txBody>
+          <a:bodyPr wrap="square" lIns="0" tIns="0" rIns="0" bIns="0" rtlCol="0" anchor="t"/>
+          <a:lstStyle/>
+          <a:p>
+            <a:pPr indent="0" marL="0">
+              <a:buNone/>
+            </a:pPr>
+            <a:r>
+              <a:rPr lang="en-US" sz="1300" dirty="0">
+                <a:solidFill>
+                  <a:srgbClr val="15232A"/>
+                </a:solidFill>
+                <a:latin typeface="Calibri" pitchFamily="34" charset="0"/>
+                <a:ea typeface="Calibri" pitchFamily="34" charset="-122"/>
+                <a:cs typeface="Calibri" pitchFamily="34" charset="-120"/>
+              </a:rPr>
+              <a:t>Validation on Indian patients and diets, a prospective pilot with outcome measures, integration with sensor clouds and the clinic EHR (ABDM FHIR).</a:t>
+            </a:r>
+            <a:endParaRPr lang="en-US" sz="1300" dirty="0"/>
+          </a:p>
+        </p:txBody>
+      </p:sp>
+      <p:sp>
+        <p:nvSpPr>
+          <p:cNvPr id="9" name="Shape 7"/>
+          <p:cNvSpPr/>
+          <p:nvPr/>
+        </p:nvSpPr>
+        <p:spPr>
+          <a:xfrm>
+            <a:off x="8083296" y="1325880"/>
+            <a:ext cx="3529584" cy="2377440"/>
+          </a:xfrm>
+          <a:prstGeom prst="roundRect">
+            <a:avLst>
+              <a:gd name="adj" fmla="val 3077"/>
+            </a:avLst>
+          </a:prstGeom>
+          <a:solidFill>
+            <a:srgbClr val="F3F6F7"/>
+          </a:solidFill>
+          <a:ln w="12700">
+            <a:solidFill>
+              <a:srgbClr val="F3F6F7"/>
+            </a:solidFill>
+            <a:prstDash val="solid"/>
+          </a:ln>
+        </p:spPr>
+      </p:sp>
+      <p:sp>
+        <p:nvSpPr>
+          <p:cNvPr id="10" name="Text 8"/>
+          <p:cNvSpPr txBox="1"/>
+          <p:nvPr/>
+        </p:nvSpPr>
+        <p:spPr>
+          <a:xfrm>
+            <a:off x="8284464" y="1490472"/>
+            <a:ext cx="3127248" cy="365760"/>
+          </a:xfrm>
+          <a:prstGeom prst="rect">
+            <a:avLst/>
+          </a:prstGeom>
+          <a:noFill/>
+          <a:ln/>
+        </p:spPr>
+        <p:txBody>
+          <a:bodyPr wrap="square" lIns="0" tIns="0" rIns="0" bIns="0" rtlCol="0" anchor="t"/>
+          <a:lstStyle/>
+          <a:p>
+            <a:pPr indent="0" marL="0">
+              <a:buNone/>
+            </a:pPr>
+            <a:r>
+              <a:rPr lang="en-US" sz="1500" b="1" dirty="0">
+                <a:solidFill>
+                  <a:srgbClr val="0D5F73"/>
+                </a:solidFill>
+                <a:latin typeface="Calibri" pitchFamily="34" charset="0"/>
+                <a:ea typeface="Calibri" pitchFamily="34" charset="-122"/>
+                <a:cs typeface="Calibri" pitchFamily="34" charset="-120"/>
+              </a:rPr>
+              <a:t>Regulation and privacy</a:t>
+            </a:r>
+            <a:endParaRPr lang="en-US" sz="1500" dirty="0"/>
+          </a:p>
+        </p:txBody>
+      </p:sp>
+      <p:sp>
+        <p:nvSpPr>
+          <p:cNvPr id="11" name="Text 9"/>
+          <p:cNvSpPr txBox="1"/>
+          <p:nvPr/>
+        </p:nvSpPr>
+        <p:spPr>
+          <a:xfrm>
+            <a:off x="8284464" y="1892808"/>
+            <a:ext cx="3127248" cy="1691640"/>
+          </a:xfrm>
+          <a:prstGeom prst="rect">
+            <a:avLst/>
+          </a:prstGeom>
+          <a:noFill/>
+          <a:ln/>
+        </p:spPr>
+        <p:txBody>
+          <a:bodyPr wrap="square" lIns="0" tIns="0" rIns="0" bIns="0" rtlCol="0" anchor="t"/>
+          <a:lstStyle/>
+          <a:p>
+            <a:pPr indent="0" marL="0">
+              <a:buNone/>
+            </a:pPr>
+            <a:r>
+              <a:rPr lang="en-US" sz="1300" dirty="0">
+                <a:solidFill>
+                  <a:srgbClr val="15232A"/>
+                </a:solidFill>
+                <a:latin typeface="Calibri" pitchFamily="34" charset="0"/>
+                <a:ea typeface="Calibri" pitchFamily="34" charset="-122"/>
+                <a:cs typeface="Calibri" pitchFamily="34" charset="-120"/>
+              </a:rPr>
+              <a:t>Likely software as a medical device under India's Medical Devices Rules 2017 (CDSCO draft guidance, Oct 2025). Real data falls under the DPDP Act 2023 and Rules 2025.</a:t>
+            </a:r>
+            <a:endParaRPr lang="en-US" sz="1300" dirty="0"/>
+          </a:p>
+        </p:txBody>
+      </p:sp>
+      <p:sp>
+        <p:nvSpPr>
+          <p:cNvPr id="12" name="Text 10"/>
+          <p:cNvSpPr txBox="1"/>
+          <p:nvPr/>
+        </p:nvSpPr>
+        <p:spPr>
+          <a:xfrm>
+            <a:off x="548640" y="3977640"/>
+            <a:ext cx="5486400" cy="365760"/>
+          </a:xfrm>
+          <a:prstGeom prst="rect">
+            <a:avLst/>
+          </a:prstGeom>
+          <a:noFill/>
+          <a:ln/>
+        </p:spPr>
+        <p:txBody>
+          <a:bodyPr wrap="square" lIns="0" tIns="0" rIns="0" bIns="0" rtlCol="0" anchor="t"/>
+          <a:lstStyle/>
+          <a:p>
+            <a:pPr indent="0" marL="0">
+              <a:buNone/>
+            </a:pPr>
+            <a:r>
+              <a:rPr lang="en-US" sz="1700" b="1" dirty="0">
+                <a:solidFill>
+                  <a:srgbClr val="0D5F73"/>
+                </a:solidFill>
+                <a:latin typeface="Calibri" pitchFamily="34" charset="0"/>
+                <a:ea typeface="Calibri" pitchFamily="34" charset="-122"/>
+                <a:cs typeface="Calibri" pitchFamily="34" charset="-120"/>
+              </a:rPr>
+              <a:t>Next steps</a:t>
+            </a:r>
+            <a:endParaRPr lang="en-US" sz="1700" dirty="0"/>
+          </a:p>
+        </p:txBody>
+      </p:sp>
+      <p:sp>
+        <p:nvSpPr>
+          <p:cNvPr id="13" name="Text 11"/>
+          <p:cNvSpPr txBox="1"/>
+          <p:nvPr/>
+        </p:nvSpPr>
+        <p:spPr>
+          <a:xfrm>
+            <a:off x="548640" y="4389120"/>
+            <a:ext cx="11064240" cy="1828800"/>
+          </a:xfrm>
+          <a:prstGeom prst="rect">
+            <a:avLst/>
+          </a:prstGeom>
+          <a:noFill/>
+          <a:ln/>
+        </p:spPr>
+        <p:txBody>
+          <a:bodyPr wrap="square" lIns="0" tIns="0" rIns="0" bIns="0" rtlCol="0" anchor="t"/>
+          <a:lstStyle/>
+          <a:p>
+            <a:pPr marL="203200" indent="-203200">
+              <a:spcAft>
+                <a:spcPts val="600"/>
+              </a:spcAft>
+              <a:buSzPct val="100000"/>
+              <a:buChar char="•"/>
+            </a:pPr>
+            <a:r>
+              <a:rPr lang="en-US" sz="1400" dirty="0">
+                <a:solidFill>
+                  <a:srgbClr val="15232A"/>
+                </a:solidFill>
+                <a:latin typeface="Calibri" pitchFamily="34" charset="0"/>
+                <a:ea typeface="Calibri" pitchFamily="34" charset="-122"/>
+                <a:cs typeface="Calibri" pitchFamily="34" charset="-120"/>
+              </a:rPr>
+              <a:t>Let clinicians set the alert budget per programme; add escalation for unacknowledged alerts</a:t>
+            </a:r>
+            <a:endParaRPr lang="en-US" sz="1500" dirty="0"/>
+          </a:p>
+          <a:p>
+            <a:pPr marL="203200" indent="-203200">
+              <a:spcAft>
+                <a:spcPts val="600"/>
+              </a:spcAft>
+              <a:buSzPct val="100000"/>
+              <a:buChar char="•"/>
+            </a:pPr>
+            <a:r>
+              <a:rPr lang="en-US" sz="1400" dirty="0">
+                <a:solidFill>
+                  <a:srgbClr val="15232A"/>
+                </a:solidFill>
+                <a:latin typeface="Calibri" pitchFamily="34" charset="0"/>
+                <a:ea typeface="Calibri" pitchFamily="34" charset="-122"/>
+                <a:cs typeface="Calibri" pitchFamily="34" charset="-120"/>
+              </a:rPr>
+              <a:t>Device-specific noise models (autocorrelated error) and validation on noisier sensors</a:t>
+            </a:r>
+            <a:endParaRPr lang="en-US" sz="1500" dirty="0"/>
+          </a:p>
+          <a:p>
+            <a:pPr marL="203200" indent="-203200">
+              <a:spcAft>
+                <a:spcPts val="600"/>
+              </a:spcAft>
+              <a:buSzPct val="100000"/>
+              <a:buChar char="•"/>
+            </a:pPr>
+            <a:r>
+              <a:rPr lang="en-US" sz="1400" dirty="0">
+                <a:solidFill>
+                  <a:srgbClr val="15232A"/>
+                </a:solidFill>
+                <a:latin typeface="Calibri" pitchFamily="34" charset="0"/>
+                <a:ea typeface="Calibri" pitchFamily="34" charset="-122"/>
+                <a:cs typeface="Calibri" pitchFamily="34" charset="-120"/>
+              </a:rPr>
+              <a:t>A prospective, observation-only pilot with an Indian diabetes clinic (forecasts hidden from care until validated)</a:t>
+            </a:r>
+            <a:endParaRPr lang="en-US" sz="1500" dirty="0"/>
+          </a:p>
+          <a:p>
+            <a:pPr marL="203200" indent="-203200">
+              <a:spcAft>
+                <a:spcPts val="600"/>
+              </a:spcAft>
+              <a:buSzPct val="100000"/>
+              <a:buChar char="•"/>
+            </a:pPr>
+            <a:r>
+              <a:rPr lang="en-US" sz="1400" dirty="0">
+                <a:solidFill>
+                  <a:srgbClr val="15232A"/>
+                </a:solidFill>
+                <a:latin typeface="Calibri" pitchFamily="34" charset="0"/>
+                <a:ea typeface="Calibri" pitchFamily="34" charset="-122"/>
+                <a:cs typeface="Calibri" pitchFamily="34" charset="-120"/>
+              </a:rPr>
+              <a:t>Interoperability: CGM vendor APIs and ABDM-compliant FHIR exchange</a:t>
+            </a:r>
+            <a:endParaRPr lang="en-US" sz="1500" dirty="0"/>
+          </a:p>
+        </p:txBody>
+      </p:sp>
+      <p:sp>
+        <p:nvSpPr>
+          <p:cNvPr id="25" name="Slide Number Placeholder 0"/>
+          <p:cNvSpPr>
+            <a:spLocks noGrp="1"/>
+          </p:cNvSpPr>
+          <p:nvPr>
+            <p:ph type="sldNum" sz="quarter" idx="4294967295"/>
+          </p:nvPr>
+        </p:nvSpPr>
+        <p:spPr>
+          <a:xfrm>
+            <a:off x="11201400" y="6419088"/>
+            <a:ext cx="457200" cy="274320"/>
+          </a:xfrm>
+          <a:prstGeom prst="rect">
+            <a:avLst/>
+          </a:prstGeom>
+          <a:extLst>
+            <a:ext uri="{C572A759-6A51-4108-AA02-DFA0A04FC94B}">
+              <ma14:wrappingTextBoxFlag xmlns:ma14="http://schemas.microsoft.com/office/mac/drawingml/2011/main" val="0"/>
+            </a:ext>
+          </a:extLst>
+        </p:spPr>
+        <p:txBody>
+          <a:bodyPr/>
+          <a:lstStyle>
+            <a:lvl1pPr>
+              <a:defRPr sz="900">
+                <a:solidFill>
+                  <a:srgbClr val="56676F"/>
+                </a:solidFill>
+                <a:latin typeface="Calibri"/>
+                <a:ea typeface="Calibri"/>
+                <a:cs typeface="Calibri"/>
+              </a:defRPr>
+            </a:lvl1pPr>
+          </a:lstStyle>
+          <a:p>
+            <a:pPr algn="r"/>
+            <a:fld id="{F7021451-1387-4CA6-816F-3879F97B5CBC}" type="slidenum">
+              <a:rPr b="0" lang="en-US"/>
+              <a:t>18</a:t>
+            </a:fld>
+            <a:endParaRPr lang="en-US"/>
+          </a:p>
+        </p:txBody>
+      </p:sp>
+    </p:spTree>
+  </p:cSld>
+  <p:clrMapOvr>
+    <a:masterClrMapping/>
+  </p:clrMapOvr>
+</p:sld>
+</file>
+
+<file path=ppt/slides/slide19.xml><?xml version="1.0" encoding="utf-8"?>
+<p:sld xmlns:a="http://schemas.openxmlformats.org/drawingml/2006/main" xmlns:r="http://schemas.openxmlformats.org/officeDocument/2006/relationships" xmlns:p="http://schemas.openxmlformats.org/presentationml/2006/main">
+  <p:cSld name="Slide 19">
+    <p:spTree>
+      <p:nvGrpSpPr>
+        <p:cNvPr id="1" name=""/>
+        <p:cNvGrpSpPr/>
+        <p:nvPr/>
+      </p:nvGrpSpPr>
+      <p:grpSpPr>
+        <a:xfrm>
+          <a:off x="0" y="0"/>
+          <a:ext cx="0" cy="0"/>
+          <a:chOff x="0" y="0"/>
+          <a:chExt cx="0" cy="0"/>
+        </a:xfrm>
+      </p:grpSpPr>
+      <p:sp>
+        <p:nvSpPr>
+          <p:cNvPr id="2" name="Text 0"/>
+          <p:cNvSpPr/>
+          <p:nvPr>
+            <p:ph idx="100" type="title" hasCustomPrompt="1"/>
+          </p:nvPr>
+        </p:nvSpPr>
+        <p:spPr>
+          <a:xfrm>
             <a:off x="731520" y="2011680"/>
             <a:ext cx="10698480" cy="1188720"/>
           </a:xfrm>
@@ -12070,7 +12062,7 @@
                 <a:ea typeface="Calibri" pitchFamily="34" charset="-122"/>
                 <a:cs typeface="Calibri" pitchFamily="34" charset="-120"/>
               </a:rPr>
-              <a:t>60-min forecast error vs last value carried forward on 20 unseen patients (95% CI -6.46 to -4.24 mg/dL)</a:t>
+              <a:t>60-min forecast error vs last value carried forward on 20 unseen patients (95% CI -6.30 to -4.12 mg/dL)</a:t>
             </a:r>
             <a:endParaRPr lang="en-US" sz="1300" dirty="0"/>
           </a:p>
@@ -12187,7 +12179,7 @@
                 <a:ea typeface="Cambria" pitchFamily="34" charset="-122"/>
                 <a:cs typeface="Cambria" pitchFamily="34" charset="-120"/>
               </a:rPr>
-              <a:t>65%</a:t>
+              <a:t>83%</a:t>
             </a:r>
             <a:endParaRPr lang="en-US" sz="4400" dirty="0"/>
           </a:p>
@@ -12226,7 +12218,7 @@
                 <a:ea typeface="Calibri" pitchFamily="34" charset="-122"/>
                 <a:cs typeface="Calibri" pitchFamily="34" charset="-120"/>
               </a:rPr>
-              <a:t>of rises above 180 mg/dL flagged ≥ 30 min ahead, at 1.51 false alerts per patient-day</a:t>
+              <a:t>of hypoglycaemia episodes flagged in advance, with 1.9 alerts per patient-day in total (v1: 7.9)</a:t>
             </a:r>
             <a:endParaRPr lang="en-US" sz="1300" dirty="0"/>
           </a:p>
@@ -12269,7 +12261,7 @@
                 <a:ea typeface="Calibri" pitchFamily="34" charset="-122"/>
                 <a:cs typeface="Calibri" pitchFamily="34" charset="-120"/>
               </a:rPr>
-              <a:t>A per-patient twin: clinical record + CGM + medication and meal logs, updated on every reading, scoring every forecast when its outcome arrives</a:t>
+              <a:t>A per-patient twin: clinical record + CGM + medication and meal logs, updated on every reading, scoring every forecast when its outcome arrives; v2 is robust to sensor noise</a:t>
             </a:r>
             <a:endParaRPr lang="en-US" sz="1500" dirty="0"/>
           </a:p>
@@ -12311,7 +12303,7 @@
                 <a:ea typeface="Calibri" pitchFamily="34" charset="-122"/>
                 <a:cs typeface="Calibri" pitchFamily="34" charset="-120"/>
               </a:rPr>
-              <a:t>Validated twice: held-out ShanghaiT2DM patients (scored once, locked) and an external US cohort (CGMacros): 60-min MAE 16.9 vs 22.4 mg/dL in T2D</a:t>
+              <a:t>Validated twice: held-out ShanghaiT2DM patients (scored once, locked) and an external US cohort (CGMacros): 60-min MAE 17.2 vs 22.4 mg/dL in T2D</a:t>
             </a:r>
             <a:endParaRPr lang="en-US" sz="1500" dirty="0"/>
           </a:p>

--- a/docs/Pratirup_Presentation.pptx
+++ b/docs/Pratirup_Presentation.pptx
@@ -125,27 +125,27 @@
   <p:extLst>
     <p:ext uri="{521415D9-36F7-43E2-AB2F-B90AF26B5E84}">
       <p14:sectionLst xmlns:p14="http://schemas.microsoft.com/office/powerpoint/2010/main">
-        <p14:section name="Opening" id="{01ccd4fa-d8d2-dbf2-03bb-b2f4ca0f6ba2}">
+        <p14:section name="Opening" id="{d3799939-6c4e-b7ae-3243-bf28d30a81cb}">
           <p14:sldIdLst>
             <p14:sldId id="256"/>
             <p14:sldId id="257"/>
           </p14:sldIdLst>
         </p14:section>
-        <p14:section name="Problem" id="{ea331a30-97e4-303b-d878-128be1a2f9ec}">
+        <p14:section name="Problem" id="{f2e6c315-e8c7-620f-4934-35323dc144af}">
           <p14:sldIdLst>
             <p14:sldId id="258"/>
             <p14:sldId id="259"/>
             <p14:sldId id="260"/>
           </p14:sldIdLst>
         </p14:section>
-        <p14:section name="Solution" id="{3a25caf8-446a-3681-4f7e-3e19b1c9a15d}">
+        <p14:section name="Solution" id="{b4b9d257-5495-a3e8-c45d-bc215b9d504a}">
           <p14:sldIdLst>
             <p14:sldId id="261"/>
             <p14:sldId id="262"/>
             <p14:sldId id="263"/>
           </p14:sldIdLst>
         </p14:section>
-        <p14:section name="Evidence" id="{2b0643ec-1c92-f8a2-c8af-45afe73c4053}">
+        <p14:section name="Evidence" id="{e493628a-a89d-29a2-8499-397f3cfe5e2a}">
           <p14:sldIdLst>
             <p14:sldId id="264"/>
             <p14:sldId id="265"/>
@@ -156,7 +156,7 @@
             <p14:sldId id="270"/>
           </p14:sldIdLst>
         </p14:section>
-        <p14:section name="Product" id="{1cbf5f43-b435-a26f-da74-447e17152f07}">
+        <p14:section name="Product" id="{7868e36b-1e17-c806-4f10-38cfda31d33a}">
           <p14:sldIdLst>
             <p14:sldId id="271"/>
             <p14:sldId id="272"/>
